--- a/slides/smf/cartel_pinn_siren_2d.pptx
+++ b/slides/smf/cartel_pinn_siren_2d.pptx
@@ -1,26 +1,126 @@
 
 <file path=ppt/presentation.xml><?xml version="1.0" encoding="utf-8"?>
-<p:presentation xmlns:p="http://schemas.openxmlformats.org/presentationml/2006/main">
+<p:presentation xmlns:a="http://schemas.openxmlformats.org/drawingml/2006/main" xmlns:r="http://schemas.openxmlformats.org/officeDocument/2006/relationships" xmlns:p="http://schemas.openxmlformats.org/presentationml/2006/main">
   <p:sldMasterIdLst>
-    <p:sldMasterId xmlns:r="http://schemas.openxmlformats.org/officeDocument/2006/relationships" id="2147483648" r:id="R8f3f1dd71e684ab5"/>
+    <p:sldMasterId id="2147483648" r:id="rId1"/>
   </p:sldMasterIdLst>
   <p:notesMasterIdLst>
-    <p:notesMasterId xmlns:r="http://schemas.openxmlformats.org/officeDocument/2006/relationships" r:id="R01fa7c5b3516407e"/>
+    <p:notesMasterId r:id="rId3"/>
   </p:notesMasterIdLst>
   <p:sldIdLst>
-    <p:sldId xmlns:r="http://schemas.openxmlformats.org/officeDocument/2006/relationships" id="256" r:id="R3231c79bc74a4755"/>
+    <p:sldId id="256" r:id="rId2"/>
   </p:sldIdLst>
   <p:sldSz cx="32399288" cy="46799500"/>
   <p:notesSz cx="6858000" cy="9144000"/>
+  <p:defaultTextStyle>
+    <a:defPPr>
+      <a:defRPr lang="es-MX"/>
+    </a:defPPr>
+    <a:lvl1pPr marL="0" algn="l" defTabSz="914400" rtl="0" eaLnBrk="1" latinLnBrk="0" hangingPunct="1">
+      <a:defRPr sz="1800" kern="1200">
+        <a:solidFill>
+          <a:schemeClr val="tx1"/>
+        </a:solidFill>
+        <a:latin typeface="+mn-lt"/>
+        <a:ea typeface="+mn-ea"/>
+        <a:cs typeface="+mn-cs"/>
+      </a:defRPr>
+    </a:lvl1pPr>
+    <a:lvl2pPr marL="457200" algn="l" defTabSz="914400" rtl="0" eaLnBrk="1" latinLnBrk="0" hangingPunct="1">
+      <a:defRPr sz="1800" kern="1200">
+        <a:solidFill>
+          <a:schemeClr val="tx1"/>
+        </a:solidFill>
+        <a:latin typeface="+mn-lt"/>
+        <a:ea typeface="+mn-ea"/>
+        <a:cs typeface="+mn-cs"/>
+      </a:defRPr>
+    </a:lvl2pPr>
+    <a:lvl3pPr marL="914400" algn="l" defTabSz="914400" rtl="0" eaLnBrk="1" latinLnBrk="0" hangingPunct="1">
+      <a:defRPr sz="1800" kern="1200">
+        <a:solidFill>
+          <a:schemeClr val="tx1"/>
+        </a:solidFill>
+        <a:latin typeface="+mn-lt"/>
+        <a:ea typeface="+mn-ea"/>
+        <a:cs typeface="+mn-cs"/>
+      </a:defRPr>
+    </a:lvl3pPr>
+    <a:lvl4pPr marL="1371600" algn="l" defTabSz="914400" rtl="0" eaLnBrk="1" latinLnBrk="0" hangingPunct="1">
+      <a:defRPr sz="1800" kern="1200">
+        <a:solidFill>
+          <a:schemeClr val="tx1"/>
+        </a:solidFill>
+        <a:latin typeface="+mn-lt"/>
+        <a:ea typeface="+mn-ea"/>
+        <a:cs typeface="+mn-cs"/>
+      </a:defRPr>
+    </a:lvl4pPr>
+    <a:lvl5pPr marL="1828800" algn="l" defTabSz="914400" rtl="0" eaLnBrk="1" latinLnBrk="0" hangingPunct="1">
+      <a:defRPr sz="1800" kern="1200">
+        <a:solidFill>
+          <a:schemeClr val="tx1"/>
+        </a:solidFill>
+        <a:latin typeface="+mn-lt"/>
+        <a:ea typeface="+mn-ea"/>
+        <a:cs typeface="+mn-cs"/>
+      </a:defRPr>
+    </a:lvl5pPr>
+    <a:lvl6pPr marL="2286000" algn="l" defTabSz="914400" rtl="0" eaLnBrk="1" latinLnBrk="0" hangingPunct="1">
+      <a:defRPr sz="1800" kern="1200">
+        <a:solidFill>
+          <a:schemeClr val="tx1"/>
+        </a:solidFill>
+        <a:latin typeface="+mn-lt"/>
+        <a:ea typeface="+mn-ea"/>
+        <a:cs typeface="+mn-cs"/>
+      </a:defRPr>
+    </a:lvl6pPr>
+    <a:lvl7pPr marL="2743200" algn="l" defTabSz="914400" rtl="0" eaLnBrk="1" latinLnBrk="0" hangingPunct="1">
+      <a:defRPr sz="1800" kern="1200">
+        <a:solidFill>
+          <a:schemeClr val="tx1"/>
+        </a:solidFill>
+        <a:latin typeface="+mn-lt"/>
+        <a:ea typeface="+mn-ea"/>
+        <a:cs typeface="+mn-cs"/>
+      </a:defRPr>
+    </a:lvl7pPr>
+    <a:lvl8pPr marL="3200400" algn="l" defTabSz="914400" rtl="0" eaLnBrk="1" latinLnBrk="0" hangingPunct="1">
+      <a:defRPr sz="1800" kern="1200">
+        <a:solidFill>
+          <a:schemeClr val="tx1"/>
+        </a:solidFill>
+        <a:latin typeface="+mn-lt"/>
+        <a:ea typeface="+mn-ea"/>
+        <a:cs typeface="+mn-cs"/>
+      </a:defRPr>
+    </a:lvl8pPr>
+    <a:lvl9pPr marL="3657600" algn="l" defTabSz="914400" rtl="0" eaLnBrk="1" latinLnBrk="0" hangingPunct="1">
+      <a:defRPr sz="1800" kern="1200">
+        <a:solidFill>
+          <a:schemeClr val="tx1"/>
+        </a:solidFill>
+        <a:latin typeface="+mn-lt"/>
+        <a:ea typeface="+mn-ea"/>
+        <a:cs typeface="+mn-cs"/>
+      </a:defRPr>
+    </a:lvl9pPr>
+  </p:defaultTextStyle>
+  <p:extLst>
+    <p:ext uri="{EFAFB233-063F-42B5-8137-9DF3F51BA10A}">
+      <p15:sldGuideLst xmlns:p15="http://schemas.microsoft.com/office/powerpoint/2012/main"/>
+    </p:ext>
+  </p:extLst>
 </p:presentation>
 </file>
 
 <file path=ppt/notesMasters/notesMaster1.xml><?xml version="1.0" encoding="utf-8"?>
-<p:notesMaster xmlns:p="http://schemas.openxmlformats.org/presentationml/2006/main">
+<p:notesMaster xmlns:a="http://schemas.openxmlformats.org/drawingml/2006/main" xmlns:r="http://schemas.openxmlformats.org/officeDocument/2006/relationships" xmlns:p="http://schemas.openxmlformats.org/presentationml/2006/main">
   <p:cSld>
     <p:bg>
       <p:bgRef idx="1001">
-        <a:schemeClr xmlns:a="http://schemas.openxmlformats.org/drawingml/2006/main" val="bg1"/>
+        <a:schemeClr val="bg1"/>
       </p:bgRef>
     </p:bg>
     <p:spTree>
@@ -30,386 +130,164 @@
         <p:nvPr/>
       </p:nvGrpSpPr>
       <p:grpSpPr>
-        <a:xfrm xmlns:a="http://schemas.openxmlformats.org/drawingml/2006/main"/>
+        <a:xfrm>
+          <a:off x="0" y="0"/>
+          <a:ext cx="0" cy="0"/>
+          <a:chOff x="0" y="0"/>
+          <a:chExt cx="0" cy="0"/>
+        </a:xfrm>
       </p:grpSpPr>
       <p:sp>
         <p:nvSpPr>
           <p:cNvPr id="2" name="Header Placeholder"/>
-          <p:cNvSpPr/>
+          <p:cNvSpPr>
+            <a:spLocks noGrp="1"/>
+          </p:cNvSpPr>
           <p:nvPr>
             <p:ph type="hdr" sz="quarter"/>
           </p:nvPr>
         </p:nvSpPr>
         <p:spPr>
-          <a:prstGeom xmlns:a="http://schemas.openxmlformats.org/drawingml/2006/main" prst="rect">
+          <a:prstGeom prst="rect">
             <a:avLst/>
           </a:prstGeom>
         </p:spPr>
         <p:txBody>
-          <a:bodyPr xmlns:a="http://schemas.openxmlformats.org/drawingml/2006/main"/>
-          <a:lstStyle xmlns:a="http://schemas.openxmlformats.org/drawingml/2006/main"/>
-          <a:p xmlns:a="http://schemas.openxmlformats.org/drawingml/2006/main"/>
+          <a:bodyPr/>
+          <a:lstStyle/>
+          <a:p>
+            <a:endParaRPr/>
+          </a:p>
         </p:txBody>
       </p:sp>
       <p:sp>
         <p:nvSpPr>
           <p:cNvPr id="3" name="Date Placeholder"/>
-          <p:cNvSpPr/>
+          <p:cNvSpPr>
+            <a:spLocks noGrp="1"/>
+          </p:cNvSpPr>
           <p:nvPr>
             <p:ph type="dt" sz="quarter" idx="1"/>
           </p:nvPr>
         </p:nvSpPr>
         <p:spPr>
-          <a:prstGeom xmlns:a="http://schemas.openxmlformats.org/drawingml/2006/main" prst="rect">
+          <a:prstGeom prst="rect">
             <a:avLst/>
           </a:prstGeom>
         </p:spPr>
         <p:txBody>
-          <a:bodyPr xmlns:a="http://schemas.openxmlformats.org/drawingml/2006/main"/>
-          <a:lstStyle xmlns:a="http://schemas.openxmlformats.org/drawingml/2006/main"/>
-          <a:p xmlns:a="http://schemas.openxmlformats.org/drawingml/2006/main"/>
+          <a:bodyPr/>
+          <a:lstStyle/>
+          <a:p>
+            <a:endParaRPr/>
+          </a:p>
         </p:txBody>
       </p:sp>
       <p:sp>
         <p:nvSpPr>
           <p:cNvPr id="4" name="Slide Image Placeholder"/>
-          <p:cNvSpPr/>
+          <p:cNvSpPr>
+            <a:spLocks noGrp="1" noRot="1" noChangeAspect="1"/>
+          </p:cNvSpPr>
           <p:nvPr>
             <p:ph type="sldImg" idx="2"/>
           </p:nvPr>
         </p:nvSpPr>
         <p:spPr>
-          <a:prstGeom xmlns:a="http://schemas.openxmlformats.org/drawingml/2006/main" prst="rect">
+          <a:prstGeom prst="rect">
             <a:avLst/>
           </a:prstGeom>
         </p:spPr>
         <p:txBody>
-          <a:bodyPr xmlns:a="http://schemas.openxmlformats.org/drawingml/2006/main"/>
-          <a:lstStyle xmlns:a="http://schemas.openxmlformats.org/drawingml/2006/main"/>
-          <a:p xmlns:a="http://schemas.openxmlformats.org/drawingml/2006/main"/>
+          <a:bodyPr/>
+          <a:lstStyle/>
+          <a:p>
+            <a:endParaRPr/>
+          </a:p>
         </p:txBody>
       </p:sp>
       <p:sp>
         <p:nvSpPr>
           <p:cNvPr id="5" name="Notes Placeholder"/>
-          <p:cNvSpPr/>
+          <p:cNvSpPr>
+            <a:spLocks noGrp="1"/>
+          </p:cNvSpPr>
           <p:nvPr>
             <p:ph type="body" sz="quarter" idx="3"/>
           </p:nvPr>
         </p:nvSpPr>
         <p:spPr>
-          <a:prstGeom xmlns:a="http://schemas.openxmlformats.org/drawingml/2006/main" prst="rect">
+          <a:prstGeom prst="rect">
             <a:avLst/>
           </a:prstGeom>
         </p:spPr>
         <p:txBody>
-          <a:bodyPr xmlns:a="http://schemas.openxmlformats.org/drawingml/2006/main"/>
-          <a:lstStyle xmlns:a="http://schemas.openxmlformats.org/drawingml/2006/main"/>
-          <a:p xmlns:a="http://schemas.openxmlformats.org/drawingml/2006/main"/>
+          <a:bodyPr/>
+          <a:lstStyle/>
+          <a:p>
+            <a:endParaRPr/>
+          </a:p>
         </p:txBody>
       </p:sp>
       <p:sp>
         <p:nvSpPr>
           <p:cNvPr id="6" name="Footer Placeholder"/>
-          <p:cNvSpPr/>
+          <p:cNvSpPr>
+            <a:spLocks noGrp="1"/>
+          </p:cNvSpPr>
           <p:nvPr>
             <p:ph type="ftr" sz="quarter" idx="4"/>
           </p:nvPr>
         </p:nvSpPr>
         <p:spPr>
-          <a:prstGeom xmlns:a="http://schemas.openxmlformats.org/drawingml/2006/main" prst="rect">
+          <a:prstGeom prst="rect">
             <a:avLst/>
           </a:prstGeom>
         </p:spPr>
         <p:txBody>
-          <a:bodyPr xmlns:a="http://schemas.openxmlformats.org/drawingml/2006/main"/>
-          <a:lstStyle xmlns:a="http://schemas.openxmlformats.org/drawingml/2006/main"/>
-          <a:p xmlns:a="http://schemas.openxmlformats.org/drawingml/2006/main"/>
+          <a:bodyPr/>
+          <a:lstStyle/>
+          <a:p>
+            <a:endParaRPr/>
+          </a:p>
         </p:txBody>
       </p:sp>
       <p:sp>
         <p:nvSpPr>
           <p:cNvPr id="7" name="Slide Number Placeholder"/>
-          <p:cNvSpPr/>
+          <p:cNvSpPr>
+            <a:spLocks noGrp="1"/>
+          </p:cNvSpPr>
           <p:nvPr>
             <p:ph type="sldNum" sz="quarter" idx="5"/>
           </p:nvPr>
         </p:nvSpPr>
         <p:spPr>
-          <a:prstGeom xmlns:a="http://schemas.openxmlformats.org/drawingml/2006/main" prst="rect">
+          <a:prstGeom prst="rect">
             <a:avLst/>
           </a:prstGeom>
         </p:spPr>
         <p:txBody>
-          <a:bodyPr xmlns:a="http://schemas.openxmlformats.org/drawingml/2006/main"/>
-          <a:lstStyle xmlns:a="http://schemas.openxmlformats.org/drawingml/2006/main"/>
-          <a:p xmlns:a="http://schemas.openxmlformats.org/drawingml/2006/main"/>
+          <a:bodyPr/>
+          <a:lstStyle/>
+          <a:p>
+            <a:endParaRPr/>
+          </a:p>
         </p:txBody>
       </p:sp>
     </p:spTree>
   </p:cSld>
   <p:clrMap bg1="lt1" tx1="dk1" bg2="lt2" tx2="dk2" accent1="accent1" accent2="accent2" accent3="accent3" accent4="accent4" accent5="accent5" accent6="accent6" hlink="hlink" folHlink="folHlink"/>
   <p:notesStyle>
-    <a:lvl1pPr xmlns:a="http://schemas.openxmlformats.org/drawingml/2006/main" marL="0" algn="l" defTabSz="914400" rtl="0" eaLnBrk="1" latinLnBrk="0" hangingPunct="1">
+    <a:lvl1pPr marL="0" algn="l" defTabSz="914400" rtl="0" eaLnBrk="1" latinLnBrk="0" hangingPunct="1">
       <a:defRPr sz="1200" kern="1200"/>
     </a:lvl1pPr>
   </p:notesStyle>
 </p:notesMaster>
 </file>
 
-<file path=ppt/notesMasters/theme/theme3.xml><?xml version="1.0" encoding="utf-8"?>
-<a:theme xmlns:a="http://schemas.openxmlformats.org/drawingml/2006/main" name="Tema de Office">
-  <a:themeElements>
-    <a:clrScheme name="Tema de Office">
-      <a:dk1>
-        <a:sysClr val="windowText" lastClr="000000"/>
-      </a:dk1>
-      <a:lt1>
-        <a:sysClr val="window" lastClr="FFFFFF"/>
-      </a:lt1>
-      <a:dk2>
-        <a:srgbClr val="44546A"/>
-      </a:dk2>
-      <a:lt2>
-        <a:srgbClr val="E7E6E6"/>
-      </a:lt2>
-      <a:accent1>
-        <a:srgbClr val="4472C4"/>
-      </a:accent1>
-      <a:accent2>
-        <a:srgbClr val="ED7D31"/>
-      </a:accent2>
-      <a:accent3>
-        <a:srgbClr val="A5A5A5"/>
-      </a:accent3>
-      <a:accent4>
-        <a:srgbClr val="FFC000"/>
-      </a:accent4>
-      <a:accent5>
-        <a:srgbClr val="5B9BD5"/>
-      </a:accent5>
-      <a:accent6>
-        <a:srgbClr val="70AD47"/>
-      </a:accent6>
-      <a:hlink>
-        <a:srgbClr val="0563C1"/>
-      </a:hlink>
-      <a:folHlink>
-        <a:srgbClr val="954F72"/>
-      </a:folHlink>
-    </a:clrScheme>
-    <a:fontScheme name="Tema de Office">
-      <a:majorFont>
-        <a:latin typeface="Calibri Light"/>
-        <a:ea typeface=""/>
-        <a:cs typeface=""/>
-        <a:font script="Jpan" typeface="游ゴシック Light"/>
-        <a:font script="Hang" typeface="맑은 고딕"/>
-        <a:font script="Hans" typeface="等线 Light"/>
-        <a:font script="Hant" typeface="新細明體"/>
-        <a:font script="Arab" typeface="Times New Roman"/>
-        <a:font script="Hebr" typeface="Times New Roman"/>
-        <a:font script="Thai" typeface="Angsana New"/>
-        <a:font script="Ethi" typeface="Nyala"/>
-        <a:font script="Beng" typeface="Vrinda"/>
-        <a:font script="Gujr" typeface="Shruti"/>
-        <a:font script="Khmr" typeface="MoolBoran"/>
-        <a:font script="Knda" typeface="Tunga"/>
-        <a:font script="Guru" typeface="Raavi"/>
-        <a:font script="Cans" typeface="Euphemia"/>
-        <a:font script="Cher" typeface="Plantagenet Cherokee"/>
-        <a:font script="Yiii" typeface="Microsoft Yi Baiti"/>
-        <a:font script="Tibt" typeface="Microsoft Himalaya"/>
-        <a:font script="Thaa" typeface="MV Boli"/>
-        <a:font script="Deva" typeface="Mangal"/>
-        <a:font script="Telu" typeface="Gautami"/>
-        <a:font script="Taml" typeface="Latha"/>
-        <a:font script="Syrc" typeface="Estrangelo Edessa"/>
-        <a:font script="Orya" typeface="Kalinga"/>
-        <a:font script="Mlym" typeface="Kartika"/>
-        <a:font script="Laoo" typeface="DokChampa"/>
-        <a:font script="Sinh" typeface="Iskoola Pota"/>
-        <a:font script="Mong" typeface="Mongolian Baiti"/>
-        <a:font script="Viet" typeface="Times New Roman"/>
-        <a:font script="Uigh" typeface="Microsoft Uighur"/>
-        <a:font script="Geor" typeface="Sylfaen"/>
-      </a:majorFont>
-      <a:minorFont>
-        <a:latin typeface="Calibri"/>
-        <a:ea typeface=""/>
-        <a:cs typeface=""/>
-        <a:font script="Jpan" typeface="游ゴシック"/>
-        <a:font script="Hang" typeface="맑은 고딕"/>
-        <a:font script="Hans" typeface="等线"/>
-        <a:font script="Hant" typeface="新細明體"/>
-        <a:font script="Arab" typeface="Arial"/>
-        <a:font script="Hebr" typeface="Arial"/>
-        <a:font script="Thai" typeface="Cordia New"/>
-        <a:font script="Ethi" typeface="Nyala"/>
-        <a:font script="Beng" typeface="Vrinda"/>
-        <a:font script="Gujr" typeface="Shruti"/>
-        <a:font script="Khmr" typeface="DaunPenh"/>
-        <a:font script="Knda" typeface="Tunga"/>
-        <a:font script="Guru" typeface="Raavi"/>
-        <a:font script="Cans" typeface="Euphemia"/>
-        <a:font script="Cher" typeface="Plantagenet Cherokee"/>
-        <a:font script="Yiii" typeface="Microsoft Yi Baiti"/>
-        <a:font script="Tibt" typeface="Microsoft Himalaya"/>
-        <a:font script="Thaa" typeface="MV Boli"/>
-        <a:font script="Deva" typeface="Mangal"/>
-        <a:font script="Telu" typeface="Gautami"/>
-        <a:font script="Taml" typeface="Latha"/>
-        <a:font script="Syrc" typeface="Estrangelo Edessa"/>
-        <a:font script="Orya" typeface="Kalinga"/>
-        <a:font script="Mlym" typeface="Kartika"/>
-        <a:font script="Laoo" typeface="DokChampa"/>
-        <a:font script="Sinh" typeface="Iskoola Pota"/>
-        <a:font script="Mong" typeface="Mongolian Baiti"/>
-        <a:font script="Viet" typeface="Arial"/>
-        <a:font script="Uigh" typeface="Microsoft Uighur"/>
-        <a:font script="Geor" typeface="Sylfaen"/>
-      </a:minorFont>
-    </a:fontScheme>
-    <a:fmtScheme name="Tema de Office">
-      <a:fillStyleLst>
-        <a:solidFill>
-          <a:schemeClr val="phClr"/>
-        </a:solidFill>
-        <a:gradFill rotWithShape="1">
-          <a:gsLst>
-            <a:gs pos="0">
-              <a:schemeClr val="phClr">
-                <a:tint val="67000"/>
-                <a:lumMod val="110000"/>
-                <a:satMod val="105000"/>
-              </a:schemeClr>
-            </a:gs>
-            <a:gs pos="50000">
-              <a:schemeClr val="phClr">
-                <a:tint val="73000"/>
-                <a:lumMod val="105000"/>
-                <a:satMod val="103000"/>
-              </a:schemeClr>
-            </a:gs>
-            <a:gs pos="100000">
-              <a:schemeClr val="phClr">
-                <a:tint val="81000"/>
-                <a:lumMod val="105000"/>
-                <a:satMod val="109000"/>
-              </a:schemeClr>
-            </a:gs>
-          </a:gsLst>
-          <a:lin ang="5400000" scaled="0"/>
-        </a:gradFill>
-        <a:gradFill rotWithShape="1">
-          <a:gsLst>
-            <a:gs pos="0">
-              <a:schemeClr val="phClr">
-                <a:tint val="94000"/>
-                <a:lumMod val="102000"/>
-                <a:satMod val="103000"/>
-              </a:schemeClr>
-            </a:gs>
-            <a:gs pos="50000">
-              <a:schemeClr val="phClr">
-                <a:shade val="100000"/>
-                <a:lumMod val="100000"/>
-                <a:satMod val="110000"/>
-              </a:schemeClr>
-            </a:gs>
-            <a:gs pos="100000">
-              <a:schemeClr val="phClr">
-                <a:shade val="78000"/>
-                <a:lumMod val="99000"/>
-                <a:satMod val="120000"/>
-              </a:schemeClr>
-            </a:gs>
-          </a:gsLst>
-          <a:lin ang="5400000" scaled="0"/>
-        </a:gradFill>
-      </a:fillStyleLst>
-      <a:lnStyleLst>
-        <a:ln w="6350">
-          <a:solidFill>
-            <a:schemeClr val="phClr"/>
-          </a:solidFill>
-          <a:prstDash val="solid"/>
-        </a:ln>
-        <a:ln w="12700">
-          <a:solidFill>
-            <a:schemeClr val="phClr"/>
-          </a:solidFill>
-          <a:prstDash val="solid"/>
-        </a:ln>
-        <a:ln w="19050">
-          <a:solidFill>
-            <a:schemeClr val="phClr"/>
-          </a:solidFill>
-          <a:prstDash val="solid"/>
-        </a:ln>
-      </a:lnStyleLst>
-      <a:effectStyleLst>
-        <a:effectStyle>
-          <a:effectLst/>
-        </a:effectStyle>
-        <a:effectStyle>
-          <a:effectLst/>
-        </a:effectStyle>
-        <a:effectStyle>
-          <a:effectLst>
-            <a:outerShdw blurRad="57150" dist="19050" dir="5400000" algn="ctr" rotWithShape="0">
-              <a:srgbClr val="000000">
-                <a:alpha val="63000"/>
-              </a:srgbClr>
-            </a:outerShdw>
-          </a:effectLst>
-        </a:effectStyle>
-      </a:effectStyleLst>
-      <a:bgFillStyleLst>
-        <a:solidFill>
-          <a:schemeClr val="phClr"/>
-        </a:solidFill>
-        <a:solidFill>
-          <a:schemeClr val="phClr">
-            <a:tint val="95000"/>
-            <a:satMod val="170000"/>
-          </a:schemeClr>
-        </a:solidFill>
-        <a:gradFill rotWithShape="1">
-          <a:gsLst>
-            <a:gs pos="0">
-              <a:schemeClr val="phClr">
-                <a:tint val="93000"/>
-                <a:shade val="98000"/>
-                <a:lumMod val="102000"/>
-                <a:satMod val="150000"/>
-              </a:schemeClr>
-            </a:gs>
-            <a:gs pos="50000">
-              <a:schemeClr val="phClr">
-                <a:tint val="98000"/>
-                <a:shade val="90000"/>
-                <a:lumMod val="103000"/>
-                <a:satMod val="130000"/>
-              </a:schemeClr>
-            </a:gs>
-            <a:gs pos="100000">
-              <a:schemeClr val="phClr">
-                <a:shade val="63000"/>
-                <a:satMod val="120000"/>
-              </a:schemeClr>
-            </a:gs>
-          </a:gsLst>
-          <a:lin ang="5400000" scaled="0"/>
-        </a:gradFill>
-      </a:bgFillStyleLst>
-    </a:fmtScheme>
-  </a:themeElements>
-</a:theme>
-</file>
-
 <file path=ppt/notesSlides/notesSlide1.xml><?xml version="1.0" encoding="utf-8"?>
-<p:notes xmlns:p="http://schemas.openxmlformats.org/presentationml/2006/main">
+<p:notes xmlns:a="http://schemas.openxmlformats.org/drawingml/2006/main" xmlns:r="http://schemas.openxmlformats.org/officeDocument/2006/relationships" xmlns:p="http://schemas.openxmlformats.org/presentationml/2006/main">
   <p:cSld>
     <p:spTree>
       <p:nvGrpSpPr>
@@ -418,16 +296,21 @@
         <p:nvPr/>
       </p:nvGrpSpPr>
       <p:grpSpPr>
-        <a:xfrm xmlns:a="http://schemas.openxmlformats.org/drawingml/2006/main"/>
+        <a:xfrm>
+          <a:off x="0" y="0"/>
+          <a:ext cx="0" cy="0"/>
+          <a:chOff x="0" y="0"/>
+          <a:chExt cx="0" cy="0"/>
+        </a:xfrm>
       </p:grpSpPr>
       <p:sp>
         <p:nvSpPr>
           <p:cNvPr id="2" name="Slide Image Placeholder 1"/>
           <p:cNvSpPr>
-            <a:spLocks xmlns:a="http://schemas.openxmlformats.org/drawingml/2006/main" noGrp="1"/>
-          </p:cNvSpPr>
-          <p:nvPr>
-            <p:ph type="sldImg" idx="0"/>
+            <a:spLocks noGrp="1" noRot="1" noChangeAspect="1"/>
+          </p:cNvSpPr>
+          <p:nvPr>
+            <p:ph type="sldImg"/>
           </p:nvPr>
         </p:nvSpPr>
         <p:spPr/>
@@ -436,7 +319,7 @@
         <p:nvSpPr>
           <p:cNvPr id="3" name="Notes Placeholder 2"/>
           <p:cNvSpPr>
-            <a:spLocks xmlns:a="http://schemas.openxmlformats.org/drawingml/2006/main" noGrp="1"/>
+            <a:spLocks noGrp="1"/>
           </p:cNvSpPr>
           <p:nvPr>
             <p:ph type="body" idx="1"/>
@@ -444,39 +327,39 @@
         </p:nvSpPr>
         <p:spPr/>
         <p:txBody>
-          <a:bodyPr xmlns:a="http://schemas.openxmlformats.org/drawingml/2006/main"/>
-          <a:lstStyle xmlns:a="http://schemas.openxmlformats.org/drawingml/2006/main"/>
-          <a:p xmlns:a="http://schemas.openxmlformats.org/drawingml/2006/main">
+          <a:bodyPr/>
+          <a:lstStyle/>
+          <a:p>
             <a:r>
               <a:t>Cartel adaptado de la tesis hasta el caso 2D. El desarrollo 3D no forma parte de este material.</a:t>
             </a:r>
           </a:p>
-          <a:p xmlns:a="http://schemas.openxmlformats.org/drawingml/2006/main">
+          <a:p>
             <a:r>
               <a:t>[Sources]</a:t>
             </a:r>
           </a:p>
-          <a:p xmlns:a="http://schemas.openxmlformats.org/drawingml/2006/main">
+          <a:p>
             <a:r>
               <a:t>- Tesis y resultados: C:/roberto/Tesis_Maestria/tesis/Tesis_Actual/main.pdf, chapters/Cap1-Generalidades.tex, chapters/Cap3-Modelo.tex, chapters/Cap4-Resultados.tex.</a:t>
             </a:r>
           </a:p>
-          <a:p xmlns:a="http://schemas.openxmlformats.org/drawingml/2006/main">
+          <a:p>
             <a:r>
               <a:t>- Figuras: C:/roberto/Tesis_Maestria/tesis/Tesis_Actual/figures/*.png.</a:t>
             </a:r>
           </a:p>
-          <a:p xmlns:a="http://schemas.openxmlformats.org/drawingml/2006/main">
+          <a:p>
             <a:r>
               <a:t>- Título, autores y datos del congreso: C:/Users/rober/Downloads/CNF LXIX-014674.pdf.</a:t>
             </a:r>
           </a:p>
-          <a:p xmlns:a="http://schemas.openxmlformats.org/drawingml/2006/main">
+          <a:p>
             <a:r>
               <a:t>- Estructura visual y logotipos: C:/roberto/Tesis_Maestria/master_supporting_docs/supporting_slides/CARTEL/GENERACIÓN DE SONIDO MEDIANTE EFECTO TERMOACÚSTICO EMPLEANDO ÓXIDO DE GRAFENO..pptx.</a:t>
             </a:r>
           </a:p>
-          <a:p xmlns:a="http://schemas.openxmlformats.org/drawingml/2006/main">
+          <a:p>
             <a:r>
               <a:t>[/Sources]</a:t>
             </a:r>
@@ -487,7 +370,7 @@
         <p:nvSpPr>
           <p:cNvPr id="4" name="Slide Number Placeholder 3"/>
           <p:cNvSpPr>
-            <a:spLocks xmlns:a="http://schemas.openxmlformats.org/drawingml/2006/main" noGrp="1"/>
+            <a:spLocks noGrp="1"/>
           </p:cNvSpPr>
           <p:nvPr>
             <p:ph type="sldNum" idx="5"/>
@@ -495,21 +378,23 @@
         </p:nvSpPr>
         <p:spPr/>
         <p:txBody>
-          <a:bodyPr xmlns:a="http://schemas.openxmlformats.org/drawingml/2006/main"/>
-          <a:lstStyle xmlns:a="http://schemas.openxmlformats.org/drawingml/2006/main"/>
-          <a:p xmlns:a="http://schemas.openxmlformats.org/drawingml/2006/main"/>
+          <a:bodyPr/>
+          <a:lstStyle/>
+          <a:p>
+            <a:endParaRPr/>
+          </a:p>
         </p:txBody>
       </p:sp>
     </p:spTree>
   </p:cSld>
   <p:clrMapOvr>
-    <a:masterClrMapping xmlns:a="http://schemas.openxmlformats.org/drawingml/2006/main"/>
+    <a:masterClrMapping/>
   </p:clrMapOvr>
 </p:notes>
 </file>
 
 <file path=ppt/slideLayouts/slideLayout1.xml><?xml version="1.0" encoding="utf-8"?>
-<p:sldLayout xmlns:p="http://schemas.openxmlformats.org/presentationml/2006/main" type="title" preserve="1">
+<p:sldLayout xmlns:a="http://schemas.openxmlformats.org/drawingml/2006/main" xmlns:r="http://schemas.openxmlformats.org/officeDocument/2006/relationships" xmlns:p="http://schemas.openxmlformats.org/presentationml/2006/main" type="title" preserve="1">
   <p:cSld name="Diapositiva de título">
     <p:spTree>
       <p:nvGrpSpPr>
@@ -518,71 +403,75 @@
         <p:nvPr/>
       </p:nvGrpSpPr>
       <p:grpSpPr>
-        <a:xfrm xmlns:a="http://schemas.openxmlformats.org/drawingml/2006/main"/>
+        <a:xfrm>
+          <a:off x="0" y="0"/>
+          <a:ext cx="0" cy="0"/>
+          <a:chOff x="0" y="0"/>
+          <a:chExt cx="0" cy="0"/>
+        </a:xfrm>
       </p:grpSpPr>
       <p:sp>
         <p:nvSpPr>
           <p:cNvPr id="2" name="Title 1">
-            <a:extLst xmlns:a="http://schemas.openxmlformats.org/drawingml/2006/main">
+            <a:extLst>
               <a:ext uri="{FF2B5EF4-FFF2-40B4-BE49-F238E27FC236}">
                 <a16:creationId xmlns:a16="http://schemas.microsoft.com/office/drawing/2014/main" id="{BABFE226-2DDD-40F3-88BC-056D496C1428}"/>
               </a:ext>
             </a:extLst>
           </p:cNvPr>
           <p:cNvSpPr>
-            <a:spLocks xmlns:a="http://schemas.openxmlformats.org/drawingml/2006/main" noGrp="1"/>
-          </p:cNvSpPr>
-          <p:nvPr>
-            <p:ph type="ctrTitle" idx="0"/>
+            <a:spLocks noGrp="1"/>
+          </p:cNvSpPr>
+          <p:nvPr>
+            <p:ph type="ctrTitle"/>
           </p:nvPr>
         </p:nvSpPr>
         <p:spPr>
-          <a:xfrm xmlns:a="http://schemas.openxmlformats.org/drawingml/2006/main">
+          <a:xfrm>
             <a:off x="2429947" y="7659088"/>
             <a:ext cx="27539395" cy="16293159"/>
           </a:xfrm>
         </p:spPr>
         <p:txBody>
-          <a:bodyPr xmlns:a="http://schemas.openxmlformats.org/drawingml/2006/main" anchor="b"/>
-          <a:lstStyle xmlns:a="http://schemas.openxmlformats.org/drawingml/2006/main">
+          <a:bodyPr anchor="b"/>
+          <a:lstStyle>
             <a:lvl1pPr algn="ctr">
               <a:buNone/>
               <a:defRPr sz="21259"/>
             </a:lvl1pPr>
           </a:lstStyle>
-          <a:p xmlns:a="http://schemas.openxmlformats.org/drawingml/2006/main">
+          <a:p>
             <a:r>
               <a:t>Haga clic para modificar el estilo de título del patrón</a:t>
             </a:r>
-            <a:endParaRPr/>
           </a:p>
         </p:txBody>
       </p:sp>
       <p:sp>
         <p:nvSpPr>
           <p:cNvPr id="3" name="Subtitle 2">
-            <a:extLst xmlns:a="http://schemas.openxmlformats.org/drawingml/2006/main">
+            <a:extLst>
               <a:ext uri="{FF2B5EF4-FFF2-40B4-BE49-F238E27FC236}">
                 <a16:creationId xmlns:a16="http://schemas.microsoft.com/office/drawing/2014/main" id="{698CB038-6FC0-4339-BA06-CEB26D287085}"/>
               </a:ext>
             </a:extLst>
           </p:cNvPr>
           <p:cNvSpPr>
-            <a:spLocks xmlns:a="http://schemas.openxmlformats.org/drawingml/2006/main" noGrp="1"/>
+            <a:spLocks noGrp="1"/>
           </p:cNvSpPr>
           <p:nvPr>
             <p:ph type="subTitle" idx="1"/>
           </p:nvPr>
         </p:nvSpPr>
         <p:spPr>
-          <a:xfrm xmlns:a="http://schemas.openxmlformats.org/drawingml/2006/main">
+          <a:xfrm>
             <a:off x="4049911" y="24580574"/>
             <a:ext cx="24299466" cy="11299043"/>
           </a:xfrm>
         </p:spPr>
         <p:txBody>
-          <a:bodyPr xmlns:a="http://schemas.openxmlformats.org/drawingml/2006/main"/>
-          <a:lstStyle xmlns:a="http://schemas.openxmlformats.org/drawingml/2006/main">
+          <a:bodyPr/>
+          <a:lstStyle>
             <a:lvl1pPr marL="0" indent="0" algn="ctr">
               <a:buNone/>
               <a:defRPr sz="8504"/>
@@ -620,25 +509,24 @@
               <a:defRPr sz="5669"/>
             </a:lvl9pPr>
           </a:lstStyle>
-          <a:p xmlns:a="http://schemas.openxmlformats.org/drawingml/2006/main">
+          <a:p>
             <a:r>
               <a:t>Haga clic para modificar el estilo de subtítulo del patrón</a:t>
             </a:r>
-            <a:endParaRPr/>
           </a:p>
         </p:txBody>
       </p:sp>
       <p:sp>
         <p:nvSpPr>
           <p:cNvPr id="4" name="Date Placeholder 3">
-            <a:extLst xmlns:a="http://schemas.openxmlformats.org/drawingml/2006/main">
+            <a:extLst>
               <a:ext uri="{FF2B5EF4-FFF2-40B4-BE49-F238E27FC236}">
                 <a16:creationId xmlns:a16="http://schemas.microsoft.com/office/drawing/2014/main" id="{B0ADAA27-410D-4B93-BE50-67EB60EBAD88}"/>
               </a:ext>
             </a:extLst>
           </p:cNvPr>
           <p:cNvSpPr>
-            <a:spLocks xmlns:a="http://schemas.openxmlformats.org/drawingml/2006/main" noGrp="1"/>
+            <a:spLocks noGrp="1"/>
           </p:cNvSpPr>
           <p:nvPr>
             <p:ph type="dt" idx="10"/>
@@ -646,11 +534,11 @@
         </p:nvSpPr>
         <p:spPr/>
         <p:txBody>
-          <a:bodyPr xmlns:a="http://schemas.openxmlformats.org/drawingml/2006/main"/>
-          <a:lstStyle xmlns:a="http://schemas.openxmlformats.org/drawingml/2006/main"/>
-          <a:p xmlns:a="http://schemas.openxmlformats.org/drawingml/2006/main">
+          <a:bodyPr/>
+          <a:lstStyle/>
+          <a:p>
             <a:fld id="{2859D279-7FFD-4108-AAC5-6DD8152157B1}" type="datetimeFigureOut">
-              <a:t>05/10/2023</a:t>
+              <a:t>31/08/2026</a:t>
             </a:fld>
             <a:endParaRPr/>
           </a:p>
@@ -659,14 +547,14 @@
       <p:sp>
         <p:nvSpPr>
           <p:cNvPr id="5" name="Footer Placeholder 4">
-            <a:extLst xmlns:a="http://schemas.openxmlformats.org/drawingml/2006/main">
+            <a:extLst>
               <a:ext uri="{FF2B5EF4-FFF2-40B4-BE49-F238E27FC236}">
                 <a16:creationId xmlns:a16="http://schemas.microsoft.com/office/drawing/2014/main" id="{995CF813-705C-4119-92B2-B196EEEAE7C1}"/>
               </a:ext>
             </a:extLst>
           </p:cNvPr>
           <p:cNvSpPr>
-            <a:spLocks xmlns:a="http://schemas.openxmlformats.org/drawingml/2006/main" noGrp="1"/>
+            <a:spLocks noGrp="1"/>
           </p:cNvSpPr>
           <p:nvPr>
             <p:ph type="ftr" idx="11"/>
@@ -674,9 +562,9 @@
         </p:nvSpPr>
         <p:spPr/>
         <p:txBody>
-          <a:bodyPr xmlns:a="http://schemas.openxmlformats.org/drawingml/2006/main"/>
-          <a:lstStyle xmlns:a="http://schemas.openxmlformats.org/drawingml/2006/main"/>
-          <a:p xmlns:a="http://schemas.openxmlformats.org/drawingml/2006/main">
+          <a:bodyPr/>
+          <a:lstStyle/>
+          <a:p>
             <a:endParaRPr/>
           </a:p>
         </p:txBody>
@@ -684,14 +572,14 @@
       <p:sp>
         <p:nvSpPr>
           <p:cNvPr id="6" name="Slide Number Placeholder 5">
-            <a:extLst xmlns:a="http://schemas.openxmlformats.org/drawingml/2006/main">
+            <a:extLst>
               <a:ext uri="{FF2B5EF4-FFF2-40B4-BE49-F238E27FC236}">
                 <a16:creationId xmlns:a16="http://schemas.microsoft.com/office/drawing/2014/main" id="{8AEFC323-30C9-4806-82C7-5305014A2292}"/>
               </a:ext>
             </a:extLst>
           </p:cNvPr>
           <p:cNvSpPr>
-            <a:spLocks xmlns:a="http://schemas.openxmlformats.org/drawingml/2006/main" noGrp="1"/>
+            <a:spLocks noGrp="1"/>
           </p:cNvSpPr>
           <p:nvPr>
             <p:ph type="sldNum" idx="12"/>
@@ -699,9 +587,9 @@
         </p:nvSpPr>
         <p:spPr/>
         <p:txBody>
-          <a:bodyPr xmlns:a="http://schemas.openxmlformats.org/drawingml/2006/main"/>
-          <a:lstStyle xmlns:a="http://schemas.openxmlformats.org/drawingml/2006/main"/>
-          <a:p xmlns:a="http://schemas.openxmlformats.org/drawingml/2006/main">
+          <a:bodyPr/>
+          <a:lstStyle/>
+          <a:p>
             <a:fld id="{9E107B50-42F2-442C-8A9B-03B1021A57A2}" type="slidenum">
               <a:t>‹Nº›</a:t>
             </a:fld>
@@ -711,11 +599,14 @@
       </p:sp>
     </p:spTree>
   </p:cSld>
+  <p:clrMapOvr>
+    <a:masterClrMapping/>
+  </p:clrMapOvr>
 </p:sldLayout>
 </file>
 
 <file path=ppt/slideLayouts/slideLayout10.xml><?xml version="1.0" encoding="utf-8"?>
-<p:sldLayout xmlns:p="http://schemas.openxmlformats.org/presentationml/2006/main" type="vertTx" preserve="1">
+<p:sldLayout xmlns:a="http://schemas.openxmlformats.org/drawingml/2006/main" xmlns:r="http://schemas.openxmlformats.org/officeDocument/2006/relationships" xmlns:p="http://schemas.openxmlformats.org/presentationml/2006/main" type="vertTx" preserve="1">
   <p:cSld name="Título y texto vertical">
     <p:spTree>
       <p:nvGrpSpPr>
@@ -724,47 +615,51 @@
         <p:nvPr/>
       </p:nvGrpSpPr>
       <p:grpSpPr>
-        <a:xfrm xmlns:a="http://schemas.openxmlformats.org/drawingml/2006/main"/>
+        <a:xfrm>
+          <a:off x="0" y="0"/>
+          <a:ext cx="0" cy="0"/>
+          <a:chOff x="0" y="0"/>
+          <a:chExt cx="0" cy="0"/>
+        </a:xfrm>
       </p:grpSpPr>
       <p:sp>
         <p:nvSpPr>
           <p:cNvPr id="2" name="Title 1">
-            <a:extLst xmlns:a="http://schemas.openxmlformats.org/drawingml/2006/main">
+            <a:extLst>
               <a:ext uri="{FF2B5EF4-FFF2-40B4-BE49-F238E27FC236}">
                 <a16:creationId xmlns:a16="http://schemas.microsoft.com/office/drawing/2014/main" id="{C0BE2870-84E1-4F30-A822-81B904DE3A07}"/>
               </a:ext>
             </a:extLst>
           </p:cNvPr>
           <p:cNvSpPr>
-            <a:spLocks xmlns:a="http://schemas.openxmlformats.org/drawingml/2006/main" noGrp="1"/>
-          </p:cNvSpPr>
-          <p:nvPr>
-            <p:ph type="title" idx="0"/>
+            <a:spLocks noGrp="1"/>
+          </p:cNvSpPr>
+          <p:nvPr>
+            <p:ph type="title"/>
           </p:nvPr>
         </p:nvSpPr>
         <p:spPr/>
         <p:txBody>
-          <a:bodyPr xmlns:a="http://schemas.openxmlformats.org/drawingml/2006/main"/>
-          <a:lstStyle xmlns:a="http://schemas.openxmlformats.org/drawingml/2006/main"/>
-          <a:p xmlns:a="http://schemas.openxmlformats.org/drawingml/2006/main">
+          <a:bodyPr/>
+          <a:lstStyle/>
+          <a:p>
             <a:r>
               <a:t>Haga clic para modificar el estilo de título del patrón</a:t>
             </a:r>
-            <a:endParaRPr/>
           </a:p>
         </p:txBody>
       </p:sp>
       <p:sp>
         <p:nvSpPr>
           <p:cNvPr id="3" name="Vertical Text Placeholder 2">
-            <a:extLst xmlns:a="http://schemas.openxmlformats.org/drawingml/2006/main">
+            <a:extLst>
               <a:ext uri="{FF2B5EF4-FFF2-40B4-BE49-F238E27FC236}">
                 <a16:creationId xmlns:a16="http://schemas.microsoft.com/office/drawing/2014/main" id="{E14D29B2-CA57-4B57-A139-D57233435F68}"/>
               </a:ext>
             </a:extLst>
           </p:cNvPr>
           <p:cNvSpPr>
-            <a:spLocks xmlns:a="http://schemas.openxmlformats.org/drawingml/2006/main" noGrp="1"/>
+            <a:spLocks noGrp="1"/>
           </p:cNvSpPr>
           <p:nvPr>
             <p:ph type="body" idx="1"/>
@@ -772,9 +667,9 @@
         </p:nvSpPr>
         <p:spPr/>
         <p:txBody>
-          <a:bodyPr xmlns:a="http://schemas.openxmlformats.org/drawingml/2006/main" vert="eaVert"/>
-          <a:lstStyle xmlns:a="http://schemas.openxmlformats.org/drawingml/2006/main"/>
-          <a:p xmlns:a="http://schemas.openxmlformats.org/drawingml/2006/main">
+          <a:bodyPr vert="eaVert"/>
+          <a:lstStyle/>
+          <a:p>
             <a:pPr lvl="0">
               <a:buNone/>
             </a:pPr>
@@ -782,7 +677,7 @@
               <a:t>Haga clic para modificar los estilos de texto del patrón</a:t>
             </a:r>
           </a:p>
-          <a:p xmlns:a="http://schemas.openxmlformats.org/drawingml/2006/main">
+          <a:p>
             <a:pPr lvl="1">
               <a:buNone/>
             </a:pPr>
@@ -790,7 +685,7 @@
               <a:t>Segundo nivel</a:t>
             </a:r>
           </a:p>
-          <a:p xmlns:a="http://schemas.openxmlformats.org/drawingml/2006/main">
+          <a:p>
             <a:pPr lvl="2">
               <a:buNone/>
             </a:pPr>
@@ -798,7 +693,7 @@
               <a:t>Tercer nivel</a:t>
             </a:r>
           </a:p>
-          <a:p xmlns:a="http://schemas.openxmlformats.org/drawingml/2006/main">
+          <a:p>
             <a:pPr lvl="3">
               <a:buNone/>
             </a:pPr>
@@ -806,28 +701,27 @@
               <a:t>Cuarto nivel</a:t>
             </a:r>
           </a:p>
-          <a:p xmlns:a="http://schemas.openxmlformats.org/drawingml/2006/main">
+          <a:p>
             <a:pPr lvl="4">
               <a:buNone/>
             </a:pPr>
             <a:r>
               <a:t>Quinto nivel</a:t>
             </a:r>
-            <a:endParaRPr/>
           </a:p>
         </p:txBody>
       </p:sp>
       <p:sp>
         <p:nvSpPr>
           <p:cNvPr id="4" name="Date Placeholder 3">
-            <a:extLst xmlns:a="http://schemas.openxmlformats.org/drawingml/2006/main">
+            <a:extLst>
               <a:ext uri="{FF2B5EF4-FFF2-40B4-BE49-F238E27FC236}">
                 <a16:creationId xmlns:a16="http://schemas.microsoft.com/office/drawing/2014/main" id="{E137E074-ED9F-48F6-BD32-A1BA7AFD6F04}"/>
               </a:ext>
             </a:extLst>
           </p:cNvPr>
           <p:cNvSpPr>
-            <a:spLocks xmlns:a="http://schemas.openxmlformats.org/drawingml/2006/main" noGrp="1"/>
+            <a:spLocks noGrp="1"/>
           </p:cNvSpPr>
           <p:nvPr>
             <p:ph type="dt" idx="10"/>
@@ -835,11 +729,11 @@
         </p:nvSpPr>
         <p:spPr/>
         <p:txBody>
-          <a:bodyPr xmlns:a="http://schemas.openxmlformats.org/drawingml/2006/main"/>
-          <a:lstStyle xmlns:a="http://schemas.openxmlformats.org/drawingml/2006/main"/>
-          <a:p xmlns:a="http://schemas.openxmlformats.org/drawingml/2006/main">
+          <a:bodyPr/>
+          <a:lstStyle/>
+          <a:p>
             <a:fld id="{2859D279-7FFD-4108-AAC5-6DD8152157B1}" type="datetimeFigureOut">
-              <a:t>05/10/2023</a:t>
+              <a:t>31/08/2026</a:t>
             </a:fld>
             <a:endParaRPr/>
           </a:p>
@@ -848,14 +742,14 @@
       <p:sp>
         <p:nvSpPr>
           <p:cNvPr id="5" name="Footer Placeholder 4">
-            <a:extLst xmlns:a="http://schemas.openxmlformats.org/drawingml/2006/main">
+            <a:extLst>
               <a:ext uri="{FF2B5EF4-FFF2-40B4-BE49-F238E27FC236}">
                 <a16:creationId xmlns:a16="http://schemas.microsoft.com/office/drawing/2014/main" id="{EA3FBDAF-D3E7-4CB7-9DDB-42A4298A60F5}"/>
               </a:ext>
             </a:extLst>
           </p:cNvPr>
           <p:cNvSpPr>
-            <a:spLocks xmlns:a="http://schemas.openxmlformats.org/drawingml/2006/main" noGrp="1"/>
+            <a:spLocks noGrp="1"/>
           </p:cNvSpPr>
           <p:nvPr>
             <p:ph type="ftr" idx="11"/>
@@ -863,9 +757,9 @@
         </p:nvSpPr>
         <p:spPr/>
         <p:txBody>
-          <a:bodyPr xmlns:a="http://schemas.openxmlformats.org/drawingml/2006/main"/>
-          <a:lstStyle xmlns:a="http://schemas.openxmlformats.org/drawingml/2006/main"/>
-          <a:p xmlns:a="http://schemas.openxmlformats.org/drawingml/2006/main">
+          <a:bodyPr/>
+          <a:lstStyle/>
+          <a:p>
             <a:endParaRPr/>
           </a:p>
         </p:txBody>
@@ -873,14 +767,14 @@
       <p:sp>
         <p:nvSpPr>
           <p:cNvPr id="6" name="Slide Number Placeholder 5">
-            <a:extLst xmlns:a="http://schemas.openxmlformats.org/drawingml/2006/main">
+            <a:extLst>
               <a:ext uri="{FF2B5EF4-FFF2-40B4-BE49-F238E27FC236}">
                 <a16:creationId xmlns:a16="http://schemas.microsoft.com/office/drawing/2014/main" id="{D06AFD13-564D-40F2-B85A-45A7F1C2A693}"/>
               </a:ext>
             </a:extLst>
           </p:cNvPr>
           <p:cNvSpPr>
-            <a:spLocks xmlns:a="http://schemas.openxmlformats.org/drawingml/2006/main" noGrp="1"/>
+            <a:spLocks noGrp="1"/>
           </p:cNvSpPr>
           <p:nvPr>
             <p:ph type="sldNum" idx="12"/>
@@ -888,9 +782,9 @@
         </p:nvSpPr>
         <p:spPr/>
         <p:txBody>
-          <a:bodyPr xmlns:a="http://schemas.openxmlformats.org/drawingml/2006/main"/>
-          <a:lstStyle xmlns:a="http://schemas.openxmlformats.org/drawingml/2006/main"/>
-          <a:p xmlns:a="http://schemas.openxmlformats.org/drawingml/2006/main">
+          <a:bodyPr/>
+          <a:lstStyle/>
+          <a:p>
             <a:fld id="{9E107B50-42F2-442C-8A9B-03B1021A57A2}" type="slidenum">
               <a:t>‹Nº›</a:t>
             </a:fld>
@@ -900,11 +794,14 @@
       </p:sp>
     </p:spTree>
   </p:cSld>
+  <p:clrMapOvr>
+    <a:masterClrMapping/>
+  </p:clrMapOvr>
 </p:sldLayout>
 </file>
 
 <file path=ppt/slideLayouts/slideLayout11.xml><?xml version="1.0" encoding="utf-8"?>
-<p:sldLayout xmlns:p="http://schemas.openxmlformats.org/presentationml/2006/main" type="vertTitleAndTx" preserve="1">
+<p:sldLayout xmlns:a="http://schemas.openxmlformats.org/drawingml/2006/main" xmlns:r="http://schemas.openxmlformats.org/officeDocument/2006/relationships" xmlns:p="http://schemas.openxmlformats.org/presentationml/2006/main" type="vertTitleAndTx" preserve="1">
   <p:cSld name="Título vertical y texto">
     <p:spTree>
       <p:nvGrpSpPr>
@@ -913,67 +810,71 @@
         <p:nvPr/>
       </p:nvGrpSpPr>
       <p:grpSpPr>
-        <a:xfrm xmlns:a="http://schemas.openxmlformats.org/drawingml/2006/main"/>
+        <a:xfrm>
+          <a:off x="0" y="0"/>
+          <a:ext cx="0" cy="0"/>
+          <a:chOff x="0" y="0"/>
+          <a:chExt cx="0" cy="0"/>
+        </a:xfrm>
       </p:grpSpPr>
       <p:sp>
         <p:nvSpPr>
           <p:cNvPr id="2" name="Vertical Title 1">
-            <a:extLst xmlns:a="http://schemas.openxmlformats.org/drawingml/2006/main">
+            <a:extLst>
               <a:ext uri="{FF2B5EF4-FFF2-40B4-BE49-F238E27FC236}">
                 <a16:creationId xmlns:a16="http://schemas.microsoft.com/office/drawing/2014/main" id="{CA18C43C-9CA0-4806-82C1-2FCDCA5B39C0}"/>
               </a:ext>
             </a:extLst>
           </p:cNvPr>
           <p:cNvSpPr>
-            <a:spLocks xmlns:a="http://schemas.openxmlformats.org/drawingml/2006/main" noGrp="1"/>
-          </p:cNvSpPr>
-          <p:nvPr>
-            <p:ph type="title" idx="0"/>
+            <a:spLocks noGrp="1"/>
+          </p:cNvSpPr>
+          <p:nvPr>
+            <p:ph type="title"/>
           </p:nvPr>
         </p:nvSpPr>
         <p:spPr>
-          <a:xfrm xmlns:a="http://schemas.openxmlformats.org/drawingml/2006/main">
+          <a:xfrm>
             <a:off x="23185742" y="2491640"/>
             <a:ext cx="6986096" cy="39660413"/>
           </a:xfrm>
         </p:spPr>
         <p:txBody>
-          <a:bodyPr xmlns:a="http://schemas.openxmlformats.org/drawingml/2006/main" vert="eaVert"/>
-          <a:lstStyle xmlns:a="http://schemas.openxmlformats.org/drawingml/2006/main"/>
-          <a:p xmlns:a="http://schemas.openxmlformats.org/drawingml/2006/main">
+          <a:bodyPr vert="eaVert"/>
+          <a:lstStyle/>
+          <a:p>
             <a:r>
               <a:t>Haga clic para modificar el estilo de título del patrón</a:t>
             </a:r>
-            <a:endParaRPr/>
           </a:p>
         </p:txBody>
       </p:sp>
       <p:sp>
         <p:nvSpPr>
           <p:cNvPr id="3" name="Vertical Text Placeholder 2">
-            <a:extLst xmlns:a="http://schemas.openxmlformats.org/drawingml/2006/main">
+            <a:extLst>
               <a:ext uri="{FF2B5EF4-FFF2-40B4-BE49-F238E27FC236}">
                 <a16:creationId xmlns:a16="http://schemas.microsoft.com/office/drawing/2014/main" id="{406C97C4-05DA-4659-AC12-D09225BB1666}"/>
               </a:ext>
             </a:extLst>
           </p:cNvPr>
           <p:cNvSpPr>
-            <a:spLocks xmlns:a="http://schemas.openxmlformats.org/drawingml/2006/main" noGrp="1"/>
+            <a:spLocks noGrp="1"/>
           </p:cNvSpPr>
           <p:nvPr>
             <p:ph type="body" idx="1"/>
           </p:nvPr>
         </p:nvSpPr>
         <p:spPr>
-          <a:xfrm xmlns:a="http://schemas.openxmlformats.org/drawingml/2006/main">
+          <a:xfrm>
             <a:off x="2227453" y="2491640"/>
             <a:ext cx="20553298" cy="39660413"/>
           </a:xfrm>
         </p:spPr>
         <p:txBody>
-          <a:bodyPr xmlns:a="http://schemas.openxmlformats.org/drawingml/2006/main" vert="eaVert"/>
-          <a:lstStyle xmlns:a="http://schemas.openxmlformats.org/drawingml/2006/main"/>
-          <a:p xmlns:a="http://schemas.openxmlformats.org/drawingml/2006/main">
+          <a:bodyPr vert="eaVert"/>
+          <a:lstStyle/>
+          <a:p>
             <a:pPr lvl="0">
               <a:buNone/>
             </a:pPr>
@@ -981,7 +882,7 @@
               <a:t>Haga clic para modificar los estilos de texto del patrón</a:t>
             </a:r>
           </a:p>
-          <a:p xmlns:a="http://schemas.openxmlformats.org/drawingml/2006/main">
+          <a:p>
             <a:pPr lvl="1">
               <a:buNone/>
             </a:pPr>
@@ -989,7 +890,7 @@
               <a:t>Segundo nivel</a:t>
             </a:r>
           </a:p>
-          <a:p xmlns:a="http://schemas.openxmlformats.org/drawingml/2006/main">
+          <a:p>
             <a:pPr lvl="2">
               <a:buNone/>
             </a:pPr>
@@ -997,7 +898,7 @@
               <a:t>Tercer nivel</a:t>
             </a:r>
           </a:p>
-          <a:p xmlns:a="http://schemas.openxmlformats.org/drawingml/2006/main">
+          <a:p>
             <a:pPr lvl="3">
               <a:buNone/>
             </a:pPr>
@@ -1005,28 +906,27 @@
               <a:t>Cuarto nivel</a:t>
             </a:r>
           </a:p>
-          <a:p xmlns:a="http://schemas.openxmlformats.org/drawingml/2006/main">
+          <a:p>
             <a:pPr lvl="4">
               <a:buNone/>
             </a:pPr>
             <a:r>
               <a:t>Quinto nivel</a:t>
             </a:r>
-            <a:endParaRPr/>
           </a:p>
         </p:txBody>
       </p:sp>
       <p:sp>
         <p:nvSpPr>
           <p:cNvPr id="4" name="Date Placeholder 3">
-            <a:extLst xmlns:a="http://schemas.openxmlformats.org/drawingml/2006/main">
+            <a:extLst>
               <a:ext uri="{FF2B5EF4-FFF2-40B4-BE49-F238E27FC236}">
                 <a16:creationId xmlns:a16="http://schemas.microsoft.com/office/drawing/2014/main" id="{E4DA131E-2A98-4BCB-A844-53F2930FAF9E}"/>
               </a:ext>
             </a:extLst>
           </p:cNvPr>
           <p:cNvSpPr>
-            <a:spLocks xmlns:a="http://schemas.openxmlformats.org/drawingml/2006/main" noGrp="1"/>
+            <a:spLocks noGrp="1"/>
           </p:cNvSpPr>
           <p:nvPr>
             <p:ph type="dt" idx="10"/>
@@ -1034,11 +934,11 @@
         </p:nvSpPr>
         <p:spPr/>
         <p:txBody>
-          <a:bodyPr xmlns:a="http://schemas.openxmlformats.org/drawingml/2006/main"/>
-          <a:lstStyle xmlns:a="http://schemas.openxmlformats.org/drawingml/2006/main"/>
-          <a:p xmlns:a="http://schemas.openxmlformats.org/drawingml/2006/main">
+          <a:bodyPr/>
+          <a:lstStyle/>
+          <a:p>
             <a:fld id="{2859D279-7FFD-4108-AAC5-6DD8152157B1}" type="datetimeFigureOut">
-              <a:t>05/10/2023</a:t>
+              <a:t>31/08/2026</a:t>
             </a:fld>
             <a:endParaRPr/>
           </a:p>
@@ -1047,14 +947,14 @@
       <p:sp>
         <p:nvSpPr>
           <p:cNvPr id="5" name="Footer Placeholder 4">
-            <a:extLst xmlns:a="http://schemas.openxmlformats.org/drawingml/2006/main">
+            <a:extLst>
               <a:ext uri="{FF2B5EF4-FFF2-40B4-BE49-F238E27FC236}">
                 <a16:creationId xmlns:a16="http://schemas.microsoft.com/office/drawing/2014/main" id="{2E4E87A4-25A9-4917-A5D9-D430FF142993}"/>
               </a:ext>
             </a:extLst>
           </p:cNvPr>
           <p:cNvSpPr>
-            <a:spLocks xmlns:a="http://schemas.openxmlformats.org/drawingml/2006/main" noGrp="1"/>
+            <a:spLocks noGrp="1"/>
           </p:cNvSpPr>
           <p:nvPr>
             <p:ph type="ftr" idx="11"/>
@@ -1062,9 +962,9 @@
         </p:nvSpPr>
         <p:spPr/>
         <p:txBody>
-          <a:bodyPr xmlns:a="http://schemas.openxmlformats.org/drawingml/2006/main"/>
-          <a:lstStyle xmlns:a="http://schemas.openxmlformats.org/drawingml/2006/main"/>
-          <a:p xmlns:a="http://schemas.openxmlformats.org/drawingml/2006/main">
+          <a:bodyPr/>
+          <a:lstStyle/>
+          <a:p>
             <a:endParaRPr/>
           </a:p>
         </p:txBody>
@@ -1072,14 +972,14 @@
       <p:sp>
         <p:nvSpPr>
           <p:cNvPr id="6" name="Slide Number Placeholder 5">
-            <a:extLst xmlns:a="http://schemas.openxmlformats.org/drawingml/2006/main">
+            <a:extLst>
               <a:ext uri="{FF2B5EF4-FFF2-40B4-BE49-F238E27FC236}">
                 <a16:creationId xmlns:a16="http://schemas.microsoft.com/office/drawing/2014/main" id="{4E9D5001-C9F7-430A-B348-DB5BA45C16CE}"/>
               </a:ext>
             </a:extLst>
           </p:cNvPr>
           <p:cNvSpPr>
-            <a:spLocks xmlns:a="http://schemas.openxmlformats.org/drawingml/2006/main" noGrp="1"/>
+            <a:spLocks noGrp="1"/>
           </p:cNvSpPr>
           <p:nvPr>
             <p:ph type="sldNum" idx="12"/>
@@ -1087,9 +987,9 @@
         </p:nvSpPr>
         <p:spPr/>
         <p:txBody>
-          <a:bodyPr xmlns:a="http://schemas.openxmlformats.org/drawingml/2006/main"/>
-          <a:lstStyle xmlns:a="http://schemas.openxmlformats.org/drawingml/2006/main"/>
-          <a:p xmlns:a="http://schemas.openxmlformats.org/drawingml/2006/main">
+          <a:bodyPr/>
+          <a:lstStyle/>
+          <a:p>
             <a:fld id="{9E107B50-42F2-442C-8A9B-03B1021A57A2}" type="slidenum">
               <a:t>‹Nº›</a:t>
             </a:fld>
@@ -1099,11 +999,14 @@
       </p:sp>
     </p:spTree>
   </p:cSld>
+  <p:clrMapOvr>
+    <a:masterClrMapping/>
+  </p:clrMapOvr>
 </p:sldLayout>
 </file>
 
 <file path=ppt/slideLayouts/slideLayout2.xml><?xml version="1.0" encoding="utf-8"?>
-<p:sldLayout xmlns:p="http://schemas.openxmlformats.org/presentationml/2006/main" type="obj" preserve="1">
+<p:sldLayout xmlns:a="http://schemas.openxmlformats.org/drawingml/2006/main" xmlns:r="http://schemas.openxmlformats.org/officeDocument/2006/relationships" xmlns:p="http://schemas.openxmlformats.org/presentationml/2006/main" type="obj" preserve="1">
   <p:cSld name="Título y objetos">
     <p:spTree>
       <p:nvGrpSpPr>
@@ -1112,47 +1015,51 @@
         <p:nvPr/>
       </p:nvGrpSpPr>
       <p:grpSpPr>
-        <a:xfrm xmlns:a="http://schemas.openxmlformats.org/drawingml/2006/main"/>
+        <a:xfrm>
+          <a:off x="0" y="0"/>
+          <a:ext cx="0" cy="0"/>
+          <a:chOff x="0" y="0"/>
+          <a:chExt cx="0" cy="0"/>
+        </a:xfrm>
       </p:grpSpPr>
       <p:sp>
         <p:nvSpPr>
           <p:cNvPr id="2" name="Title 1">
-            <a:extLst xmlns:a="http://schemas.openxmlformats.org/drawingml/2006/main">
+            <a:extLst>
               <a:ext uri="{FF2B5EF4-FFF2-40B4-BE49-F238E27FC236}">
                 <a16:creationId xmlns:a16="http://schemas.microsoft.com/office/drawing/2014/main" id="{DA6010B0-FD76-474B-A019-0688A2AA4363}"/>
               </a:ext>
             </a:extLst>
           </p:cNvPr>
           <p:cNvSpPr>
-            <a:spLocks xmlns:a="http://schemas.openxmlformats.org/drawingml/2006/main" noGrp="1"/>
-          </p:cNvSpPr>
-          <p:nvPr>
-            <p:ph type="title" idx="0"/>
+            <a:spLocks noGrp="1"/>
+          </p:cNvSpPr>
+          <p:nvPr>
+            <p:ph type="title"/>
           </p:nvPr>
         </p:nvSpPr>
         <p:spPr/>
         <p:txBody>
-          <a:bodyPr xmlns:a="http://schemas.openxmlformats.org/drawingml/2006/main"/>
-          <a:lstStyle xmlns:a="http://schemas.openxmlformats.org/drawingml/2006/main"/>
-          <a:p xmlns:a="http://schemas.openxmlformats.org/drawingml/2006/main">
+          <a:bodyPr/>
+          <a:lstStyle/>
+          <a:p>
             <a:r>
               <a:t>Haga clic para modificar el estilo de título del patrón</a:t>
             </a:r>
-            <a:endParaRPr/>
           </a:p>
         </p:txBody>
       </p:sp>
       <p:sp>
         <p:nvSpPr>
           <p:cNvPr id="3" name="Content Placeholder 2">
-            <a:extLst xmlns:a="http://schemas.openxmlformats.org/drawingml/2006/main">
+            <a:extLst>
               <a:ext uri="{FF2B5EF4-FFF2-40B4-BE49-F238E27FC236}">
                 <a16:creationId xmlns:a16="http://schemas.microsoft.com/office/drawing/2014/main" id="{89C3F179-9B27-4F49-B1FC-DA25D6380047}"/>
               </a:ext>
             </a:extLst>
           </p:cNvPr>
           <p:cNvSpPr>
-            <a:spLocks xmlns:a="http://schemas.openxmlformats.org/drawingml/2006/main" noGrp="1"/>
+            <a:spLocks noGrp="1"/>
           </p:cNvSpPr>
           <p:nvPr>
             <p:ph idx="1"/>
@@ -1160,9 +1067,9 @@
         </p:nvSpPr>
         <p:spPr/>
         <p:txBody>
-          <a:bodyPr xmlns:a="http://schemas.openxmlformats.org/drawingml/2006/main"/>
-          <a:lstStyle xmlns:a="http://schemas.openxmlformats.org/drawingml/2006/main"/>
-          <a:p xmlns:a="http://schemas.openxmlformats.org/drawingml/2006/main">
+          <a:bodyPr/>
+          <a:lstStyle/>
+          <a:p>
             <a:pPr lvl="0">
               <a:buNone/>
             </a:pPr>
@@ -1170,7 +1077,7 @@
               <a:t>Haga clic para modificar los estilos de texto del patrón</a:t>
             </a:r>
           </a:p>
-          <a:p xmlns:a="http://schemas.openxmlformats.org/drawingml/2006/main">
+          <a:p>
             <a:pPr lvl="1">
               <a:buNone/>
             </a:pPr>
@@ -1178,7 +1085,7 @@
               <a:t>Segundo nivel</a:t>
             </a:r>
           </a:p>
-          <a:p xmlns:a="http://schemas.openxmlformats.org/drawingml/2006/main">
+          <a:p>
             <a:pPr lvl="2">
               <a:buNone/>
             </a:pPr>
@@ -1186,7 +1093,7 @@
               <a:t>Tercer nivel</a:t>
             </a:r>
           </a:p>
-          <a:p xmlns:a="http://schemas.openxmlformats.org/drawingml/2006/main">
+          <a:p>
             <a:pPr lvl="3">
               <a:buNone/>
             </a:pPr>
@@ -1194,28 +1101,27 @@
               <a:t>Cuarto nivel</a:t>
             </a:r>
           </a:p>
-          <a:p xmlns:a="http://schemas.openxmlformats.org/drawingml/2006/main">
+          <a:p>
             <a:pPr lvl="4">
               <a:buNone/>
             </a:pPr>
             <a:r>
               <a:t>Quinto nivel</a:t>
             </a:r>
-            <a:endParaRPr/>
           </a:p>
         </p:txBody>
       </p:sp>
       <p:sp>
         <p:nvSpPr>
           <p:cNvPr id="4" name="Date Placeholder 3">
-            <a:extLst xmlns:a="http://schemas.openxmlformats.org/drawingml/2006/main">
+            <a:extLst>
               <a:ext uri="{FF2B5EF4-FFF2-40B4-BE49-F238E27FC236}">
                 <a16:creationId xmlns:a16="http://schemas.microsoft.com/office/drawing/2014/main" id="{DEB95883-E2D2-4676-8FC2-C08006CDE474}"/>
               </a:ext>
             </a:extLst>
           </p:cNvPr>
           <p:cNvSpPr>
-            <a:spLocks xmlns:a="http://schemas.openxmlformats.org/drawingml/2006/main" noGrp="1"/>
+            <a:spLocks noGrp="1"/>
           </p:cNvSpPr>
           <p:nvPr>
             <p:ph type="dt" idx="10"/>
@@ -1223,11 +1129,11 @@
         </p:nvSpPr>
         <p:spPr/>
         <p:txBody>
-          <a:bodyPr xmlns:a="http://schemas.openxmlformats.org/drawingml/2006/main"/>
-          <a:lstStyle xmlns:a="http://schemas.openxmlformats.org/drawingml/2006/main"/>
-          <a:p xmlns:a="http://schemas.openxmlformats.org/drawingml/2006/main">
+          <a:bodyPr/>
+          <a:lstStyle/>
+          <a:p>
             <a:fld id="{2859D279-7FFD-4108-AAC5-6DD8152157B1}" type="datetimeFigureOut">
-              <a:t>05/10/2023</a:t>
+              <a:t>31/08/2026</a:t>
             </a:fld>
             <a:endParaRPr/>
           </a:p>
@@ -1236,14 +1142,14 @@
       <p:sp>
         <p:nvSpPr>
           <p:cNvPr id="5" name="Footer Placeholder 4">
-            <a:extLst xmlns:a="http://schemas.openxmlformats.org/drawingml/2006/main">
+            <a:extLst>
               <a:ext uri="{FF2B5EF4-FFF2-40B4-BE49-F238E27FC236}">
                 <a16:creationId xmlns:a16="http://schemas.microsoft.com/office/drawing/2014/main" id="{CDE1DC7A-2D6D-4432-A0ED-73C4F001FFD6}"/>
               </a:ext>
             </a:extLst>
           </p:cNvPr>
           <p:cNvSpPr>
-            <a:spLocks xmlns:a="http://schemas.openxmlformats.org/drawingml/2006/main" noGrp="1"/>
+            <a:spLocks noGrp="1"/>
           </p:cNvSpPr>
           <p:nvPr>
             <p:ph type="ftr" idx="11"/>
@@ -1251,9 +1157,9 @@
         </p:nvSpPr>
         <p:spPr/>
         <p:txBody>
-          <a:bodyPr xmlns:a="http://schemas.openxmlformats.org/drawingml/2006/main"/>
-          <a:lstStyle xmlns:a="http://schemas.openxmlformats.org/drawingml/2006/main"/>
-          <a:p xmlns:a="http://schemas.openxmlformats.org/drawingml/2006/main">
+          <a:bodyPr/>
+          <a:lstStyle/>
+          <a:p>
             <a:endParaRPr/>
           </a:p>
         </p:txBody>
@@ -1261,14 +1167,14 @@
       <p:sp>
         <p:nvSpPr>
           <p:cNvPr id="6" name="Slide Number Placeholder 5">
-            <a:extLst xmlns:a="http://schemas.openxmlformats.org/drawingml/2006/main">
+            <a:extLst>
               <a:ext uri="{FF2B5EF4-FFF2-40B4-BE49-F238E27FC236}">
                 <a16:creationId xmlns:a16="http://schemas.microsoft.com/office/drawing/2014/main" id="{824378AD-9B39-4E72-AF3E-4380B7BB9A09}"/>
               </a:ext>
             </a:extLst>
           </p:cNvPr>
           <p:cNvSpPr>
-            <a:spLocks xmlns:a="http://schemas.openxmlformats.org/drawingml/2006/main" noGrp="1"/>
+            <a:spLocks noGrp="1"/>
           </p:cNvSpPr>
           <p:nvPr>
             <p:ph type="sldNum" idx="12"/>
@@ -1276,9 +1182,9 @@
         </p:nvSpPr>
         <p:spPr/>
         <p:txBody>
-          <a:bodyPr xmlns:a="http://schemas.openxmlformats.org/drawingml/2006/main"/>
-          <a:lstStyle xmlns:a="http://schemas.openxmlformats.org/drawingml/2006/main"/>
-          <a:p xmlns:a="http://schemas.openxmlformats.org/drawingml/2006/main">
+          <a:bodyPr/>
+          <a:lstStyle/>
+          <a:p>
             <a:fld id="{9E107B50-42F2-442C-8A9B-03B1021A57A2}" type="slidenum">
               <a:t>‹Nº›</a:t>
             </a:fld>
@@ -1288,11 +1194,14 @@
       </p:sp>
     </p:spTree>
   </p:cSld>
+  <p:clrMapOvr>
+    <a:masterClrMapping/>
+  </p:clrMapOvr>
 </p:sldLayout>
 </file>
 
 <file path=ppt/slideLayouts/slideLayout3.xml><?xml version="1.0" encoding="utf-8"?>
-<p:sldLayout xmlns:p="http://schemas.openxmlformats.org/presentationml/2006/main" type="secHead" preserve="1">
+<p:sldLayout xmlns:a="http://schemas.openxmlformats.org/drawingml/2006/main" xmlns:r="http://schemas.openxmlformats.org/officeDocument/2006/relationships" xmlns:p="http://schemas.openxmlformats.org/presentationml/2006/main" type="secHead" preserve="1">
   <p:cSld name="Encabezado de sección">
     <p:spTree>
       <p:nvGrpSpPr>
@@ -1301,71 +1210,75 @@
         <p:nvPr/>
       </p:nvGrpSpPr>
       <p:grpSpPr>
-        <a:xfrm xmlns:a="http://schemas.openxmlformats.org/drawingml/2006/main"/>
+        <a:xfrm>
+          <a:off x="0" y="0"/>
+          <a:ext cx="0" cy="0"/>
+          <a:chOff x="0" y="0"/>
+          <a:chExt cx="0" cy="0"/>
+        </a:xfrm>
       </p:grpSpPr>
       <p:sp>
         <p:nvSpPr>
           <p:cNvPr id="2" name="Title 1">
-            <a:extLst xmlns:a="http://schemas.openxmlformats.org/drawingml/2006/main">
+            <a:extLst>
               <a:ext uri="{FF2B5EF4-FFF2-40B4-BE49-F238E27FC236}">
                 <a16:creationId xmlns:a16="http://schemas.microsoft.com/office/drawing/2014/main" id="{1500996F-22A3-4349-B57D-48662920FE87}"/>
               </a:ext>
             </a:extLst>
           </p:cNvPr>
           <p:cNvSpPr>
-            <a:spLocks xmlns:a="http://schemas.openxmlformats.org/drawingml/2006/main" noGrp="1"/>
-          </p:cNvSpPr>
-          <p:nvPr>
-            <p:ph type="title" idx="0"/>
+            <a:spLocks noGrp="1"/>
+          </p:cNvSpPr>
+          <p:nvPr>
+            <p:ph type="title"/>
           </p:nvPr>
         </p:nvSpPr>
         <p:spPr>
-          <a:xfrm xmlns:a="http://schemas.openxmlformats.org/drawingml/2006/main">
+          <a:xfrm>
             <a:off x="2210578" y="11667389"/>
             <a:ext cx="27944386" cy="19467289"/>
           </a:xfrm>
         </p:spPr>
         <p:txBody>
-          <a:bodyPr xmlns:a="http://schemas.openxmlformats.org/drawingml/2006/main" anchor="b"/>
-          <a:lstStyle xmlns:a="http://schemas.openxmlformats.org/drawingml/2006/main">
+          <a:bodyPr anchor="b"/>
+          <a:lstStyle>
             <a:lvl1pPr>
               <a:buNone/>
               <a:defRPr sz="21259"/>
             </a:lvl1pPr>
           </a:lstStyle>
-          <a:p xmlns:a="http://schemas.openxmlformats.org/drawingml/2006/main">
+          <a:p>
             <a:r>
               <a:t>Haga clic para modificar el estilo de título del patrón</a:t>
             </a:r>
-            <a:endParaRPr/>
           </a:p>
         </p:txBody>
       </p:sp>
       <p:sp>
         <p:nvSpPr>
           <p:cNvPr id="3" name="Text Placeholder 2">
-            <a:extLst xmlns:a="http://schemas.openxmlformats.org/drawingml/2006/main">
+            <a:extLst>
               <a:ext uri="{FF2B5EF4-FFF2-40B4-BE49-F238E27FC236}">
                 <a16:creationId xmlns:a16="http://schemas.microsoft.com/office/drawing/2014/main" id="{98AEEFFF-B697-4ED3-B741-3FD6AF2C330A}"/>
               </a:ext>
             </a:extLst>
           </p:cNvPr>
           <p:cNvSpPr>
-            <a:spLocks xmlns:a="http://schemas.openxmlformats.org/drawingml/2006/main" noGrp="1"/>
+            <a:spLocks noGrp="1"/>
           </p:cNvSpPr>
           <p:nvPr>
             <p:ph type="body" idx="1"/>
           </p:nvPr>
         </p:nvSpPr>
         <p:spPr>
-          <a:xfrm xmlns:a="http://schemas.openxmlformats.org/drawingml/2006/main">
+          <a:xfrm>
             <a:off x="2210578" y="31318846"/>
             <a:ext cx="27944386" cy="10237387"/>
           </a:xfrm>
         </p:spPr>
         <p:txBody>
-          <a:bodyPr xmlns:a="http://schemas.openxmlformats.org/drawingml/2006/main"/>
-          <a:lstStyle xmlns:a="http://schemas.openxmlformats.org/drawingml/2006/main">
+          <a:bodyPr/>
+          <a:lstStyle>
             <a:lvl1pPr marL="0" indent="0">
               <a:buNone/>
               <a:defRPr sz="8504">
@@ -1455,7 +1368,7 @@
               </a:defRPr>
             </a:lvl9pPr>
           </a:lstStyle>
-          <a:p xmlns:a="http://schemas.openxmlformats.org/drawingml/2006/main">
+          <a:p>
             <a:pPr lvl="0">
               <a:buNone/>
             </a:pPr>
@@ -1468,14 +1381,14 @@
       <p:sp>
         <p:nvSpPr>
           <p:cNvPr id="4" name="Date Placeholder 3">
-            <a:extLst xmlns:a="http://schemas.openxmlformats.org/drawingml/2006/main">
+            <a:extLst>
               <a:ext uri="{FF2B5EF4-FFF2-40B4-BE49-F238E27FC236}">
                 <a16:creationId xmlns:a16="http://schemas.microsoft.com/office/drawing/2014/main" id="{45065FCC-BA5E-48D5-9347-A1EBBC9C22C9}"/>
               </a:ext>
             </a:extLst>
           </p:cNvPr>
           <p:cNvSpPr>
-            <a:spLocks xmlns:a="http://schemas.openxmlformats.org/drawingml/2006/main" noGrp="1"/>
+            <a:spLocks noGrp="1"/>
           </p:cNvSpPr>
           <p:nvPr>
             <p:ph type="dt" idx="10"/>
@@ -1483,11 +1396,11 @@
         </p:nvSpPr>
         <p:spPr/>
         <p:txBody>
-          <a:bodyPr xmlns:a="http://schemas.openxmlformats.org/drawingml/2006/main"/>
-          <a:lstStyle xmlns:a="http://schemas.openxmlformats.org/drawingml/2006/main"/>
-          <a:p xmlns:a="http://schemas.openxmlformats.org/drawingml/2006/main">
+          <a:bodyPr/>
+          <a:lstStyle/>
+          <a:p>
             <a:fld id="{2859D279-7FFD-4108-AAC5-6DD8152157B1}" type="datetimeFigureOut">
-              <a:t>05/10/2023</a:t>
+              <a:t>31/08/2026</a:t>
             </a:fld>
             <a:endParaRPr/>
           </a:p>
@@ -1496,14 +1409,14 @@
       <p:sp>
         <p:nvSpPr>
           <p:cNvPr id="5" name="Footer Placeholder 4">
-            <a:extLst xmlns:a="http://schemas.openxmlformats.org/drawingml/2006/main">
+            <a:extLst>
               <a:ext uri="{FF2B5EF4-FFF2-40B4-BE49-F238E27FC236}">
                 <a16:creationId xmlns:a16="http://schemas.microsoft.com/office/drawing/2014/main" id="{88AAC06C-CE54-487A-86C4-CBDDC016B9A8}"/>
               </a:ext>
             </a:extLst>
           </p:cNvPr>
           <p:cNvSpPr>
-            <a:spLocks xmlns:a="http://schemas.openxmlformats.org/drawingml/2006/main" noGrp="1"/>
+            <a:spLocks noGrp="1"/>
           </p:cNvSpPr>
           <p:nvPr>
             <p:ph type="ftr" idx="11"/>
@@ -1511,9 +1424,9 @@
         </p:nvSpPr>
         <p:spPr/>
         <p:txBody>
-          <a:bodyPr xmlns:a="http://schemas.openxmlformats.org/drawingml/2006/main"/>
-          <a:lstStyle xmlns:a="http://schemas.openxmlformats.org/drawingml/2006/main"/>
-          <a:p xmlns:a="http://schemas.openxmlformats.org/drawingml/2006/main">
+          <a:bodyPr/>
+          <a:lstStyle/>
+          <a:p>
             <a:endParaRPr/>
           </a:p>
         </p:txBody>
@@ -1521,14 +1434,14 @@
       <p:sp>
         <p:nvSpPr>
           <p:cNvPr id="6" name="Slide Number Placeholder 5">
-            <a:extLst xmlns:a="http://schemas.openxmlformats.org/drawingml/2006/main">
+            <a:extLst>
               <a:ext uri="{FF2B5EF4-FFF2-40B4-BE49-F238E27FC236}">
                 <a16:creationId xmlns:a16="http://schemas.microsoft.com/office/drawing/2014/main" id="{41232EE9-9905-4052-B695-6A0972CBE491}"/>
               </a:ext>
             </a:extLst>
           </p:cNvPr>
           <p:cNvSpPr>
-            <a:spLocks xmlns:a="http://schemas.openxmlformats.org/drawingml/2006/main" noGrp="1"/>
+            <a:spLocks noGrp="1"/>
           </p:cNvSpPr>
           <p:nvPr>
             <p:ph type="sldNum" idx="12"/>
@@ -1536,9 +1449,9 @@
         </p:nvSpPr>
         <p:spPr/>
         <p:txBody>
-          <a:bodyPr xmlns:a="http://schemas.openxmlformats.org/drawingml/2006/main"/>
-          <a:lstStyle xmlns:a="http://schemas.openxmlformats.org/drawingml/2006/main"/>
-          <a:p xmlns:a="http://schemas.openxmlformats.org/drawingml/2006/main">
+          <a:bodyPr/>
+          <a:lstStyle/>
+          <a:p>
             <a:fld id="{9E107B50-42F2-442C-8A9B-03B1021A57A2}" type="slidenum">
               <a:t>‹Nº›</a:t>
             </a:fld>
@@ -1548,11 +1461,14 @@
       </p:sp>
     </p:spTree>
   </p:cSld>
+  <p:clrMapOvr>
+    <a:masterClrMapping/>
+  </p:clrMapOvr>
 </p:sldLayout>
 </file>
 
 <file path=ppt/slideLayouts/slideLayout4.xml><?xml version="1.0" encoding="utf-8"?>
-<p:sldLayout xmlns:p="http://schemas.openxmlformats.org/presentationml/2006/main" type="twoObj" preserve="1">
+<p:sldLayout xmlns:a="http://schemas.openxmlformats.org/drawingml/2006/main" xmlns:r="http://schemas.openxmlformats.org/officeDocument/2006/relationships" xmlns:p="http://schemas.openxmlformats.org/presentationml/2006/main" type="twoObj" preserve="1">
   <p:cSld name="Dos objetos">
     <p:spTree>
       <p:nvGrpSpPr>
@@ -1561,62 +1477,66 @@
         <p:nvPr/>
       </p:nvGrpSpPr>
       <p:grpSpPr>
-        <a:xfrm xmlns:a="http://schemas.openxmlformats.org/drawingml/2006/main"/>
+        <a:xfrm>
+          <a:off x="0" y="0"/>
+          <a:ext cx="0" cy="0"/>
+          <a:chOff x="0" y="0"/>
+          <a:chExt cx="0" cy="0"/>
+        </a:xfrm>
       </p:grpSpPr>
       <p:sp>
         <p:nvSpPr>
           <p:cNvPr id="2" name="Title 1">
-            <a:extLst xmlns:a="http://schemas.openxmlformats.org/drawingml/2006/main">
+            <a:extLst>
               <a:ext uri="{FF2B5EF4-FFF2-40B4-BE49-F238E27FC236}">
                 <a16:creationId xmlns:a16="http://schemas.microsoft.com/office/drawing/2014/main" id="{84F31350-D251-453B-ACAF-208D95707A00}"/>
               </a:ext>
             </a:extLst>
           </p:cNvPr>
           <p:cNvSpPr>
-            <a:spLocks xmlns:a="http://schemas.openxmlformats.org/drawingml/2006/main" noGrp="1"/>
-          </p:cNvSpPr>
-          <p:nvPr>
-            <p:ph type="title" idx="0"/>
+            <a:spLocks noGrp="1"/>
+          </p:cNvSpPr>
+          <p:nvPr>
+            <p:ph type="title"/>
           </p:nvPr>
         </p:nvSpPr>
         <p:spPr/>
         <p:txBody>
-          <a:bodyPr xmlns:a="http://schemas.openxmlformats.org/drawingml/2006/main"/>
-          <a:lstStyle xmlns:a="http://schemas.openxmlformats.org/drawingml/2006/main"/>
-          <a:p xmlns:a="http://schemas.openxmlformats.org/drawingml/2006/main">
+          <a:bodyPr/>
+          <a:lstStyle/>
+          <a:p>
             <a:r>
               <a:t>Haga clic para modificar el estilo de título del patrón</a:t>
             </a:r>
-            <a:endParaRPr/>
           </a:p>
         </p:txBody>
       </p:sp>
       <p:sp>
         <p:nvSpPr>
           <p:cNvPr id="3" name="Content Placeholder 2">
-            <a:extLst xmlns:a="http://schemas.openxmlformats.org/drawingml/2006/main">
+            <a:extLst>
               <a:ext uri="{FF2B5EF4-FFF2-40B4-BE49-F238E27FC236}">
                 <a16:creationId xmlns:a16="http://schemas.microsoft.com/office/drawing/2014/main" id="{BC13344E-470D-48D1-A860-BE68EB80027C}"/>
               </a:ext>
             </a:extLst>
           </p:cNvPr>
           <p:cNvSpPr>
-            <a:spLocks xmlns:a="http://schemas.openxmlformats.org/drawingml/2006/main" noGrp="1"/>
+            <a:spLocks noGrp="1"/>
           </p:cNvSpPr>
           <p:nvPr>
             <p:ph idx="1"/>
           </p:nvPr>
         </p:nvSpPr>
         <p:spPr>
-          <a:xfrm xmlns:a="http://schemas.openxmlformats.org/drawingml/2006/main">
+          <a:xfrm>
             <a:off x="2227451" y="12458200"/>
             <a:ext cx="13769697" cy="29693853"/>
           </a:xfrm>
         </p:spPr>
         <p:txBody>
-          <a:bodyPr xmlns:a="http://schemas.openxmlformats.org/drawingml/2006/main"/>
-          <a:lstStyle xmlns:a="http://schemas.openxmlformats.org/drawingml/2006/main"/>
-          <a:p xmlns:a="http://schemas.openxmlformats.org/drawingml/2006/main">
+          <a:bodyPr/>
+          <a:lstStyle/>
+          <a:p>
             <a:pPr lvl="0">
               <a:buNone/>
             </a:pPr>
@@ -1624,7 +1544,7 @@
               <a:t>Haga clic para modificar los estilos de texto del patrón</a:t>
             </a:r>
           </a:p>
-          <a:p xmlns:a="http://schemas.openxmlformats.org/drawingml/2006/main">
+          <a:p>
             <a:pPr lvl="1">
               <a:buNone/>
             </a:pPr>
@@ -1632,7 +1552,7 @@
               <a:t>Segundo nivel</a:t>
             </a:r>
           </a:p>
-          <a:p xmlns:a="http://schemas.openxmlformats.org/drawingml/2006/main">
+          <a:p>
             <a:pPr lvl="2">
               <a:buNone/>
             </a:pPr>
@@ -1640,7 +1560,7 @@
               <a:t>Tercer nivel</a:t>
             </a:r>
           </a:p>
-          <a:p xmlns:a="http://schemas.openxmlformats.org/drawingml/2006/main">
+          <a:p>
             <a:pPr lvl="3">
               <a:buNone/>
             </a:pPr>
@@ -1648,43 +1568,42 @@
               <a:t>Cuarto nivel</a:t>
             </a:r>
           </a:p>
-          <a:p xmlns:a="http://schemas.openxmlformats.org/drawingml/2006/main">
+          <a:p>
             <a:pPr lvl="4">
               <a:buNone/>
             </a:pPr>
             <a:r>
               <a:t>Quinto nivel</a:t>
             </a:r>
-            <a:endParaRPr/>
           </a:p>
         </p:txBody>
       </p:sp>
       <p:sp>
         <p:nvSpPr>
           <p:cNvPr id="4" name="Content Placeholder 3">
-            <a:extLst xmlns:a="http://schemas.openxmlformats.org/drawingml/2006/main">
+            <a:extLst>
               <a:ext uri="{FF2B5EF4-FFF2-40B4-BE49-F238E27FC236}">
                 <a16:creationId xmlns:a16="http://schemas.microsoft.com/office/drawing/2014/main" id="{532803A8-8FE3-4A38-8409-15A081E7B35E}"/>
               </a:ext>
             </a:extLst>
           </p:cNvPr>
           <p:cNvSpPr>
-            <a:spLocks xmlns:a="http://schemas.openxmlformats.org/drawingml/2006/main" noGrp="1"/>
+            <a:spLocks noGrp="1"/>
           </p:cNvSpPr>
           <p:nvPr>
             <p:ph idx="2"/>
           </p:nvPr>
         </p:nvSpPr>
         <p:spPr>
-          <a:xfrm xmlns:a="http://schemas.openxmlformats.org/drawingml/2006/main">
+          <a:xfrm>
             <a:off x="16402140" y="12458200"/>
             <a:ext cx="13769697" cy="29693853"/>
           </a:xfrm>
         </p:spPr>
         <p:txBody>
-          <a:bodyPr xmlns:a="http://schemas.openxmlformats.org/drawingml/2006/main"/>
-          <a:lstStyle xmlns:a="http://schemas.openxmlformats.org/drawingml/2006/main"/>
-          <a:p xmlns:a="http://schemas.openxmlformats.org/drawingml/2006/main">
+          <a:bodyPr/>
+          <a:lstStyle/>
+          <a:p>
             <a:pPr lvl="0">
               <a:buNone/>
             </a:pPr>
@@ -1692,7 +1611,7 @@
               <a:t>Haga clic para modificar los estilos de texto del patrón</a:t>
             </a:r>
           </a:p>
-          <a:p xmlns:a="http://schemas.openxmlformats.org/drawingml/2006/main">
+          <a:p>
             <a:pPr lvl="1">
               <a:buNone/>
             </a:pPr>
@@ -1700,7 +1619,7 @@
               <a:t>Segundo nivel</a:t>
             </a:r>
           </a:p>
-          <a:p xmlns:a="http://schemas.openxmlformats.org/drawingml/2006/main">
+          <a:p>
             <a:pPr lvl="2">
               <a:buNone/>
             </a:pPr>
@@ -1708,7 +1627,7 @@
               <a:t>Tercer nivel</a:t>
             </a:r>
           </a:p>
-          <a:p xmlns:a="http://schemas.openxmlformats.org/drawingml/2006/main">
+          <a:p>
             <a:pPr lvl="3">
               <a:buNone/>
             </a:pPr>
@@ -1716,28 +1635,27 @@
               <a:t>Cuarto nivel</a:t>
             </a:r>
           </a:p>
-          <a:p xmlns:a="http://schemas.openxmlformats.org/drawingml/2006/main">
+          <a:p>
             <a:pPr lvl="4">
               <a:buNone/>
             </a:pPr>
             <a:r>
               <a:t>Quinto nivel</a:t>
             </a:r>
-            <a:endParaRPr/>
           </a:p>
         </p:txBody>
       </p:sp>
       <p:sp>
         <p:nvSpPr>
           <p:cNvPr id="5" name="Date Placeholder 4">
-            <a:extLst xmlns:a="http://schemas.openxmlformats.org/drawingml/2006/main">
+            <a:extLst>
               <a:ext uri="{FF2B5EF4-FFF2-40B4-BE49-F238E27FC236}">
                 <a16:creationId xmlns:a16="http://schemas.microsoft.com/office/drawing/2014/main" id="{D6CD1099-6AD6-4472-8AD7-C1C5BBD23F6B}"/>
               </a:ext>
             </a:extLst>
           </p:cNvPr>
           <p:cNvSpPr>
-            <a:spLocks xmlns:a="http://schemas.openxmlformats.org/drawingml/2006/main" noGrp="1"/>
+            <a:spLocks noGrp="1"/>
           </p:cNvSpPr>
           <p:nvPr>
             <p:ph type="dt" idx="10"/>
@@ -1745,11 +1663,11 @@
         </p:nvSpPr>
         <p:spPr/>
         <p:txBody>
-          <a:bodyPr xmlns:a="http://schemas.openxmlformats.org/drawingml/2006/main"/>
-          <a:lstStyle xmlns:a="http://schemas.openxmlformats.org/drawingml/2006/main"/>
-          <a:p xmlns:a="http://schemas.openxmlformats.org/drawingml/2006/main">
+          <a:bodyPr/>
+          <a:lstStyle/>
+          <a:p>
             <a:fld id="{2859D279-7FFD-4108-AAC5-6DD8152157B1}" type="datetimeFigureOut">
-              <a:t>05/10/2023</a:t>
+              <a:t>31/08/2026</a:t>
             </a:fld>
             <a:endParaRPr/>
           </a:p>
@@ -1758,14 +1676,14 @@
       <p:sp>
         <p:nvSpPr>
           <p:cNvPr id="6" name="Footer Placeholder 5">
-            <a:extLst xmlns:a="http://schemas.openxmlformats.org/drawingml/2006/main">
+            <a:extLst>
               <a:ext uri="{FF2B5EF4-FFF2-40B4-BE49-F238E27FC236}">
                 <a16:creationId xmlns:a16="http://schemas.microsoft.com/office/drawing/2014/main" id="{D5EC5E7E-9F67-41BB-8566-BE3B2D3AE0F6}"/>
               </a:ext>
             </a:extLst>
           </p:cNvPr>
           <p:cNvSpPr>
-            <a:spLocks xmlns:a="http://schemas.openxmlformats.org/drawingml/2006/main" noGrp="1"/>
+            <a:spLocks noGrp="1"/>
           </p:cNvSpPr>
           <p:nvPr>
             <p:ph type="ftr" idx="11"/>
@@ -1773,9 +1691,9 @@
         </p:nvSpPr>
         <p:spPr/>
         <p:txBody>
-          <a:bodyPr xmlns:a="http://schemas.openxmlformats.org/drawingml/2006/main"/>
-          <a:lstStyle xmlns:a="http://schemas.openxmlformats.org/drawingml/2006/main"/>
-          <a:p xmlns:a="http://schemas.openxmlformats.org/drawingml/2006/main">
+          <a:bodyPr/>
+          <a:lstStyle/>
+          <a:p>
             <a:endParaRPr/>
           </a:p>
         </p:txBody>
@@ -1783,14 +1701,14 @@
       <p:sp>
         <p:nvSpPr>
           <p:cNvPr id="7" name="Slide Number Placeholder 6">
-            <a:extLst xmlns:a="http://schemas.openxmlformats.org/drawingml/2006/main">
+            <a:extLst>
               <a:ext uri="{FF2B5EF4-FFF2-40B4-BE49-F238E27FC236}">
                 <a16:creationId xmlns:a16="http://schemas.microsoft.com/office/drawing/2014/main" id="{5C62935A-094F-4698-A942-7AB5051C6748}"/>
               </a:ext>
             </a:extLst>
           </p:cNvPr>
           <p:cNvSpPr>
-            <a:spLocks xmlns:a="http://schemas.openxmlformats.org/drawingml/2006/main" noGrp="1"/>
+            <a:spLocks noGrp="1"/>
           </p:cNvSpPr>
           <p:nvPr>
             <p:ph type="sldNum" idx="12"/>
@@ -1798,9 +1716,9 @@
         </p:nvSpPr>
         <p:spPr/>
         <p:txBody>
-          <a:bodyPr xmlns:a="http://schemas.openxmlformats.org/drawingml/2006/main"/>
-          <a:lstStyle xmlns:a="http://schemas.openxmlformats.org/drawingml/2006/main"/>
-          <a:p xmlns:a="http://schemas.openxmlformats.org/drawingml/2006/main">
+          <a:bodyPr/>
+          <a:lstStyle/>
+          <a:p>
             <a:fld id="{9E107B50-42F2-442C-8A9B-03B1021A57A2}" type="slidenum">
               <a:t>‹Nº›</a:t>
             </a:fld>
@@ -1810,11 +1728,14 @@
       </p:sp>
     </p:spTree>
   </p:cSld>
+  <p:clrMapOvr>
+    <a:masterClrMapping/>
+  </p:clrMapOvr>
 </p:sldLayout>
 </file>
 
 <file path=ppt/slideLayouts/slideLayout5.xml><?xml version="1.0" encoding="utf-8"?>
-<p:sldLayout xmlns:p="http://schemas.openxmlformats.org/presentationml/2006/main" type="twoTxTwoObj" preserve="1">
+<p:sldLayout xmlns:a="http://schemas.openxmlformats.org/drawingml/2006/main" xmlns:r="http://schemas.openxmlformats.org/officeDocument/2006/relationships" xmlns:p="http://schemas.openxmlformats.org/presentationml/2006/main" type="twoTxTwoObj" preserve="1">
   <p:cSld name="Comparación">
     <p:spTree>
       <p:nvGrpSpPr>
@@ -1823,66 +1744,70 @@
         <p:nvPr/>
       </p:nvGrpSpPr>
       <p:grpSpPr>
-        <a:xfrm xmlns:a="http://schemas.openxmlformats.org/drawingml/2006/main"/>
+        <a:xfrm>
+          <a:off x="0" y="0"/>
+          <a:ext cx="0" cy="0"/>
+          <a:chOff x="0" y="0"/>
+          <a:chExt cx="0" cy="0"/>
+        </a:xfrm>
       </p:grpSpPr>
       <p:sp>
         <p:nvSpPr>
           <p:cNvPr id="2" name="Title 1">
-            <a:extLst xmlns:a="http://schemas.openxmlformats.org/drawingml/2006/main">
+            <a:extLst>
               <a:ext uri="{FF2B5EF4-FFF2-40B4-BE49-F238E27FC236}">
                 <a16:creationId xmlns:a16="http://schemas.microsoft.com/office/drawing/2014/main" id="{02AF4156-5EC5-432B-847A-525D27801DD8}"/>
               </a:ext>
             </a:extLst>
           </p:cNvPr>
           <p:cNvSpPr>
-            <a:spLocks xmlns:a="http://schemas.openxmlformats.org/drawingml/2006/main" noGrp="1"/>
-          </p:cNvSpPr>
-          <p:nvPr>
-            <p:ph type="title" idx="0"/>
+            <a:spLocks noGrp="1"/>
+          </p:cNvSpPr>
+          <p:nvPr>
+            <p:ph type="title"/>
           </p:nvPr>
         </p:nvSpPr>
         <p:spPr>
-          <a:xfrm xmlns:a="http://schemas.openxmlformats.org/drawingml/2006/main">
+          <a:xfrm>
             <a:off x="2231671" y="2491650"/>
             <a:ext cx="27944386" cy="9045740"/>
           </a:xfrm>
         </p:spPr>
         <p:txBody>
-          <a:bodyPr xmlns:a="http://schemas.openxmlformats.org/drawingml/2006/main"/>
-          <a:lstStyle xmlns:a="http://schemas.openxmlformats.org/drawingml/2006/main"/>
-          <a:p xmlns:a="http://schemas.openxmlformats.org/drawingml/2006/main">
+          <a:bodyPr/>
+          <a:lstStyle/>
+          <a:p>
             <a:r>
               <a:t>Haga clic para modificar el estilo de título del patrón</a:t>
             </a:r>
-            <a:endParaRPr/>
           </a:p>
         </p:txBody>
       </p:sp>
       <p:sp>
         <p:nvSpPr>
           <p:cNvPr id="3" name="Text Placeholder 2">
-            <a:extLst xmlns:a="http://schemas.openxmlformats.org/drawingml/2006/main">
+            <a:extLst>
               <a:ext uri="{FF2B5EF4-FFF2-40B4-BE49-F238E27FC236}">
                 <a16:creationId xmlns:a16="http://schemas.microsoft.com/office/drawing/2014/main" id="{7041C7ED-05C5-4A15-882C-A09897E6F072}"/>
               </a:ext>
             </a:extLst>
           </p:cNvPr>
           <p:cNvSpPr>
-            <a:spLocks xmlns:a="http://schemas.openxmlformats.org/drawingml/2006/main" noGrp="1"/>
+            <a:spLocks noGrp="1"/>
           </p:cNvSpPr>
           <p:nvPr>
             <p:ph type="body" idx="1"/>
           </p:nvPr>
         </p:nvSpPr>
         <p:spPr>
-          <a:xfrm xmlns:a="http://schemas.openxmlformats.org/drawingml/2006/main">
+          <a:xfrm>
             <a:off x="2231675" y="11472381"/>
             <a:ext cx="13706415" cy="5622437"/>
           </a:xfrm>
         </p:spPr>
         <p:txBody>
-          <a:bodyPr xmlns:a="http://schemas.openxmlformats.org/drawingml/2006/main" anchor="b"/>
-          <a:lstStyle xmlns:a="http://schemas.openxmlformats.org/drawingml/2006/main">
+          <a:bodyPr anchor="b"/>
+          <a:lstStyle>
             <a:lvl1pPr marL="0" indent="0">
               <a:buNone/>
               <a:defRPr sz="8504" b="1"/>
@@ -1920,7 +1845,7 @@
               <a:defRPr sz="5669" b="1"/>
             </a:lvl9pPr>
           </a:lstStyle>
-          <a:p xmlns:a="http://schemas.openxmlformats.org/drawingml/2006/main">
+          <a:p>
             <a:pPr lvl="0">
               <a:buNone/>
             </a:pPr>
@@ -1933,29 +1858,29 @@
       <p:sp>
         <p:nvSpPr>
           <p:cNvPr id="4" name="Content Placeholder 3">
-            <a:extLst xmlns:a="http://schemas.openxmlformats.org/drawingml/2006/main">
+            <a:extLst>
               <a:ext uri="{FF2B5EF4-FFF2-40B4-BE49-F238E27FC236}">
                 <a16:creationId xmlns:a16="http://schemas.microsoft.com/office/drawing/2014/main" id="{FA0526AB-0AF6-4E11-88C9-F30FBE5E62C5}"/>
               </a:ext>
             </a:extLst>
           </p:cNvPr>
           <p:cNvSpPr>
-            <a:spLocks xmlns:a="http://schemas.openxmlformats.org/drawingml/2006/main" noGrp="1"/>
+            <a:spLocks noGrp="1"/>
           </p:cNvSpPr>
           <p:nvPr>
             <p:ph idx="2"/>
           </p:nvPr>
         </p:nvSpPr>
         <p:spPr>
-          <a:xfrm xmlns:a="http://schemas.openxmlformats.org/drawingml/2006/main">
+          <a:xfrm>
             <a:off x="2231675" y="17094818"/>
             <a:ext cx="13706415" cy="25143901"/>
           </a:xfrm>
         </p:spPr>
         <p:txBody>
-          <a:bodyPr xmlns:a="http://schemas.openxmlformats.org/drawingml/2006/main"/>
-          <a:lstStyle xmlns:a="http://schemas.openxmlformats.org/drawingml/2006/main"/>
-          <a:p xmlns:a="http://schemas.openxmlformats.org/drawingml/2006/main">
+          <a:bodyPr/>
+          <a:lstStyle/>
+          <a:p>
             <a:pPr lvl="0">
               <a:buNone/>
             </a:pPr>
@@ -1963,7 +1888,7 @@
               <a:t>Haga clic para modificar los estilos de texto del patrón</a:t>
             </a:r>
           </a:p>
-          <a:p xmlns:a="http://schemas.openxmlformats.org/drawingml/2006/main">
+          <a:p>
             <a:pPr lvl="1">
               <a:buNone/>
             </a:pPr>
@@ -1971,7 +1896,7 @@
               <a:t>Segundo nivel</a:t>
             </a:r>
           </a:p>
-          <a:p xmlns:a="http://schemas.openxmlformats.org/drawingml/2006/main">
+          <a:p>
             <a:pPr lvl="2">
               <a:buNone/>
             </a:pPr>
@@ -1979,7 +1904,7 @@
               <a:t>Tercer nivel</a:t>
             </a:r>
           </a:p>
-          <a:p xmlns:a="http://schemas.openxmlformats.org/drawingml/2006/main">
+          <a:p>
             <a:pPr lvl="3">
               <a:buNone/>
             </a:pPr>
@@ -1987,42 +1912,41 @@
               <a:t>Cuarto nivel</a:t>
             </a:r>
           </a:p>
-          <a:p xmlns:a="http://schemas.openxmlformats.org/drawingml/2006/main">
+          <a:p>
             <a:pPr lvl="4">
               <a:buNone/>
             </a:pPr>
             <a:r>
               <a:t>Quinto nivel</a:t>
             </a:r>
-            <a:endParaRPr/>
           </a:p>
         </p:txBody>
       </p:sp>
       <p:sp>
         <p:nvSpPr>
           <p:cNvPr id="5" name="Text Placeholder 4">
-            <a:extLst xmlns:a="http://schemas.openxmlformats.org/drawingml/2006/main">
+            <a:extLst>
               <a:ext uri="{FF2B5EF4-FFF2-40B4-BE49-F238E27FC236}">
                 <a16:creationId xmlns:a16="http://schemas.microsoft.com/office/drawing/2014/main" id="{9507890B-CD78-472D-8F9C-2482C06AAE37}"/>
               </a:ext>
             </a:extLst>
           </p:cNvPr>
           <p:cNvSpPr>
-            <a:spLocks xmlns:a="http://schemas.openxmlformats.org/drawingml/2006/main" noGrp="1"/>
+            <a:spLocks noGrp="1"/>
           </p:cNvSpPr>
           <p:nvPr>
             <p:ph type="body" idx="3"/>
           </p:nvPr>
         </p:nvSpPr>
         <p:spPr>
-          <a:xfrm xmlns:a="http://schemas.openxmlformats.org/drawingml/2006/main">
+          <a:xfrm>
             <a:off x="16402142" y="11472381"/>
             <a:ext cx="13773917" cy="5622437"/>
           </a:xfrm>
         </p:spPr>
         <p:txBody>
-          <a:bodyPr xmlns:a="http://schemas.openxmlformats.org/drawingml/2006/main" anchor="b"/>
-          <a:lstStyle xmlns:a="http://schemas.openxmlformats.org/drawingml/2006/main">
+          <a:bodyPr anchor="b"/>
+          <a:lstStyle>
             <a:lvl1pPr marL="0" indent="0">
               <a:buNone/>
               <a:defRPr sz="8504" b="1"/>
@@ -2060,7 +1984,7 @@
               <a:defRPr sz="5669" b="1"/>
             </a:lvl9pPr>
           </a:lstStyle>
-          <a:p xmlns:a="http://schemas.openxmlformats.org/drawingml/2006/main">
+          <a:p>
             <a:pPr lvl="0">
               <a:buNone/>
             </a:pPr>
@@ -2073,29 +1997,29 @@
       <p:sp>
         <p:nvSpPr>
           <p:cNvPr id="6" name="Content Placeholder 5">
-            <a:extLst xmlns:a="http://schemas.openxmlformats.org/drawingml/2006/main">
+            <a:extLst>
               <a:ext uri="{FF2B5EF4-FFF2-40B4-BE49-F238E27FC236}">
                 <a16:creationId xmlns:a16="http://schemas.microsoft.com/office/drawing/2014/main" id="{44213B05-7078-476C-835F-4D7CE6A7ABD7}"/>
               </a:ext>
             </a:extLst>
           </p:cNvPr>
           <p:cNvSpPr>
-            <a:spLocks xmlns:a="http://schemas.openxmlformats.org/drawingml/2006/main" noGrp="1"/>
+            <a:spLocks noGrp="1"/>
           </p:cNvSpPr>
           <p:nvPr>
             <p:ph idx="4"/>
           </p:nvPr>
         </p:nvSpPr>
         <p:spPr>
-          <a:xfrm xmlns:a="http://schemas.openxmlformats.org/drawingml/2006/main">
+          <a:xfrm>
             <a:off x="16402142" y="17094818"/>
             <a:ext cx="13773917" cy="25143901"/>
           </a:xfrm>
         </p:spPr>
         <p:txBody>
-          <a:bodyPr xmlns:a="http://schemas.openxmlformats.org/drawingml/2006/main"/>
-          <a:lstStyle xmlns:a="http://schemas.openxmlformats.org/drawingml/2006/main"/>
-          <a:p xmlns:a="http://schemas.openxmlformats.org/drawingml/2006/main">
+          <a:bodyPr/>
+          <a:lstStyle/>
+          <a:p>
             <a:pPr lvl="0">
               <a:buNone/>
             </a:pPr>
@@ -2103,7 +2027,7 @@
               <a:t>Haga clic para modificar los estilos de texto del patrón</a:t>
             </a:r>
           </a:p>
-          <a:p xmlns:a="http://schemas.openxmlformats.org/drawingml/2006/main">
+          <a:p>
             <a:pPr lvl="1">
               <a:buNone/>
             </a:pPr>
@@ -2111,7 +2035,7 @@
               <a:t>Segundo nivel</a:t>
             </a:r>
           </a:p>
-          <a:p xmlns:a="http://schemas.openxmlformats.org/drawingml/2006/main">
+          <a:p>
             <a:pPr lvl="2">
               <a:buNone/>
             </a:pPr>
@@ -2119,7 +2043,7 @@
               <a:t>Tercer nivel</a:t>
             </a:r>
           </a:p>
-          <a:p xmlns:a="http://schemas.openxmlformats.org/drawingml/2006/main">
+          <a:p>
             <a:pPr lvl="3">
               <a:buNone/>
             </a:pPr>
@@ -2127,28 +2051,27 @@
               <a:t>Cuarto nivel</a:t>
             </a:r>
           </a:p>
-          <a:p xmlns:a="http://schemas.openxmlformats.org/drawingml/2006/main">
+          <a:p>
             <a:pPr lvl="4">
               <a:buNone/>
             </a:pPr>
             <a:r>
               <a:t>Quinto nivel</a:t>
             </a:r>
-            <a:endParaRPr/>
           </a:p>
         </p:txBody>
       </p:sp>
       <p:sp>
         <p:nvSpPr>
           <p:cNvPr id="7" name="Date Placeholder 6">
-            <a:extLst xmlns:a="http://schemas.openxmlformats.org/drawingml/2006/main">
+            <a:extLst>
               <a:ext uri="{FF2B5EF4-FFF2-40B4-BE49-F238E27FC236}">
                 <a16:creationId xmlns:a16="http://schemas.microsoft.com/office/drawing/2014/main" id="{546AF7FA-0544-412E-8E9B-256F6E13818B}"/>
               </a:ext>
             </a:extLst>
           </p:cNvPr>
           <p:cNvSpPr>
-            <a:spLocks xmlns:a="http://schemas.openxmlformats.org/drawingml/2006/main" noGrp="1"/>
+            <a:spLocks noGrp="1"/>
           </p:cNvSpPr>
           <p:nvPr>
             <p:ph type="dt" idx="10"/>
@@ -2156,11 +2079,11 @@
         </p:nvSpPr>
         <p:spPr/>
         <p:txBody>
-          <a:bodyPr xmlns:a="http://schemas.openxmlformats.org/drawingml/2006/main"/>
-          <a:lstStyle xmlns:a="http://schemas.openxmlformats.org/drawingml/2006/main"/>
-          <a:p xmlns:a="http://schemas.openxmlformats.org/drawingml/2006/main">
+          <a:bodyPr/>
+          <a:lstStyle/>
+          <a:p>
             <a:fld id="{2859D279-7FFD-4108-AAC5-6DD8152157B1}" type="datetimeFigureOut">
-              <a:t>05/10/2023</a:t>
+              <a:t>31/08/2026</a:t>
             </a:fld>
             <a:endParaRPr/>
           </a:p>
@@ -2169,14 +2092,14 @@
       <p:sp>
         <p:nvSpPr>
           <p:cNvPr id="8" name="Footer Placeholder 7">
-            <a:extLst xmlns:a="http://schemas.openxmlformats.org/drawingml/2006/main">
+            <a:extLst>
               <a:ext uri="{FF2B5EF4-FFF2-40B4-BE49-F238E27FC236}">
                 <a16:creationId xmlns:a16="http://schemas.microsoft.com/office/drawing/2014/main" id="{E9727B08-7112-494B-9FB3-390A3E1B699D}"/>
               </a:ext>
             </a:extLst>
           </p:cNvPr>
           <p:cNvSpPr>
-            <a:spLocks xmlns:a="http://schemas.openxmlformats.org/drawingml/2006/main" noGrp="1"/>
+            <a:spLocks noGrp="1"/>
           </p:cNvSpPr>
           <p:nvPr>
             <p:ph type="ftr" idx="11"/>
@@ -2184,9 +2107,9 @@
         </p:nvSpPr>
         <p:spPr/>
         <p:txBody>
-          <a:bodyPr xmlns:a="http://schemas.openxmlformats.org/drawingml/2006/main"/>
-          <a:lstStyle xmlns:a="http://schemas.openxmlformats.org/drawingml/2006/main"/>
-          <a:p xmlns:a="http://schemas.openxmlformats.org/drawingml/2006/main">
+          <a:bodyPr/>
+          <a:lstStyle/>
+          <a:p>
             <a:endParaRPr/>
           </a:p>
         </p:txBody>
@@ -2194,14 +2117,14 @@
       <p:sp>
         <p:nvSpPr>
           <p:cNvPr id="9" name="Slide Number Placeholder 8">
-            <a:extLst xmlns:a="http://schemas.openxmlformats.org/drawingml/2006/main">
+            <a:extLst>
               <a:ext uri="{FF2B5EF4-FFF2-40B4-BE49-F238E27FC236}">
                 <a16:creationId xmlns:a16="http://schemas.microsoft.com/office/drawing/2014/main" id="{9052CE5E-F92E-4FAE-B31D-6C14E7B81B27}"/>
               </a:ext>
             </a:extLst>
           </p:cNvPr>
           <p:cNvSpPr>
-            <a:spLocks xmlns:a="http://schemas.openxmlformats.org/drawingml/2006/main" noGrp="1"/>
+            <a:spLocks noGrp="1"/>
           </p:cNvSpPr>
           <p:nvPr>
             <p:ph type="sldNum" idx="12"/>
@@ -2209,9 +2132,9 @@
         </p:nvSpPr>
         <p:spPr/>
         <p:txBody>
-          <a:bodyPr xmlns:a="http://schemas.openxmlformats.org/drawingml/2006/main"/>
-          <a:lstStyle xmlns:a="http://schemas.openxmlformats.org/drawingml/2006/main"/>
-          <a:p xmlns:a="http://schemas.openxmlformats.org/drawingml/2006/main">
+          <a:bodyPr/>
+          <a:lstStyle/>
+          <a:p>
             <a:fld id="{9E107B50-42F2-442C-8A9B-03B1021A57A2}" type="slidenum">
               <a:t>‹Nº›</a:t>
             </a:fld>
@@ -2221,11 +2144,14 @@
       </p:sp>
     </p:spTree>
   </p:cSld>
+  <p:clrMapOvr>
+    <a:masterClrMapping/>
+  </p:clrMapOvr>
 </p:sldLayout>
 </file>
 
 <file path=ppt/slideLayouts/slideLayout6.xml><?xml version="1.0" encoding="utf-8"?>
-<p:sldLayout xmlns:p="http://schemas.openxmlformats.org/presentationml/2006/main" type="titleOnly" preserve="1">
+<p:sldLayout xmlns:a="http://schemas.openxmlformats.org/drawingml/2006/main" xmlns:r="http://schemas.openxmlformats.org/officeDocument/2006/relationships" xmlns:p="http://schemas.openxmlformats.org/presentationml/2006/main" type="titleOnly" preserve="1">
   <p:cSld name="Solo el título">
     <p:spTree>
       <p:nvGrpSpPr>
@@ -2234,47 +2160,51 @@
         <p:nvPr/>
       </p:nvGrpSpPr>
       <p:grpSpPr>
-        <a:xfrm xmlns:a="http://schemas.openxmlformats.org/drawingml/2006/main"/>
+        <a:xfrm>
+          <a:off x="0" y="0"/>
+          <a:ext cx="0" cy="0"/>
+          <a:chOff x="0" y="0"/>
+          <a:chExt cx="0" cy="0"/>
+        </a:xfrm>
       </p:grpSpPr>
       <p:sp>
         <p:nvSpPr>
           <p:cNvPr id="2" name="Title 1">
-            <a:extLst xmlns:a="http://schemas.openxmlformats.org/drawingml/2006/main">
+            <a:extLst>
               <a:ext uri="{FF2B5EF4-FFF2-40B4-BE49-F238E27FC236}">
                 <a16:creationId xmlns:a16="http://schemas.microsoft.com/office/drawing/2014/main" id="{DA7C75EF-AD44-4131-86A2-BC55847C049C}"/>
               </a:ext>
             </a:extLst>
           </p:cNvPr>
           <p:cNvSpPr>
-            <a:spLocks xmlns:a="http://schemas.openxmlformats.org/drawingml/2006/main" noGrp="1"/>
-          </p:cNvSpPr>
-          <p:nvPr>
-            <p:ph type="title" idx="0"/>
+            <a:spLocks noGrp="1"/>
+          </p:cNvSpPr>
+          <p:nvPr>
+            <p:ph type="title"/>
           </p:nvPr>
         </p:nvSpPr>
         <p:spPr/>
         <p:txBody>
-          <a:bodyPr xmlns:a="http://schemas.openxmlformats.org/drawingml/2006/main"/>
-          <a:lstStyle xmlns:a="http://schemas.openxmlformats.org/drawingml/2006/main"/>
-          <a:p xmlns:a="http://schemas.openxmlformats.org/drawingml/2006/main">
+          <a:bodyPr/>
+          <a:lstStyle/>
+          <a:p>
             <a:r>
               <a:t>Haga clic para modificar el estilo de título del patrón</a:t>
             </a:r>
-            <a:endParaRPr/>
           </a:p>
         </p:txBody>
       </p:sp>
       <p:sp>
         <p:nvSpPr>
           <p:cNvPr id="3" name="Date Placeholder 2">
-            <a:extLst xmlns:a="http://schemas.openxmlformats.org/drawingml/2006/main">
+            <a:extLst>
               <a:ext uri="{FF2B5EF4-FFF2-40B4-BE49-F238E27FC236}">
                 <a16:creationId xmlns:a16="http://schemas.microsoft.com/office/drawing/2014/main" id="{66CF7DC0-8431-4886-B2F0-2A9E9EB37B8B}"/>
               </a:ext>
             </a:extLst>
           </p:cNvPr>
           <p:cNvSpPr>
-            <a:spLocks xmlns:a="http://schemas.openxmlformats.org/drawingml/2006/main" noGrp="1"/>
+            <a:spLocks noGrp="1"/>
           </p:cNvSpPr>
           <p:nvPr>
             <p:ph type="dt" idx="10"/>
@@ -2282,11 +2212,11 @@
         </p:nvSpPr>
         <p:spPr/>
         <p:txBody>
-          <a:bodyPr xmlns:a="http://schemas.openxmlformats.org/drawingml/2006/main"/>
-          <a:lstStyle xmlns:a="http://schemas.openxmlformats.org/drawingml/2006/main"/>
-          <a:p xmlns:a="http://schemas.openxmlformats.org/drawingml/2006/main">
+          <a:bodyPr/>
+          <a:lstStyle/>
+          <a:p>
             <a:fld id="{2859D279-7FFD-4108-AAC5-6DD8152157B1}" type="datetimeFigureOut">
-              <a:t>05/10/2023</a:t>
+              <a:t>31/08/2026</a:t>
             </a:fld>
             <a:endParaRPr/>
           </a:p>
@@ -2295,14 +2225,14 @@
       <p:sp>
         <p:nvSpPr>
           <p:cNvPr id="4" name="Footer Placeholder 3">
-            <a:extLst xmlns:a="http://schemas.openxmlformats.org/drawingml/2006/main">
+            <a:extLst>
               <a:ext uri="{FF2B5EF4-FFF2-40B4-BE49-F238E27FC236}">
                 <a16:creationId xmlns:a16="http://schemas.microsoft.com/office/drawing/2014/main" id="{CEEBA80F-EA9B-4282-8FC0-723A47D773D9}"/>
               </a:ext>
             </a:extLst>
           </p:cNvPr>
           <p:cNvSpPr>
-            <a:spLocks xmlns:a="http://schemas.openxmlformats.org/drawingml/2006/main" noGrp="1"/>
+            <a:spLocks noGrp="1"/>
           </p:cNvSpPr>
           <p:nvPr>
             <p:ph type="ftr" idx="11"/>
@@ -2310,9 +2240,9 @@
         </p:nvSpPr>
         <p:spPr/>
         <p:txBody>
-          <a:bodyPr xmlns:a="http://schemas.openxmlformats.org/drawingml/2006/main"/>
-          <a:lstStyle xmlns:a="http://schemas.openxmlformats.org/drawingml/2006/main"/>
-          <a:p xmlns:a="http://schemas.openxmlformats.org/drawingml/2006/main">
+          <a:bodyPr/>
+          <a:lstStyle/>
+          <a:p>
             <a:endParaRPr/>
           </a:p>
         </p:txBody>
@@ -2320,14 +2250,14 @@
       <p:sp>
         <p:nvSpPr>
           <p:cNvPr id="5" name="Slide Number Placeholder 4">
-            <a:extLst xmlns:a="http://schemas.openxmlformats.org/drawingml/2006/main">
+            <a:extLst>
               <a:ext uri="{FF2B5EF4-FFF2-40B4-BE49-F238E27FC236}">
                 <a16:creationId xmlns:a16="http://schemas.microsoft.com/office/drawing/2014/main" id="{3A6AADC8-A1BF-4752-B518-68B5D70EA70C}"/>
               </a:ext>
             </a:extLst>
           </p:cNvPr>
           <p:cNvSpPr>
-            <a:spLocks xmlns:a="http://schemas.openxmlformats.org/drawingml/2006/main" noGrp="1"/>
+            <a:spLocks noGrp="1"/>
           </p:cNvSpPr>
           <p:nvPr>
             <p:ph type="sldNum" idx="12"/>
@@ -2335,9 +2265,9 @@
         </p:nvSpPr>
         <p:spPr/>
         <p:txBody>
-          <a:bodyPr xmlns:a="http://schemas.openxmlformats.org/drawingml/2006/main"/>
-          <a:lstStyle xmlns:a="http://schemas.openxmlformats.org/drawingml/2006/main"/>
-          <a:p xmlns:a="http://schemas.openxmlformats.org/drawingml/2006/main">
+          <a:bodyPr/>
+          <a:lstStyle/>
+          <a:p>
             <a:fld id="{9E107B50-42F2-442C-8A9B-03B1021A57A2}" type="slidenum">
               <a:t>‹Nº›</a:t>
             </a:fld>
@@ -2347,11 +2277,14 @@
       </p:sp>
     </p:spTree>
   </p:cSld>
+  <p:clrMapOvr>
+    <a:masterClrMapping/>
+  </p:clrMapOvr>
 </p:sldLayout>
 </file>
 
 <file path=ppt/slideLayouts/slideLayout7.xml><?xml version="1.0" encoding="utf-8"?>
-<p:sldLayout xmlns:p="http://schemas.openxmlformats.org/presentationml/2006/main" type="blank" preserve="1">
+<p:sldLayout xmlns:a="http://schemas.openxmlformats.org/drawingml/2006/main" xmlns:r="http://schemas.openxmlformats.org/officeDocument/2006/relationships" xmlns:p="http://schemas.openxmlformats.org/presentationml/2006/main" type="blank" preserve="1">
   <p:cSld name="En blanco">
     <p:spTree>
       <p:nvGrpSpPr>
@@ -2360,19 +2293,24 @@
         <p:nvPr/>
       </p:nvGrpSpPr>
       <p:grpSpPr>
-        <a:xfrm xmlns:a="http://schemas.openxmlformats.org/drawingml/2006/main"/>
+        <a:xfrm>
+          <a:off x="0" y="0"/>
+          <a:ext cx="0" cy="0"/>
+          <a:chOff x="0" y="0"/>
+          <a:chExt cx="0" cy="0"/>
+        </a:xfrm>
       </p:grpSpPr>
       <p:sp>
         <p:nvSpPr>
           <p:cNvPr id="2" name="Date Placeholder 1">
-            <a:extLst xmlns:a="http://schemas.openxmlformats.org/drawingml/2006/main">
+            <a:extLst>
               <a:ext uri="{FF2B5EF4-FFF2-40B4-BE49-F238E27FC236}">
                 <a16:creationId xmlns:a16="http://schemas.microsoft.com/office/drawing/2014/main" id="{AFBC4771-409D-4EA9-93CD-E2B1790D1AF3}"/>
               </a:ext>
             </a:extLst>
           </p:cNvPr>
           <p:cNvSpPr>
-            <a:spLocks xmlns:a="http://schemas.openxmlformats.org/drawingml/2006/main" noGrp="1"/>
+            <a:spLocks noGrp="1"/>
           </p:cNvSpPr>
           <p:nvPr>
             <p:ph type="dt" idx="10"/>
@@ -2380,11 +2318,11 @@
         </p:nvSpPr>
         <p:spPr/>
         <p:txBody>
-          <a:bodyPr xmlns:a="http://schemas.openxmlformats.org/drawingml/2006/main"/>
-          <a:lstStyle xmlns:a="http://schemas.openxmlformats.org/drawingml/2006/main"/>
-          <a:p xmlns:a="http://schemas.openxmlformats.org/drawingml/2006/main">
+          <a:bodyPr/>
+          <a:lstStyle/>
+          <a:p>
             <a:fld id="{2859D279-7FFD-4108-AAC5-6DD8152157B1}" type="datetimeFigureOut">
-              <a:t>05/10/2023</a:t>
+              <a:t>31/08/2026</a:t>
             </a:fld>
             <a:endParaRPr/>
           </a:p>
@@ -2393,14 +2331,14 @@
       <p:sp>
         <p:nvSpPr>
           <p:cNvPr id="3" name="Footer Placeholder 2">
-            <a:extLst xmlns:a="http://schemas.openxmlformats.org/drawingml/2006/main">
+            <a:extLst>
               <a:ext uri="{FF2B5EF4-FFF2-40B4-BE49-F238E27FC236}">
                 <a16:creationId xmlns:a16="http://schemas.microsoft.com/office/drawing/2014/main" id="{55347D61-30E1-4E7F-93C1-A911AB23F58F}"/>
               </a:ext>
             </a:extLst>
           </p:cNvPr>
           <p:cNvSpPr>
-            <a:spLocks xmlns:a="http://schemas.openxmlformats.org/drawingml/2006/main" noGrp="1"/>
+            <a:spLocks noGrp="1"/>
           </p:cNvSpPr>
           <p:nvPr>
             <p:ph type="ftr" idx="11"/>
@@ -2408,9 +2346,9 @@
         </p:nvSpPr>
         <p:spPr/>
         <p:txBody>
-          <a:bodyPr xmlns:a="http://schemas.openxmlformats.org/drawingml/2006/main"/>
-          <a:lstStyle xmlns:a="http://schemas.openxmlformats.org/drawingml/2006/main"/>
-          <a:p xmlns:a="http://schemas.openxmlformats.org/drawingml/2006/main">
+          <a:bodyPr/>
+          <a:lstStyle/>
+          <a:p>
             <a:endParaRPr/>
           </a:p>
         </p:txBody>
@@ -2418,14 +2356,14 @@
       <p:sp>
         <p:nvSpPr>
           <p:cNvPr id="4" name="Slide Number Placeholder 3">
-            <a:extLst xmlns:a="http://schemas.openxmlformats.org/drawingml/2006/main">
+            <a:extLst>
               <a:ext uri="{FF2B5EF4-FFF2-40B4-BE49-F238E27FC236}">
                 <a16:creationId xmlns:a16="http://schemas.microsoft.com/office/drawing/2014/main" id="{6D6B9AEF-B4A3-4009-BADA-52C29F2BB219}"/>
               </a:ext>
             </a:extLst>
           </p:cNvPr>
           <p:cNvSpPr>
-            <a:spLocks xmlns:a="http://schemas.openxmlformats.org/drawingml/2006/main" noGrp="1"/>
+            <a:spLocks noGrp="1"/>
           </p:cNvSpPr>
           <p:nvPr>
             <p:ph type="sldNum" idx="12"/>
@@ -2433,9 +2371,9 @@
         </p:nvSpPr>
         <p:spPr/>
         <p:txBody>
-          <a:bodyPr xmlns:a="http://schemas.openxmlformats.org/drawingml/2006/main"/>
-          <a:lstStyle xmlns:a="http://schemas.openxmlformats.org/drawingml/2006/main"/>
-          <a:p xmlns:a="http://schemas.openxmlformats.org/drawingml/2006/main">
+          <a:bodyPr/>
+          <a:lstStyle/>
+          <a:p>
             <a:fld id="{9E107B50-42F2-442C-8A9B-03B1021A57A2}" type="slidenum">
               <a:t>‹Nº›</a:t>
             </a:fld>
@@ -2445,11 +2383,14 @@
       </p:sp>
     </p:spTree>
   </p:cSld>
+  <p:clrMapOvr>
+    <a:masterClrMapping/>
+  </p:clrMapOvr>
 </p:sldLayout>
 </file>
 
 <file path=ppt/slideLayouts/slideLayout8.xml><?xml version="1.0" encoding="utf-8"?>
-<p:sldLayout xmlns:p="http://schemas.openxmlformats.org/presentationml/2006/main" type="objTx" preserve="1">
+<p:sldLayout xmlns:a="http://schemas.openxmlformats.org/drawingml/2006/main" xmlns:r="http://schemas.openxmlformats.org/officeDocument/2006/relationships" xmlns:p="http://schemas.openxmlformats.org/presentationml/2006/main" type="objTx" preserve="1">
   <p:cSld name="Contenido con título">
     <p:spTree>
       <p:nvGrpSpPr>
@@ -2458,71 +2399,75 @@
         <p:nvPr/>
       </p:nvGrpSpPr>
       <p:grpSpPr>
-        <a:xfrm xmlns:a="http://schemas.openxmlformats.org/drawingml/2006/main"/>
+        <a:xfrm>
+          <a:off x="0" y="0"/>
+          <a:ext cx="0" cy="0"/>
+          <a:chOff x="0" y="0"/>
+          <a:chExt cx="0" cy="0"/>
+        </a:xfrm>
       </p:grpSpPr>
       <p:sp>
         <p:nvSpPr>
           <p:cNvPr id="2" name="Title 1">
-            <a:extLst xmlns:a="http://schemas.openxmlformats.org/drawingml/2006/main">
+            <a:extLst>
               <a:ext uri="{FF2B5EF4-FFF2-40B4-BE49-F238E27FC236}">
                 <a16:creationId xmlns:a16="http://schemas.microsoft.com/office/drawing/2014/main" id="{46FD2A22-6381-4D12-8BF6-7B9A4511F27E}"/>
               </a:ext>
             </a:extLst>
           </p:cNvPr>
           <p:cNvSpPr>
-            <a:spLocks xmlns:a="http://schemas.openxmlformats.org/drawingml/2006/main" noGrp="1"/>
-          </p:cNvSpPr>
-          <p:nvPr>
-            <p:ph type="title" idx="0"/>
+            <a:spLocks noGrp="1"/>
+          </p:cNvSpPr>
+          <p:nvPr>
+            <p:ph type="title"/>
           </p:nvPr>
         </p:nvSpPr>
         <p:spPr>
-          <a:xfrm xmlns:a="http://schemas.openxmlformats.org/drawingml/2006/main">
+          <a:xfrm>
             <a:off x="2231671" y="3119967"/>
             <a:ext cx="10449614" cy="10919883"/>
           </a:xfrm>
         </p:spPr>
         <p:txBody>
-          <a:bodyPr xmlns:a="http://schemas.openxmlformats.org/drawingml/2006/main" anchor="b"/>
-          <a:lstStyle xmlns:a="http://schemas.openxmlformats.org/drawingml/2006/main">
+          <a:bodyPr anchor="b"/>
+          <a:lstStyle>
             <a:lvl1pPr>
               <a:buNone/>
               <a:defRPr sz="11338"/>
             </a:lvl1pPr>
           </a:lstStyle>
-          <a:p xmlns:a="http://schemas.openxmlformats.org/drawingml/2006/main">
+          <a:p>
             <a:r>
               <a:t>Haga clic para modificar el estilo de título del patrón</a:t>
             </a:r>
-            <a:endParaRPr/>
           </a:p>
         </p:txBody>
       </p:sp>
       <p:sp>
         <p:nvSpPr>
           <p:cNvPr id="3" name="Content Placeholder 2">
-            <a:extLst xmlns:a="http://schemas.openxmlformats.org/drawingml/2006/main">
+            <a:extLst>
               <a:ext uri="{FF2B5EF4-FFF2-40B4-BE49-F238E27FC236}">
                 <a16:creationId xmlns:a16="http://schemas.microsoft.com/office/drawing/2014/main" id="{70E22300-7365-460A-A606-4A4DB3D32813}"/>
               </a:ext>
             </a:extLst>
           </p:cNvPr>
           <p:cNvSpPr>
-            <a:spLocks xmlns:a="http://schemas.openxmlformats.org/drawingml/2006/main" noGrp="1"/>
+            <a:spLocks noGrp="1"/>
           </p:cNvSpPr>
           <p:nvPr>
             <p:ph idx="1"/>
           </p:nvPr>
         </p:nvSpPr>
         <p:spPr>
-          <a:xfrm xmlns:a="http://schemas.openxmlformats.org/drawingml/2006/main">
+          <a:xfrm>
             <a:off x="13773917" y="6738272"/>
             <a:ext cx="16402140" cy="33257978"/>
           </a:xfrm>
         </p:spPr>
         <p:txBody>
-          <a:bodyPr xmlns:a="http://schemas.openxmlformats.org/drawingml/2006/main"/>
-          <a:lstStyle xmlns:a="http://schemas.openxmlformats.org/drawingml/2006/main">
+          <a:bodyPr/>
+          <a:lstStyle>
             <a:lvl1pPr>
               <a:buNone/>
               <a:defRPr sz="11338"/>
@@ -2560,7 +2505,7 @@
               <a:defRPr sz="7086"/>
             </a:lvl9pPr>
           </a:lstStyle>
-          <a:p xmlns:a="http://schemas.openxmlformats.org/drawingml/2006/main">
+          <a:p>
             <a:pPr lvl="0">
               <a:buNone/>
             </a:pPr>
@@ -2568,7 +2513,7 @@
               <a:t>Haga clic para modificar los estilos de texto del patrón</a:t>
             </a:r>
           </a:p>
-          <a:p xmlns:a="http://schemas.openxmlformats.org/drawingml/2006/main">
+          <a:p>
             <a:pPr lvl="1">
               <a:buNone/>
             </a:pPr>
@@ -2576,7 +2521,7 @@
               <a:t>Segundo nivel</a:t>
             </a:r>
           </a:p>
-          <a:p xmlns:a="http://schemas.openxmlformats.org/drawingml/2006/main">
+          <a:p>
             <a:pPr lvl="2">
               <a:buNone/>
             </a:pPr>
@@ -2584,7 +2529,7 @@
               <a:t>Tercer nivel</a:t>
             </a:r>
           </a:p>
-          <a:p xmlns:a="http://schemas.openxmlformats.org/drawingml/2006/main">
+          <a:p>
             <a:pPr lvl="3">
               <a:buNone/>
             </a:pPr>
@@ -2592,42 +2537,41 @@
               <a:t>Cuarto nivel</a:t>
             </a:r>
           </a:p>
-          <a:p xmlns:a="http://schemas.openxmlformats.org/drawingml/2006/main">
+          <a:p>
             <a:pPr lvl="4">
               <a:buNone/>
             </a:pPr>
             <a:r>
               <a:t>Quinto nivel</a:t>
             </a:r>
-            <a:endParaRPr/>
           </a:p>
         </p:txBody>
       </p:sp>
       <p:sp>
         <p:nvSpPr>
           <p:cNvPr id="4" name="Text Placeholder 3">
-            <a:extLst xmlns:a="http://schemas.openxmlformats.org/drawingml/2006/main">
+            <a:extLst>
               <a:ext uri="{FF2B5EF4-FFF2-40B4-BE49-F238E27FC236}">
                 <a16:creationId xmlns:a16="http://schemas.microsoft.com/office/drawing/2014/main" id="{0C7BE85B-1843-477B-AFBD-E1F8D32C0F49}"/>
               </a:ext>
             </a:extLst>
           </p:cNvPr>
           <p:cNvSpPr>
-            <a:spLocks xmlns:a="http://schemas.openxmlformats.org/drawingml/2006/main" noGrp="1"/>
+            <a:spLocks noGrp="1"/>
           </p:cNvSpPr>
           <p:nvPr>
             <p:ph type="body" idx="2"/>
           </p:nvPr>
         </p:nvSpPr>
         <p:spPr>
-          <a:xfrm xmlns:a="http://schemas.openxmlformats.org/drawingml/2006/main">
+          <a:xfrm>
             <a:off x="2231671" y="14039850"/>
             <a:ext cx="10449614" cy="26010559"/>
           </a:xfrm>
         </p:spPr>
         <p:txBody>
-          <a:bodyPr xmlns:a="http://schemas.openxmlformats.org/drawingml/2006/main"/>
-          <a:lstStyle xmlns:a="http://schemas.openxmlformats.org/drawingml/2006/main">
+          <a:bodyPr/>
+          <a:lstStyle>
             <a:lvl1pPr marL="0" indent="0">
               <a:buNone/>
               <a:defRPr sz="5669"/>
@@ -2665,7 +2609,7 @@
               <a:defRPr sz="3543"/>
             </a:lvl9pPr>
           </a:lstStyle>
-          <a:p xmlns:a="http://schemas.openxmlformats.org/drawingml/2006/main">
+          <a:p>
             <a:pPr lvl="0">
               <a:buNone/>
             </a:pPr>
@@ -2678,14 +2622,14 @@
       <p:sp>
         <p:nvSpPr>
           <p:cNvPr id="5" name="Date Placeholder 4">
-            <a:extLst xmlns:a="http://schemas.openxmlformats.org/drawingml/2006/main">
+            <a:extLst>
               <a:ext uri="{FF2B5EF4-FFF2-40B4-BE49-F238E27FC236}">
                 <a16:creationId xmlns:a16="http://schemas.microsoft.com/office/drawing/2014/main" id="{4DE166F2-1A9A-4D13-9272-D4ACF0B3A960}"/>
               </a:ext>
             </a:extLst>
           </p:cNvPr>
           <p:cNvSpPr>
-            <a:spLocks xmlns:a="http://schemas.openxmlformats.org/drawingml/2006/main" noGrp="1"/>
+            <a:spLocks noGrp="1"/>
           </p:cNvSpPr>
           <p:nvPr>
             <p:ph type="dt" idx="10"/>
@@ -2693,11 +2637,11 @@
         </p:nvSpPr>
         <p:spPr/>
         <p:txBody>
-          <a:bodyPr xmlns:a="http://schemas.openxmlformats.org/drawingml/2006/main"/>
-          <a:lstStyle xmlns:a="http://schemas.openxmlformats.org/drawingml/2006/main"/>
-          <a:p xmlns:a="http://schemas.openxmlformats.org/drawingml/2006/main">
+          <a:bodyPr/>
+          <a:lstStyle/>
+          <a:p>
             <a:fld id="{2859D279-7FFD-4108-AAC5-6DD8152157B1}" type="datetimeFigureOut">
-              <a:t>05/10/2023</a:t>
+              <a:t>31/08/2026</a:t>
             </a:fld>
             <a:endParaRPr/>
           </a:p>
@@ -2706,14 +2650,14 @@
       <p:sp>
         <p:nvSpPr>
           <p:cNvPr id="6" name="Footer Placeholder 5">
-            <a:extLst xmlns:a="http://schemas.openxmlformats.org/drawingml/2006/main">
+            <a:extLst>
               <a:ext uri="{FF2B5EF4-FFF2-40B4-BE49-F238E27FC236}">
                 <a16:creationId xmlns:a16="http://schemas.microsoft.com/office/drawing/2014/main" id="{94E852DC-C832-4F44-8662-E26EA23FED89}"/>
               </a:ext>
             </a:extLst>
           </p:cNvPr>
           <p:cNvSpPr>
-            <a:spLocks xmlns:a="http://schemas.openxmlformats.org/drawingml/2006/main" noGrp="1"/>
+            <a:spLocks noGrp="1"/>
           </p:cNvSpPr>
           <p:nvPr>
             <p:ph type="ftr" idx="11"/>
@@ -2721,9 +2665,9 @@
         </p:nvSpPr>
         <p:spPr/>
         <p:txBody>
-          <a:bodyPr xmlns:a="http://schemas.openxmlformats.org/drawingml/2006/main"/>
-          <a:lstStyle xmlns:a="http://schemas.openxmlformats.org/drawingml/2006/main"/>
-          <a:p xmlns:a="http://schemas.openxmlformats.org/drawingml/2006/main">
+          <a:bodyPr/>
+          <a:lstStyle/>
+          <a:p>
             <a:endParaRPr/>
           </a:p>
         </p:txBody>
@@ -2731,14 +2675,14 @@
       <p:sp>
         <p:nvSpPr>
           <p:cNvPr id="7" name="Slide Number Placeholder 6">
-            <a:extLst xmlns:a="http://schemas.openxmlformats.org/drawingml/2006/main">
+            <a:extLst>
               <a:ext uri="{FF2B5EF4-FFF2-40B4-BE49-F238E27FC236}">
                 <a16:creationId xmlns:a16="http://schemas.microsoft.com/office/drawing/2014/main" id="{3AB3A51B-B292-4AF0-9840-CFC969912F32}"/>
               </a:ext>
             </a:extLst>
           </p:cNvPr>
           <p:cNvSpPr>
-            <a:spLocks xmlns:a="http://schemas.openxmlformats.org/drawingml/2006/main" noGrp="1"/>
+            <a:spLocks noGrp="1"/>
           </p:cNvSpPr>
           <p:nvPr>
             <p:ph type="sldNum" idx="12"/>
@@ -2746,9 +2690,9 @@
         </p:nvSpPr>
         <p:spPr/>
         <p:txBody>
-          <a:bodyPr xmlns:a="http://schemas.openxmlformats.org/drawingml/2006/main"/>
-          <a:lstStyle xmlns:a="http://schemas.openxmlformats.org/drawingml/2006/main"/>
-          <a:p xmlns:a="http://schemas.openxmlformats.org/drawingml/2006/main">
+          <a:bodyPr/>
+          <a:lstStyle/>
+          <a:p>
             <a:fld id="{9E107B50-42F2-442C-8A9B-03B1021A57A2}" type="slidenum">
               <a:t>‹Nº›</a:t>
             </a:fld>
@@ -2758,11 +2702,14 @@
       </p:sp>
     </p:spTree>
   </p:cSld>
+  <p:clrMapOvr>
+    <a:masterClrMapping/>
+  </p:clrMapOvr>
 </p:sldLayout>
 </file>
 
 <file path=ppt/slideLayouts/slideLayout9.xml><?xml version="1.0" encoding="utf-8"?>
-<p:sldLayout xmlns:p="http://schemas.openxmlformats.org/presentationml/2006/main" type="picTx" preserve="1">
+<p:sldLayout xmlns:a="http://schemas.openxmlformats.org/drawingml/2006/main" xmlns:r="http://schemas.openxmlformats.org/officeDocument/2006/relationships" xmlns:p="http://schemas.openxmlformats.org/presentationml/2006/main" type="picTx" preserve="1">
   <p:cSld name="Imagen con título">
     <p:spTree>
       <p:nvGrpSpPr>
@@ -2771,71 +2718,75 @@
         <p:nvPr/>
       </p:nvGrpSpPr>
       <p:grpSpPr>
-        <a:xfrm xmlns:a="http://schemas.openxmlformats.org/drawingml/2006/main"/>
+        <a:xfrm>
+          <a:off x="0" y="0"/>
+          <a:ext cx="0" cy="0"/>
+          <a:chOff x="0" y="0"/>
+          <a:chExt cx="0" cy="0"/>
+        </a:xfrm>
       </p:grpSpPr>
       <p:sp>
         <p:nvSpPr>
           <p:cNvPr id="2" name="Title 1">
-            <a:extLst xmlns:a="http://schemas.openxmlformats.org/drawingml/2006/main">
+            <a:extLst>
               <a:ext uri="{FF2B5EF4-FFF2-40B4-BE49-F238E27FC236}">
                 <a16:creationId xmlns:a16="http://schemas.microsoft.com/office/drawing/2014/main" id="{E1A90F4D-F284-4378-9247-521F222EAC2A}"/>
               </a:ext>
             </a:extLst>
           </p:cNvPr>
           <p:cNvSpPr>
-            <a:spLocks xmlns:a="http://schemas.openxmlformats.org/drawingml/2006/main" noGrp="1"/>
-          </p:cNvSpPr>
-          <p:nvPr>
-            <p:ph type="title" idx="0"/>
+            <a:spLocks noGrp="1"/>
+          </p:cNvSpPr>
+          <p:nvPr>
+            <p:ph type="title"/>
           </p:nvPr>
         </p:nvSpPr>
         <p:spPr>
-          <a:xfrm xmlns:a="http://schemas.openxmlformats.org/drawingml/2006/main">
+          <a:xfrm>
             <a:off x="2231671" y="3119967"/>
             <a:ext cx="10449614" cy="10919883"/>
           </a:xfrm>
         </p:spPr>
         <p:txBody>
-          <a:bodyPr xmlns:a="http://schemas.openxmlformats.org/drawingml/2006/main" anchor="b"/>
-          <a:lstStyle xmlns:a="http://schemas.openxmlformats.org/drawingml/2006/main">
+          <a:bodyPr anchor="b"/>
+          <a:lstStyle>
             <a:lvl1pPr>
               <a:buNone/>
               <a:defRPr sz="11338"/>
             </a:lvl1pPr>
           </a:lstStyle>
-          <a:p xmlns:a="http://schemas.openxmlformats.org/drawingml/2006/main">
+          <a:p>
             <a:r>
               <a:t>Haga clic para modificar el estilo de título del patrón</a:t>
             </a:r>
-            <a:endParaRPr/>
           </a:p>
         </p:txBody>
       </p:sp>
       <p:sp>
         <p:nvSpPr>
           <p:cNvPr id="3" name="Picture Placeholder 2">
-            <a:extLst xmlns:a="http://schemas.openxmlformats.org/drawingml/2006/main">
+            <a:extLst>
               <a:ext uri="{FF2B5EF4-FFF2-40B4-BE49-F238E27FC236}">
                 <a16:creationId xmlns:a16="http://schemas.microsoft.com/office/drawing/2014/main" id="{E7DA256C-CB1E-4052-AAE3-237179C7891B}"/>
               </a:ext>
             </a:extLst>
           </p:cNvPr>
           <p:cNvSpPr>
-            <a:spLocks xmlns:a="http://schemas.openxmlformats.org/drawingml/2006/main" noGrp="1"/>
+            <a:spLocks noGrp="1"/>
           </p:cNvSpPr>
           <p:nvPr>
             <p:ph type="pic" idx="1"/>
           </p:nvPr>
         </p:nvSpPr>
         <p:spPr>
-          <a:xfrm xmlns:a="http://schemas.openxmlformats.org/drawingml/2006/main">
+          <a:xfrm>
             <a:off x="13773917" y="6738272"/>
             <a:ext cx="16402140" cy="33257978"/>
           </a:xfrm>
         </p:spPr>
         <p:txBody>
-          <a:bodyPr xmlns:a="http://schemas.openxmlformats.org/drawingml/2006/main" anchor="t"/>
-          <a:lstStyle xmlns:a="http://schemas.openxmlformats.org/drawingml/2006/main">
+          <a:bodyPr anchor="t"/>
+          <a:lstStyle>
             <a:lvl1pPr marL="0" indent="0">
               <a:buNone/>
               <a:defRPr sz="11338"/>
@@ -2873,39 +2824,38 @@
               <a:defRPr sz="7086"/>
             </a:lvl9pPr>
           </a:lstStyle>
-          <a:p xmlns:a="http://schemas.openxmlformats.org/drawingml/2006/main">
+          <a:p>
             <a:r>
               <a:t>Haga clic en el icono para agregar una imagen</a:t>
             </a:r>
-            <a:endParaRPr/>
           </a:p>
         </p:txBody>
       </p:sp>
       <p:sp>
         <p:nvSpPr>
           <p:cNvPr id="4" name="Text Placeholder 3">
-            <a:extLst xmlns:a="http://schemas.openxmlformats.org/drawingml/2006/main">
+            <a:extLst>
               <a:ext uri="{FF2B5EF4-FFF2-40B4-BE49-F238E27FC236}">
                 <a16:creationId xmlns:a16="http://schemas.microsoft.com/office/drawing/2014/main" id="{B753D57C-55F2-4045-A283-A161F00ECB07}"/>
               </a:ext>
             </a:extLst>
           </p:cNvPr>
           <p:cNvSpPr>
-            <a:spLocks xmlns:a="http://schemas.openxmlformats.org/drawingml/2006/main" noGrp="1"/>
+            <a:spLocks noGrp="1"/>
           </p:cNvSpPr>
           <p:nvPr>
             <p:ph type="body" idx="2"/>
           </p:nvPr>
         </p:nvSpPr>
         <p:spPr>
-          <a:xfrm xmlns:a="http://schemas.openxmlformats.org/drawingml/2006/main">
+          <a:xfrm>
             <a:off x="2231671" y="14039850"/>
             <a:ext cx="10449614" cy="26010559"/>
           </a:xfrm>
         </p:spPr>
         <p:txBody>
-          <a:bodyPr xmlns:a="http://schemas.openxmlformats.org/drawingml/2006/main"/>
-          <a:lstStyle xmlns:a="http://schemas.openxmlformats.org/drawingml/2006/main">
+          <a:bodyPr/>
+          <a:lstStyle>
             <a:lvl1pPr marL="0" indent="0">
               <a:buNone/>
               <a:defRPr sz="5669"/>
@@ -2943,7 +2893,7 @@
               <a:defRPr sz="3543"/>
             </a:lvl9pPr>
           </a:lstStyle>
-          <a:p xmlns:a="http://schemas.openxmlformats.org/drawingml/2006/main">
+          <a:p>
             <a:pPr lvl="0">
               <a:buNone/>
             </a:pPr>
@@ -2956,14 +2906,14 @@
       <p:sp>
         <p:nvSpPr>
           <p:cNvPr id="5" name="Date Placeholder 4">
-            <a:extLst xmlns:a="http://schemas.openxmlformats.org/drawingml/2006/main">
+            <a:extLst>
               <a:ext uri="{FF2B5EF4-FFF2-40B4-BE49-F238E27FC236}">
                 <a16:creationId xmlns:a16="http://schemas.microsoft.com/office/drawing/2014/main" id="{DF0257A4-BF5A-4481-9A95-7E74EA876943}"/>
               </a:ext>
             </a:extLst>
           </p:cNvPr>
           <p:cNvSpPr>
-            <a:spLocks xmlns:a="http://schemas.openxmlformats.org/drawingml/2006/main" noGrp="1"/>
+            <a:spLocks noGrp="1"/>
           </p:cNvSpPr>
           <p:nvPr>
             <p:ph type="dt" idx="10"/>
@@ -2971,11 +2921,11 @@
         </p:nvSpPr>
         <p:spPr/>
         <p:txBody>
-          <a:bodyPr xmlns:a="http://schemas.openxmlformats.org/drawingml/2006/main"/>
-          <a:lstStyle xmlns:a="http://schemas.openxmlformats.org/drawingml/2006/main"/>
-          <a:p xmlns:a="http://schemas.openxmlformats.org/drawingml/2006/main">
+          <a:bodyPr/>
+          <a:lstStyle/>
+          <a:p>
             <a:fld id="{2859D279-7FFD-4108-AAC5-6DD8152157B1}" type="datetimeFigureOut">
-              <a:t>05/10/2023</a:t>
+              <a:t>31/08/2026</a:t>
             </a:fld>
             <a:endParaRPr/>
           </a:p>
@@ -2984,14 +2934,14 @@
       <p:sp>
         <p:nvSpPr>
           <p:cNvPr id="6" name="Footer Placeholder 5">
-            <a:extLst xmlns:a="http://schemas.openxmlformats.org/drawingml/2006/main">
+            <a:extLst>
               <a:ext uri="{FF2B5EF4-FFF2-40B4-BE49-F238E27FC236}">
                 <a16:creationId xmlns:a16="http://schemas.microsoft.com/office/drawing/2014/main" id="{25763333-39A2-45A6-9610-04A84E6C151D}"/>
               </a:ext>
             </a:extLst>
           </p:cNvPr>
           <p:cNvSpPr>
-            <a:spLocks xmlns:a="http://schemas.openxmlformats.org/drawingml/2006/main" noGrp="1"/>
+            <a:spLocks noGrp="1"/>
           </p:cNvSpPr>
           <p:nvPr>
             <p:ph type="ftr" idx="11"/>
@@ -2999,9 +2949,9 @@
         </p:nvSpPr>
         <p:spPr/>
         <p:txBody>
-          <a:bodyPr xmlns:a="http://schemas.openxmlformats.org/drawingml/2006/main"/>
-          <a:lstStyle xmlns:a="http://schemas.openxmlformats.org/drawingml/2006/main"/>
-          <a:p xmlns:a="http://schemas.openxmlformats.org/drawingml/2006/main">
+          <a:bodyPr/>
+          <a:lstStyle/>
+          <a:p>
             <a:endParaRPr/>
           </a:p>
         </p:txBody>
@@ -3009,14 +2959,14 @@
       <p:sp>
         <p:nvSpPr>
           <p:cNvPr id="7" name="Slide Number Placeholder 6">
-            <a:extLst xmlns:a="http://schemas.openxmlformats.org/drawingml/2006/main">
+            <a:extLst>
               <a:ext uri="{FF2B5EF4-FFF2-40B4-BE49-F238E27FC236}">
                 <a16:creationId xmlns:a16="http://schemas.microsoft.com/office/drawing/2014/main" id="{09A029BF-2B01-4836-9AC7-DC9500583F22}"/>
               </a:ext>
             </a:extLst>
           </p:cNvPr>
           <p:cNvSpPr>
-            <a:spLocks xmlns:a="http://schemas.openxmlformats.org/drawingml/2006/main" noGrp="1"/>
+            <a:spLocks noGrp="1"/>
           </p:cNvSpPr>
           <p:nvPr>
             <p:ph type="sldNum" idx="12"/>
@@ -3024,9 +2974,9 @@
         </p:nvSpPr>
         <p:spPr/>
         <p:txBody>
-          <a:bodyPr xmlns:a="http://schemas.openxmlformats.org/drawingml/2006/main"/>
-          <a:lstStyle xmlns:a="http://schemas.openxmlformats.org/drawingml/2006/main"/>
-          <a:p xmlns:a="http://schemas.openxmlformats.org/drawingml/2006/main">
+          <a:bodyPr/>
+          <a:lstStyle/>
+          <a:p>
             <a:fld id="{9E107B50-42F2-442C-8A9B-03B1021A57A2}" type="slidenum">
               <a:t>‹Nº›</a:t>
             </a:fld>
@@ -3036,15 +2986,18 @@
       </p:sp>
     </p:spTree>
   </p:cSld>
+  <p:clrMapOvr>
+    <a:masterClrMapping/>
+  </p:clrMapOvr>
 </p:sldLayout>
 </file>
 
 <file path=ppt/slideMasters/slideMaster1.xml><?xml version="1.0" encoding="utf-8"?>
-<p:sldMaster xmlns:p="http://schemas.openxmlformats.org/presentationml/2006/main">
+<p:sldMaster xmlns:a="http://schemas.openxmlformats.org/drawingml/2006/main" xmlns:r="http://schemas.openxmlformats.org/officeDocument/2006/relationships" xmlns:p="http://schemas.openxmlformats.org/presentationml/2006/main">
   <p:cSld>
     <p:bg>
       <p:bgRef idx="1001">
-        <a:schemeClr xmlns:a="http://schemas.openxmlformats.org/drawingml/2006/main" val="bg1"/>
+        <a:schemeClr val="bg1"/>
       </p:bgRef>
     </p:bg>
     <p:spTree>
@@ -3054,77 +3007,81 @@
         <p:nvPr/>
       </p:nvGrpSpPr>
       <p:grpSpPr>
-        <a:xfrm xmlns:a="http://schemas.openxmlformats.org/drawingml/2006/main"/>
+        <a:xfrm>
+          <a:off x="0" y="0"/>
+          <a:ext cx="0" cy="0"/>
+          <a:chOff x="0" y="0"/>
+          <a:chExt cx="0" cy="0"/>
+        </a:xfrm>
       </p:grpSpPr>
       <p:sp>
         <p:nvSpPr>
           <p:cNvPr id="2" name="Title Placeholder 1">
-            <a:extLst xmlns:a="http://schemas.openxmlformats.org/drawingml/2006/main">
+            <a:extLst>
               <a:ext uri="{FF2B5EF4-FFF2-40B4-BE49-F238E27FC236}">
                 <a16:creationId xmlns:a16="http://schemas.microsoft.com/office/drawing/2014/main" id="{39C472C3-9AFA-4F30-8EDC-A2725C7205E0}"/>
               </a:ext>
             </a:extLst>
           </p:cNvPr>
           <p:cNvSpPr>
-            <a:spLocks xmlns:a="http://schemas.openxmlformats.org/drawingml/2006/main" noGrp="1"/>
-          </p:cNvSpPr>
-          <p:nvPr>
-            <p:ph type="title" idx="0"/>
+            <a:spLocks noGrp="1"/>
+          </p:cNvSpPr>
+          <p:nvPr>
+            <p:ph type="title"/>
           </p:nvPr>
         </p:nvSpPr>
         <p:spPr>
-          <a:xfrm xmlns:a="http://schemas.openxmlformats.org/drawingml/2006/main">
+          <a:xfrm>
             <a:off x="2227451" y="2491650"/>
             <a:ext cx="27944386" cy="9045740"/>
           </a:xfrm>
-          <a:prstGeom xmlns:a="http://schemas.openxmlformats.org/drawingml/2006/main" prst="rect">
+          <a:prstGeom prst="rect">
             <a:avLst/>
           </a:prstGeom>
         </p:spPr>
         <p:txBody>
-          <a:bodyPr xmlns:a="http://schemas.openxmlformats.org/drawingml/2006/main" vert="horz" lIns="91440" tIns="45720" rIns="91440" bIns="45720" anchor="ctr">
+          <a:bodyPr vert="horz" lIns="91440" tIns="45720" rIns="91440" bIns="45720" anchor="ctr">
             <a:normAutofit/>
           </a:bodyPr>
-          <a:lstStyle xmlns:a="http://schemas.openxmlformats.org/drawingml/2006/main"/>
-          <a:p xmlns:a="http://schemas.openxmlformats.org/drawingml/2006/main">
+          <a:lstStyle/>
+          <a:p>
             <a:r>
               <a:t>Haga clic para modificar el estilo de título del patrón</a:t>
             </a:r>
-            <a:endParaRPr/>
           </a:p>
         </p:txBody>
       </p:sp>
       <p:sp>
         <p:nvSpPr>
           <p:cNvPr id="3" name="Text Placeholder 2">
-            <a:extLst xmlns:a="http://schemas.openxmlformats.org/drawingml/2006/main">
+            <a:extLst>
               <a:ext uri="{FF2B5EF4-FFF2-40B4-BE49-F238E27FC236}">
                 <a16:creationId xmlns:a16="http://schemas.microsoft.com/office/drawing/2014/main" id="{995150D7-4CF7-4407-A7E9-45BBB46F7C86}"/>
               </a:ext>
             </a:extLst>
           </p:cNvPr>
           <p:cNvSpPr>
-            <a:spLocks xmlns:a="http://schemas.openxmlformats.org/drawingml/2006/main" noGrp="1"/>
+            <a:spLocks noGrp="1"/>
           </p:cNvSpPr>
           <p:nvPr>
             <p:ph type="body" idx="1"/>
           </p:nvPr>
         </p:nvSpPr>
         <p:spPr>
-          <a:xfrm xmlns:a="http://schemas.openxmlformats.org/drawingml/2006/main">
+          <a:xfrm>
             <a:off x="2227451" y="12458200"/>
             <a:ext cx="27944386" cy="29693853"/>
           </a:xfrm>
-          <a:prstGeom xmlns:a="http://schemas.openxmlformats.org/drawingml/2006/main" prst="rect">
+          <a:prstGeom prst="rect">
             <a:avLst/>
           </a:prstGeom>
         </p:spPr>
         <p:txBody>
-          <a:bodyPr xmlns:a="http://schemas.openxmlformats.org/drawingml/2006/main" vert="horz" lIns="91440" tIns="45720" rIns="91440" bIns="45720">
+          <a:bodyPr vert="horz" lIns="91440" tIns="45720" rIns="91440" bIns="45720">
             <a:normAutofit/>
           </a:bodyPr>
-          <a:lstStyle xmlns:a="http://schemas.openxmlformats.org/drawingml/2006/main"/>
-          <a:p xmlns:a="http://schemas.openxmlformats.org/drawingml/2006/main">
+          <a:lstStyle/>
+          <a:p>
             <a:pPr lvl="0">
               <a:buNone/>
             </a:pPr>
@@ -3132,7 +3089,7 @@
               <a:t>Haga clic para modificar los estilos de texto del patrón</a:t>
             </a:r>
           </a:p>
-          <a:p xmlns:a="http://schemas.openxmlformats.org/drawingml/2006/main">
+          <a:p>
             <a:pPr lvl="1">
               <a:buNone/>
             </a:pPr>
@@ -3140,7 +3097,7 @@
               <a:t>Segundo nivel</a:t>
             </a:r>
           </a:p>
-          <a:p xmlns:a="http://schemas.openxmlformats.org/drawingml/2006/main">
+          <a:p>
             <a:pPr lvl="2">
               <a:buNone/>
             </a:pPr>
@@ -3148,7 +3105,7 @@
               <a:t>Tercer nivel</a:t>
             </a:r>
           </a:p>
-          <a:p xmlns:a="http://schemas.openxmlformats.org/drawingml/2006/main">
+          <a:p>
             <a:pPr lvl="3">
               <a:buNone/>
             </a:pPr>
@@ -3156,45 +3113,44 @@
               <a:t>Cuarto nivel</a:t>
             </a:r>
           </a:p>
-          <a:p xmlns:a="http://schemas.openxmlformats.org/drawingml/2006/main">
+          <a:p>
             <a:pPr lvl="4">
               <a:buNone/>
             </a:pPr>
             <a:r>
               <a:t>Quinto nivel</a:t>
             </a:r>
-            <a:endParaRPr/>
           </a:p>
         </p:txBody>
       </p:sp>
       <p:sp>
         <p:nvSpPr>
           <p:cNvPr id="4" name="Date Placeholder 3">
-            <a:extLst xmlns:a="http://schemas.openxmlformats.org/drawingml/2006/main">
+            <a:extLst>
               <a:ext uri="{FF2B5EF4-FFF2-40B4-BE49-F238E27FC236}">
                 <a16:creationId xmlns:a16="http://schemas.microsoft.com/office/drawing/2014/main" id="{CFD81591-F21B-42AE-AD04-1F98A7FC17E1}"/>
               </a:ext>
             </a:extLst>
           </p:cNvPr>
           <p:cNvSpPr>
-            <a:spLocks xmlns:a="http://schemas.openxmlformats.org/drawingml/2006/main" noGrp="1"/>
+            <a:spLocks noGrp="1"/>
           </p:cNvSpPr>
           <p:nvPr>
             <p:ph type="dt" idx="2"/>
           </p:nvPr>
         </p:nvSpPr>
         <p:spPr>
-          <a:xfrm xmlns:a="http://schemas.openxmlformats.org/drawingml/2006/main">
+          <a:xfrm>
             <a:off x="2227451" y="43376214"/>
             <a:ext cx="7289840" cy="2491640"/>
           </a:xfrm>
-          <a:prstGeom xmlns:a="http://schemas.openxmlformats.org/drawingml/2006/main" prst="rect">
+          <a:prstGeom prst="rect">
             <a:avLst/>
           </a:prstGeom>
         </p:spPr>
         <p:txBody>
-          <a:bodyPr xmlns:a="http://schemas.openxmlformats.org/drawingml/2006/main" vert="horz" lIns="91440" tIns="45720" rIns="91440" bIns="45720" anchor="ctr"/>
-          <a:lstStyle xmlns:a="http://schemas.openxmlformats.org/drawingml/2006/main">
+          <a:bodyPr vert="horz" lIns="91440" tIns="45720" rIns="91440" bIns="45720" anchor="ctr"/>
+          <a:lstStyle>
             <a:lvl1pPr algn="l">
               <a:buNone/>
               <a:defRPr sz="4252">
@@ -3206,9 +3162,9 @@
               </a:defRPr>
             </a:lvl1pPr>
           </a:lstStyle>
-          <a:p xmlns:a="http://schemas.openxmlformats.org/drawingml/2006/main">
+          <a:p>
             <a:fld id="{2859D279-7FFD-4108-AAC5-6DD8152157B1}" type="datetimeFigureOut">
-              <a:t>05/10/2023</a:t>
+              <a:t>31/08/2026</a:t>
             </a:fld>
             <a:endParaRPr/>
           </a:p>
@@ -3217,31 +3173,31 @@
       <p:sp>
         <p:nvSpPr>
           <p:cNvPr id="5" name="Footer Placeholder 4">
-            <a:extLst xmlns:a="http://schemas.openxmlformats.org/drawingml/2006/main">
+            <a:extLst>
               <a:ext uri="{FF2B5EF4-FFF2-40B4-BE49-F238E27FC236}">
                 <a16:creationId xmlns:a16="http://schemas.microsoft.com/office/drawing/2014/main" id="{2BED40C9-AC24-4789-BA5B-D1AC31D35C8A}"/>
               </a:ext>
             </a:extLst>
           </p:cNvPr>
           <p:cNvSpPr>
-            <a:spLocks xmlns:a="http://schemas.openxmlformats.org/drawingml/2006/main" noGrp="1"/>
+            <a:spLocks noGrp="1"/>
           </p:cNvSpPr>
           <p:nvPr>
             <p:ph type="ftr" idx="3"/>
           </p:nvPr>
         </p:nvSpPr>
         <p:spPr>
-          <a:xfrm xmlns:a="http://schemas.openxmlformats.org/drawingml/2006/main">
+          <a:xfrm>
             <a:off x="10732264" y="43376214"/>
             <a:ext cx="10934760" cy="2491640"/>
           </a:xfrm>
-          <a:prstGeom xmlns:a="http://schemas.openxmlformats.org/drawingml/2006/main" prst="rect">
+          <a:prstGeom prst="rect">
             <a:avLst/>
           </a:prstGeom>
         </p:spPr>
         <p:txBody>
-          <a:bodyPr xmlns:a="http://schemas.openxmlformats.org/drawingml/2006/main" vert="horz" lIns="91440" tIns="45720" rIns="91440" bIns="45720" anchor="ctr"/>
-          <a:lstStyle xmlns:a="http://schemas.openxmlformats.org/drawingml/2006/main">
+          <a:bodyPr vert="horz" lIns="91440" tIns="45720" rIns="91440" bIns="45720" anchor="ctr"/>
+          <a:lstStyle>
             <a:lvl1pPr algn="ctr">
               <a:buNone/>
               <a:defRPr sz="4252">
@@ -3253,7 +3209,7 @@
               </a:defRPr>
             </a:lvl1pPr>
           </a:lstStyle>
-          <a:p xmlns:a="http://schemas.openxmlformats.org/drawingml/2006/main">
+          <a:p>
             <a:endParaRPr/>
           </a:p>
         </p:txBody>
@@ -3261,31 +3217,31 @@
       <p:sp>
         <p:nvSpPr>
           <p:cNvPr id="6" name="Slide Number Placeholder 5">
-            <a:extLst xmlns:a="http://schemas.openxmlformats.org/drawingml/2006/main">
+            <a:extLst>
               <a:ext uri="{FF2B5EF4-FFF2-40B4-BE49-F238E27FC236}">
                 <a16:creationId xmlns:a16="http://schemas.microsoft.com/office/drawing/2014/main" id="{5B846A5F-91EE-4247-897D-B3DB207D196A}"/>
               </a:ext>
             </a:extLst>
           </p:cNvPr>
           <p:cNvSpPr>
-            <a:spLocks xmlns:a="http://schemas.openxmlformats.org/drawingml/2006/main" noGrp="1"/>
+            <a:spLocks noGrp="1"/>
           </p:cNvSpPr>
           <p:nvPr>
             <p:ph type="sldNum" idx="4"/>
           </p:nvPr>
         </p:nvSpPr>
         <p:spPr>
-          <a:xfrm xmlns:a="http://schemas.openxmlformats.org/drawingml/2006/main">
+          <a:xfrm>
             <a:off x="22881997" y="43376214"/>
             <a:ext cx="7289840" cy="2491640"/>
           </a:xfrm>
-          <a:prstGeom xmlns:a="http://schemas.openxmlformats.org/drawingml/2006/main" prst="rect">
+          <a:prstGeom prst="rect">
             <a:avLst/>
           </a:prstGeom>
         </p:spPr>
         <p:txBody>
-          <a:bodyPr xmlns:a="http://schemas.openxmlformats.org/drawingml/2006/main" vert="horz" lIns="91440" tIns="45720" rIns="91440" bIns="45720" anchor="ctr"/>
-          <a:lstStyle xmlns:a="http://schemas.openxmlformats.org/drawingml/2006/main">
+          <a:bodyPr vert="horz" lIns="91440" tIns="45720" rIns="91440" bIns="45720" anchor="ctr"/>
+          <a:lstStyle>
             <a:lvl1pPr algn="r">
               <a:buNone/>
               <a:defRPr sz="4252">
@@ -3297,7 +3253,7 @@
               </a:defRPr>
             </a:lvl1pPr>
           </a:lstStyle>
-          <a:p xmlns:a="http://schemas.openxmlformats.org/drawingml/2006/main">
+          <a:p>
             <a:fld id="{9E107B50-42F2-442C-8A9B-03B1021A57A2}" type="slidenum">
               <a:t>‹Nº›</a:t>
             </a:fld>
@@ -3309,21 +3265,21 @@
   </p:cSld>
   <p:clrMap bg1="lt1" tx1="dk1" bg2="lt2" tx2="dk2" accent1="accent1" accent2="accent2" accent3="accent3" accent4="accent4" accent5="accent5" accent6="accent6" hlink="hlink" folHlink="folHlink"/>
   <p:sldLayoutIdLst>
-    <p:sldLayoutId xmlns:r="http://schemas.openxmlformats.org/officeDocument/2006/relationships" id="2147483649" r:id="R8c18ec062cc04edf"/>
-    <p:sldLayoutId xmlns:r="http://schemas.openxmlformats.org/officeDocument/2006/relationships" id="2147483650" r:id="Ra5c65c28e2ad48d8"/>
-    <p:sldLayoutId xmlns:r="http://schemas.openxmlformats.org/officeDocument/2006/relationships" id="2147483651" r:id="R0bf47c52617d4d46"/>
-    <p:sldLayoutId xmlns:r="http://schemas.openxmlformats.org/officeDocument/2006/relationships" id="2147483652" r:id="R102ccc94a7044287"/>
-    <p:sldLayoutId xmlns:r="http://schemas.openxmlformats.org/officeDocument/2006/relationships" id="2147483653" r:id="R03e10a568469466d"/>
-    <p:sldLayoutId xmlns:r="http://schemas.openxmlformats.org/officeDocument/2006/relationships" id="2147483654" r:id="Rf81ff431e05c45a1"/>
-    <p:sldLayoutId xmlns:r="http://schemas.openxmlformats.org/officeDocument/2006/relationships" id="2147483655" r:id="Rb6487f939cea4a51"/>
-    <p:sldLayoutId xmlns:r="http://schemas.openxmlformats.org/officeDocument/2006/relationships" id="2147483656" r:id="R8edda4a3cf334205"/>
-    <p:sldLayoutId xmlns:r="http://schemas.openxmlformats.org/officeDocument/2006/relationships" id="2147483657" r:id="R1510942c16694fd2"/>
-    <p:sldLayoutId xmlns:r="http://schemas.openxmlformats.org/officeDocument/2006/relationships" id="2147483658" r:id="R5d8646a65fe04e44"/>
-    <p:sldLayoutId xmlns:r="http://schemas.openxmlformats.org/officeDocument/2006/relationships" id="2147483659" r:id="R59820f261f184c76"/>
+    <p:sldLayoutId id="2147483649" r:id="rId1"/>
+    <p:sldLayoutId id="2147483650" r:id="rId2"/>
+    <p:sldLayoutId id="2147483651" r:id="rId3"/>
+    <p:sldLayoutId id="2147483652" r:id="rId4"/>
+    <p:sldLayoutId id="2147483653" r:id="rId5"/>
+    <p:sldLayoutId id="2147483654" r:id="rId6"/>
+    <p:sldLayoutId id="2147483655" r:id="rId7"/>
+    <p:sldLayoutId id="2147483656" r:id="rId8"/>
+    <p:sldLayoutId id="2147483657" r:id="rId9"/>
+    <p:sldLayoutId id="2147483658" r:id="rId10"/>
+    <p:sldLayoutId id="2147483659" r:id="rId11"/>
   </p:sldLayoutIdLst>
   <p:txStyles>
     <p:titleStyle>
-      <a:lvl1pPr xmlns:a="http://schemas.openxmlformats.org/drawingml/2006/main" algn="l" defTabSz="3239902">
+      <a:lvl1pPr algn="l" defTabSz="3239902">
         <a:lnSpc>
           <a:spcPct val="90000"/>
         </a:lnSpc>
@@ -3342,7 +3298,7 @@
       </a:lvl1pPr>
     </p:titleStyle>
     <p:bodyStyle>
-      <a:lvl1pPr xmlns:a="http://schemas.openxmlformats.org/drawingml/2006/main" marL="809976" indent="-809976" algn="l" defTabSz="3239902">
+      <a:lvl1pPr marL="809976" indent="-809976" algn="l" defTabSz="3239902">
         <a:lnSpc>
           <a:spcPct val="90000"/>
         </a:lnSpc>
@@ -3360,7 +3316,7 @@
           <a:cs typeface="+mn-lt"/>
         </a:defRPr>
       </a:lvl1pPr>
-      <a:lvl2pPr xmlns:a="http://schemas.openxmlformats.org/drawingml/2006/main" marL="2429927" indent="-809976" algn="l" defTabSz="3239902">
+      <a:lvl2pPr marL="2429927" indent="-809976" algn="l" defTabSz="3239902">
         <a:lnSpc>
           <a:spcPct val="90000"/>
         </a:lnSpc>
@@ -3378,7 +3334,7 @@
           <a:cs typeface="+mn-lt"/>
         </a:defRPr>
       </a:lvl2pPr>
-      <a:lvl3pPr xmlns:a="http://schemas.openxmlformats.org/drawingml/2006/main" marL="4049878" indent="-809976" algn="l" defTabSz="3239902">
+      <a:lvl3pPr marL="4049878" indent="-809976" algn="l" defTabSz="3239902">
         <a:lnSpc>
           <a:spcPct val="90000"/>
         </a:lnSpc>
@@ -3396,7 +3352,7 @@
           <a:cs typeface="+mn-lt"/>
         </a:defRPr>
       </a:lvl3pPr>
-      <a:lvl4pPr xmlns:a="http://schemas.openxmlformats.org/drawingml/2006/main" marL="5669829" indent="-809976" algn="l" defTabSz="3239902">
+      <a:lvl4pPr marL="5669829" indent="-809976" algn="l" defTabSz="3239902">
         <a:lnSpc>
           <a:spcPct val="90000"/>
         </a:lnSpc>
@@ -3414,7 +3370,7 @@
           <a:cs typeface="+mn-lt"/>
         </a:defRPr>
       </a:lvl4pPr>
-      <a:lvl5pPr xmlns:a="http://schemas.openxmlformats.org/drawingml/2006/main" marL="7289780" indent="-809976" algn="l" defTabSz="3239902">
+      <a:lvl5pPr marL="7289780" indent="-809976" algn="l" defTabSz="3239902">
         <a:lnSpc>
           <a:spcPct val="90000"/>
         </a:lnSpc>
@@ -3432,7 +3388,7 @@
           <a:cs typeface="+mn-lt"/>
         </a:defRPr>
       </a:lvl5pPr>
-      <a:lvl6pPr xmlns:a="http://schemas.openxmlformats.org/drawingml/2006/main" marL="8909731" indent="-809976" algn="l" defTabSz="3239902">
+      <a:lvl6pPr marL="8909731" indent="-809976" algn="l" defTabSz="3239902">
         <a:lnSpc>
           <a:spcPct val="90000"/>
         </a:lnSpc>
@@ -3450,7 +3406,7 @@
           <a:cs typeface="+mn-lt"/>
         </a:defRPr>
       </a:lvl6pPr>
-      <a:lvl7pPr xmlns:a="http://schemas.openxmlformats.org/drawingml/2006/main" marL="10529682" indent="-809976" algn="l" defTabSz="3239902">
+      <a:lvl7pPr marL="10529682" indent="-809976" algn="l" defTabSz="3239902">
         <a:lnSpc>
           <a:spcPct val="90000"/>
         </a:lnSpc>
@@ -3468,7 +3424,7 @@
           <a:cs typeface="+mn-lt"/>
         </a:defRPr>
       </a:lvl7pPr>
-      <a:lvl8pPr xmlns:a="http://schemas.openxmlformats.org/drawingml/2006/main" marL="12149633" indent="-809976" algn="l" defTabSz="3239902">
+      <a:lvl8pPr marL="12149633" indent="-809976" algn="l" defTabSz="3239902">
         <a:lnSpc>
           <a:spcPct val="90000"/>
         </a:lnSpc>
@@ -3486,7 +3442,7 @@
           <a:cs typeface="+mn-lt"/>
         </a:defRPr>
       </a:lvl8pPr>
-      <a:lvl9pPr xmlns:a="http://schemas.openxmlformats.org/drawingml/2006/main" marL="13769584" indent="-809976" algn="l" defTabSz="3239902">
+      <a:lvl9pPr marL="13769584" indent="-809976" algn="l" defTabSz="3239902">
         <a:lnSpc>
           <a:spcPct val="90000"/>
         </a:lnSpc>
@@ -3506,7 +3462,7 @@
       </a:lvl9pPr>
     </p:bodyStyle>
     <p:otherStyle>
-      <a:lvl1pPr xmlns:a="http://schemas.openxmlformats.org/drawingml/2006/main" marL="0" algn="l" defTabSz="3239902">
+      <a:lvl1pPr marL="0" algn="l" defTabSz="3239902">
         <a:buNone/>
         <a:defRPr sz="6378" kern="1200">
           <a:solidFill>
@@ -3517,7 +3473,7 @@
           <a:cs typeface="+mn-lt"/>
         </a:defRPr>
       </a:lvl1pPr>
-      <a:lvl2pPr xmlns:a="http://schemas.openxmlformats.org/drawingml/2006/main" marL="1619951" algn="l" defTabSz="3239902">
+      <a:lvl2pPr marL="1619951" algn="l" defTabSz="3239902">
         <a:buNone/>
         <a:defRPr sz="6378" kern="1200">
           <a:solidFill>
@@ -3528,7 +3484,7 @@
           <a:cs typeface="+mn-lt"/>
         </a:defRPr>
       </a:lvl2pPr>
-      <a:lvl3pPr xmlns:a="http://schemas.openxmlformats.org/drawingml/2006/main" marL="3239902" algn="l" defTabSz="3239902">
+      <a:lvl3pPr marL="3239902" algn="l" defTabSz="3239902">
         <a:buNone/>
         <a:defRPr sz="6378" kern="1200">
           <a:solidFill>
@@ -3539,7 +3495,7 @@
           <a:cs typeface="+mn-lt"/>
         </a:defRPr>
       </a:lvl3pPr>
-      <a:lvl4pPr xmlns:a="http://schemas.openxmlformats.org/drawingml/2006/main" marL="4859853" algn="l" defTabSz="3239902">
+      <a:lvl4pPr marL="4859853" algn="l" defTabSz="3239902">
         <a:buNone/>
         <a:defRPr sz="6378" kern="1200">
           <a:solidFill>
@@ -3550,7 +3506,7 @@
           <a:cs typeface="+mn-lt"/>
         </a:defRPr>
       </a:lvl4pPr>
-      <a:lvl5pPr xmlns:a="http://schemas.openxmlformats.org/drawingml/2006/main" marL="6479804" algn="l" defTabSz="3239902">
+      <a:lvl5pPr marL="6479804" algn="l" defTabSz="3239902">
         <a:buNone/>
         <a:defRPr sz="6378" kern="1200">
           <a:solidFill>
@@ -3561,7 +3517,7 @@
           <a:cs typeface="+mn-lt"/>
         </a:defRPr>
       </a:lvl5pPr>
-      <a:lvl6pPr xmlns:a="http://schemas.openxmlformats.org/drawingml/2006/main" marL="8099755" algn="l" defTabSz="3239902">
+      <a:lvl6pPr marL="8099755" algn="l" defTabSz="3239902">
         <a:buNone/>
         <a:defRPr sz="6378" kern="1200">
           <a:solidFill>
@@ -3572,7 +3528,7 @@
           <a:cs typeface="+mn-lt"/>
         </a:defRPr>
       </a:lvl6pPr>
-      <a:lvl7pPr xmlns:a="http://schemas.openxmlformats.org/drawingml/2006/main" marL="9719706" algn="l" defTabSz="3239902">
+      <a:lvl7pPr marL="9719706" algn="l" defTabSz="3239902">
         <a:buNone/>
         <a:defRPr sz="6378" kern="1200">
           <a:solidFill>
@@ -3583,7 +3539,7 @@
           <a:cs typeface="+mn-lt"/>
         </a:defRPr>
       </a:lvl7pPr>
-      <a:lvl8pPr xmlns:a="http://schemas.openxmlformats.org/drawingml/2006/main" marL="11339657" algn="l" defTabSz="3239902">
+      <a:lvl8pPr marL="11339657" algn="l" defTabSz="3239902">
         <a:buNone/>
         <a:defRPr sz="6378" kern="1200">
           <a:solidFill>
@@ -3594,7 +3550,7 @@
           <a:cs typeface="+mn-lt"/>
         </a:defRPr>
       </a:lvl8pPr>
-      <a:lvl9pPr xmlns:a="http://schemas.openxmlformats.org/drawingml/2006/main" marL="12959608" algn="l" defTabSz="3239902">
+      <a:lvl9pPr marL="12959608" algn="l" defTabSz="3239902">
         <a:buNone/>
         <a:defRPr sz="6378" kern="1200">
           <a:solidFill>
@@ -3610,259 +3566,8 @@
 </p:sldMaster>
 </file>
 
-<file path=ppt/slideMasters/theme/theme2.xml><?xml version="1.0" encoding="utf-8"?>
-<a:theme xmlns:a="http://schemas.openxmlformats.org/drawingml/2006/main" name="Tema de Office">
-  <a:themeElements>
-    <a:clrScheme name="Tema de Office">
-      <a:dk1>
-        <a:sysClr val="windowText" lastClr="000000"/>
-      </a:dk1>
-      <a:lt1>
-        <a:sysClr val="window" lastClr="FFFFFF"/>
-      </a:lt1>
-      <a:dk2>
-        <a:srgbClr val="44546A"/>
-      </a:dk2>
-      <a:lt2>
-        <a:srgbClr val="E7E6E6"/>
-      </a:lt2>
-      <a:accent1>
-        <a:srgbClr val="4472C4"/>
-      </a:accent1>
-      <a:accent2>
-        <a:srgbClr val="ED7D31"/>
-      </a:accent2>
-      <a:accent3>
-        <a:srgbClr val="A5A5A5"/>
-      </a:accent3>
-      <a:accent4>
-        <a:srgbClr val="FFC000"/>
-      </a:accent4>
-      <a:accent5>
-        <a:srgbClr val="5B9BD5"/>
-      </a:accent5>
-      <a:accent6>
-        <a:srgbClr val="70AD47"/>
-      </a:accent6>
-      <a:hlink>
-        <a:srgbClr val="0563C1"/>
-      </a:hlink>
-      <a:folHlink>
-        <a:srgbClr val="954F72"/>
-      </a:folHlink>
-    </a:clrScheme>
-    <a:fontScheme name="Tema de Office">
-      <a:majorFont>
-        <a:latin typeface="Calibri Light"/>
-        <a:ea typeface=""/>
-        <a:cs typeface=""/>
-        <a:font script="Jpan" typeface="游ゴシック Light"/>
-        <a:font script="Hang" typeface="맑은 고딕"/>
-        <a:font script="Hans" typeface="等线 Light"/>
-        <a:font script="Hant" typeface="新細明體"/>
-        <a:font script="Arab" typeface="Times New Roman"/>
-        <a:font script="Hebr" typeface="Times New Roman"/>
-        <a:font script="Thai" typeface="Angsana New"/>
-        <a:font script="Ethi" typeface="Nyala"/>
-        <a:font script="Beng" typeface="Vrinda"/>
-        <a:font script="Gujr" typeface="Shruti"/>
-        <a:font script="Khmr" typeface="MoolBoran"/>
-        <a:font script="Knda" typeface="Tunga"/>
-        <a:font script="Guru" typeface="Raavi"/>
-        <a:font script="Cans" typeface="Euphemia"/>
-        <a:font script="Cher" typeface="Plantagenet Cherokee"/>
-        <a:font script="Yiii" typeface="Microsoft Yi Baiti"/>
-        <a:font script="Tibt" typeface="Microsoft Himalaya"/>
-        <a:font script="Thaa" typeface="MV Boli"/>
-        <a:font script="Deva" typeface="Mangal"/>
-        <a:font script="Telu" typeface="Gautami"/>
-        <a:font script="Taml" typeface="Latha"/>
-        <a:font script="Syrc" typeface="Estrangelo Edessa"/>
-        <a:font script="Orya" typeface="Kalinga"/>
-        <a:font script="Mlym" typeface="Kartika"/>
-        <a:font script="Laoo" typeface="DokChampa"/>
-        <a:font script="Sinh" typeface="Iskoola Pota"/>
-        <a:font script="Mong" typeface="Mongolian Baiti"/>
-        <a:font script="Viet" typeface="Times New Roman"/>
-        <a:font script="Uigh" typeface="Microsoft Uighur"/>
-        <a:font script="Geor" typeface="Sylfaen"/>
-      </a:majorFont>
-      <a:minorFont>
-        <a:latin typeface="Calibri"/>
-        <a:ea typeface=""/>
-        <a:cs typeface=""/>
-        <a:font script="Jpan" typeface="游ゴシック"/>
-        <a:font script="Hang" typeface="맑은 고딕"/>
-        <a:font script="Hans" typeface="等线"/>
-        <a:font script="Hant" typeface="新細明體"/>
-        <a:font script="Arab" typeface="Arial"/>
-        <a:font script="Hebr" typeface="Arial"/>
-        <a:font script="Thai" typeface="Cordia New"/>
-        <a:font script="Ethi" typeface="Nyala"/>
-        <a:font script="Beng" typeface="Vrinda"/>
-        <a:font script="Gujr" typeface="Shruti"/>
-        <a:font script="Khmr" typeface="DaunPenh"/>
-        <a:font script="Knda" typeface="Tunga"/>
-        <a:font script="Guru" typeface="Raavi"/>
-        <a:font script="Cans" typeface="Euphemia"/>
-        <a:font script="Cher" typeface="Plantagenet Cherokee"/>
-        <a:font script="Yiii" typeface="Microsoft Yi Baiti"/>
-        <a:font script="Tibt" typeface="Microsoft Himalaya"/>
-        <a:font script="Thaa" typeface="MV Boli"/>
-        <a:font script="Deva" typeface="Mangal"/>
-        <a:font script="Telu" typeface="Gautami"/>
-        <a:font script="Taml" typeface="Latha"/>
-        <a:font script="Syrc" typeface="Estrangelo Edessa"/>
-        <a:font script="Orya" typeface="Kalinga"/>
-        <a:font script="Mlym" typeface="Kartika"/>
-        <a:font script="Laoo" typeface="DokChampa"/>
-        <a:font script="Sinh" typeface="Iskoola Pota"/>
-        <a:font script="Mong" typeface="Mongolian Baiti"/>
-        <a:font script="Viet" typeface="Arial"/>
-        <a:font script="Uigh" typeface="Microsoft Uighur"/>
-        <a:font script="Geor" typeface="Sylfaen"/>
-      </a:minorFont>
-    </a:fontScheme>
-    <a:fmtScheme name="Tema de Office">
-      <a:fillStyleLst>
-        <a:solidFill>
-          <a:schemeClr val="phClr"/>
-        </a:solidFill>
-        <a:gradFill rotWithShape="1">
-          <a:gsLst>
-            <a:gs pos="0">
-              <a:schemeClr val="phClr">
-                <a:tint val="67000"/>
-                <a:lumMod val="110000"/>
-                <a:satMod val="105000"/>
-              </a:schemeClr>
-            </a:gs>
-            <a:gs pos="50000">
-              <a:schemeClr val="phClr">
-                <a:tint val="73000"/>
-                <a:lumMod val="105000"/>
-                <a:satMod val="103000"/>
-              </a:schemeClr>
-            </a:gs>
-            <a:gs pos="100000">
-              <a:schemeClr val="phClr">
-                <a:tint val="81000"/>
-                <a:lumMod val="105000"/>
-                <a:satMod val="109000"/>
-              </a:schemeClr>
-            </a:gs>
-          </a:gsLst>
-          <a:lin ang="5400000" scaled="0"/>
-        </a:gradFill>
-        <a:gradFill rotWithShape="1">
-          <a:gsLst>
-            <a:gs pos="0">
-              <a:schemeClr val="phClr">
-                <a:tint val="94000"/>
-                <a:lumMod val="102000"/>
-                <a:satMod val="103000"/>
-              </a:schemeClr>
-            </a:gs>
-            <a:gs pos="50000">
-              <a:schemeClr val="phClr">
-                <a:shade val="100000"/>
-                <a:lumMod val="100000"/>
-                <a:satMod val="110000"/>
-              </a:schemeClr>
-            </a:gs>
-            <a:gs pos="100000">
-              <a:schemeClr val="phClr">
-                <a:shade val="78000"/>
-                <a:lumMod val="99000"/>
-                <a:satMod val="120000"/>
-              </a:schemeClr>
-            </a:gs>
-          </a:gsLst>
-          <a:lin ang="5400000" scaled="0"/>
-        </a:gradFill>
-      </a:fillStyleLst>
-      <a:lnStyleLst>
-        <a:ln w="6350">
-          <a:solidFill>
-            <a:schemeClr val="phClr"/>
-          </a:solidFill>
-          <a:prstDash val="solid"/>
-        </a:ln>
-        <a:ln w="12700">
-          <a:solidFill>
-            <a:schemeClr val="phClr"/>
-          </a:solidFill>
-          <a:prstDash val="solid"/>
-        </a:ln>
-        <a:ln w="19050">
-          <a:solidFill>
-            <a:schemeClr val="phClr"/>
-          </a:solidFill>
-          <a:prstDash val="solid"/>
-        </a:ln>
-      </a:lnStyleLst>
-      <a:effectStyleLst>
-        <a:effectStyle>
-          <a:effectLst/>
-        </a:effectStyle>
-        <a:effectStyle>
-          <a:effectLst/>
-        </a:effectStyle>
-        <a:effectStyle>
-          <a:effectLst>
-            <a:outerShdw blurRad="57150" dist="19050" dir="5400000" algn="ctr" rotWithShape="0">
-              <a:srgbClr val="000000">
-                <a:alpha val="63000"/>
-              </a:srgbClr>
-            </a:outerShdw>
-          </a:effectLst>
-        </a:effectStyle>
-      </a:effectStyleLst>
-      <a:bgFillStyleLst>
-        <a:solidFill>
-          <a:schemeClr val="phClr"/>
-        </a:solidFill>
-        <a:solidFill>
-          <a:schemeClr val="phClr">
-            <a:tint val="95000"/>
-            <a:satMod val="170000"/>
-          </a:schemeClr>
-        </a:solidFill>
-        <a:gradFill rotWithShape="1">
-          <a:gsLst>
-            <a:gs pos="0">
-              <a:schemeClr val="phClr">
-                <a:tint val="93000"/>
-                <a:shade val="98000"/>
-                <a:lumMod val="102000"/>
-                <a:satMod val="150000"/>
-              </a:schemeClr>
-            </a:gs>
-            <a:gs pos="50000">
-              <a:schemeClr val="phClr">
-                <a:tint val="98000"/>
-                <a:shade val="90000"/>
-                <a:lumMod val="103000"/>
-                <a:satMod val="130000"/>
-              </a:schemeClr>
-            </a:gs>
-            <a:gs pos="100000">
-              <a:schemeClr val="phClr">
-                <a:shade val="63000"/>
-                <a:satMod val="120000"/>
-              </a:schemeClr>
-            </a:gs>
-          </a:gsLst>
-          <a:lin ang="5400000" scaled="0"/>
-        </a:gradFill>
-      </a:bgFillStyleLst>
-    </a:fmtScheme>
-  </a:themeElements>
-</a:theme>
-</file>
-
 <file path=ppt/slides/slide1.xml><?xml version="1.0" encoding="utf-8"?>
-<p:sld xmlns:p="http://schemas.openxmlformats.org/presentationml/2006/main">
+<p:sld xmlns:a="http://schemas.openxmlformats.org/drawingml/2006/main" xmlns:r="http://schemas.openxmlformats.org/officeDocument/2006/relationships" xmlns:p="http://schemas.openxmlformats.org/presentationml/2006/main">
   <p:cSld>
     <p:spTree>
       <p:nvGrpSpPr>
@@ -3871,37 +3576,42 @@
         <p:nvPr/>
       </p:nvGrpSpPr>
       <p:grpSpPr>
-        <a:xfrm xmlns:a="http://schemas.openxmlformats.org/drawingml/2006/main"/>
+        <a:xfrm>
+          <a:off x="0" y="0"/>
+          <a:ext cx="0" cy="0"/>
+          <a:chOff x="0" y="0"/>
+          <a:chExt cx="0" cy="0"/>
+        </a:xfrm>
       </p:grpSpPr>
       <p:sp>
         <p:nvSpPr>
           <p:cNvPr id="33" name="Rectángulo 32">
-            <a:extLst xmlns:a="http://schemas.openxmlformats.org/drawingml/2006/main">
+            <a:extLst>
               <a:ext uri="{FF2B5EF4-FFF2-40B4-BE49-F238E27FC236}">
                 <a16:creationId xmlns:a16="http://schemas.microsoft.com/office/drawing/2014/main" id="{A422E3A7-1767-D4B3-844B-B6FF22A04F7A}"/>
               </a:ext>
             </a:extLst>
           </p:cNvPr>
           <p:cNvSpPr>
-            <a:spLocks xmlns:a="http://schemas.openxmlformats.org/drawingml/2006/main" noGrp="1"/>
+            <a:spLocks noGrp="1"/>
           </p:cNvSpPr>
           <p:nvPr/>
         </p:nvSpPr>
         <p:spPr>
-          <a:xfrm xmlns:a="http://schemas.openxmlformats.org/drawingml/2006/main">
+          <a:xfrm>
             <a:off x="0" y="0"/>
             <a:ext cx="32399288" cy="5054060"/>
           </a:xfrm>
-          <a:prstGeom xmlns:a="http://schemas.openxmlformats.org/drawingml/2006/main" prst="rect">
+          <a:prstGeom prst="rect">
             <a:avLst/>
           </a:prstGeom>
-          <a:solidFill xmlns:a="http://schemas.openxmlformats.org/drawingml/2006/main">
+          <a:solidFill>
             <a:schemeClr val="accent1">
               <a:lumMod val="60000"/>
               <a:lumOff val="40000"/>
             </a:schemeClr>
           </a:solidFill>
-          <a:ln xmlns:a="http://schemas.openxmlformats.org/drawingml/2006/main">
+          <a:ln>
             <a:solidFill>
               <a:schemeClr val="accent5">
                 <a:lumMod val="20000"/>
@@ -3911,25 +3621,25 @@
           </a:ln>
         </p:spPr>
         <p:style>
-          <a:lnRef xmlns:a="http://schemas.openxmlformats.org/drawingml/2006/main" idx="2">
+          <a:lnRef idx="2">
             <a:schemeClr val="accent1">
               <a:shade val="50000"/>
             </a:schemeClr>
           </a:lnRef>
-          <a:fillRef xmlns:a="http://schemas.openxmlformats.org/drawingml/2006/main" idx="1">
+          <a:fillRef idx="1">
             <a:schemeClr val="accent1"/>
           </a:fillRef>
-          <a:effectRef xmlns:a="http://schemas.openxmlformats.org/drawingml/2006/main" idx="0">
+          <a:effectRef idx="0">
             <a:schemeClr val="accent1"/>
           </a:effectRef>
-          <a:fontRef xmlns:a="http://schemas.openxmlformats.org/drawingml/2006/main" idx="minor">
+          <a:fontRef idx="minor">
             <a:schemeClr val="lt1"/>
           </a:fontRef>
         </p:style>
         <p:txBody>
-          <a:bodyPr xmlns:a="http://schemas.openxmlformats.org/drawingml/2006/main" anchor="ctr"/>
-          <a:lstStyle xmlns:a="http://schemas.openxmlformats.org/drawingml/2006/main"/>
-          <a:p xmlns:a="http://schemas.openxmlformats.org/drawingml/2006/main">
+          <a:bodyPr anchor="ctr"/>
+          <a:lstStyle/>
+          <a:p>
             <a:pPr algn="ctr">
               <a:buNone/>
             </a:pPr>
@@ -3940,31 +3650,31 @@
       <p:sp>
         <p:nvSpPr>
           <p:cNvPr id="2" name="Título 1">
-            <a:extLst xmlns:a="http://schemas.openxmlformats.org/drawingml/2006/main">
+            <a:extLst>
               <a:ext uri="{FF2B5EF4-FFF2-40B4-BE49-F238E27FC236}">
                 <a16:creationId xmlns:a16="http://schemas.microsoft.com/office/drawing/2014/main" id="{3A9CE18A-15C1-D8DD-8A76-84C6D1781719}"/>
               </a:ext>
             </a:extLst>
           </p:cNvPr>
           <p:cNvSpPr>
-            <a:spLocks xmlns:a="http://schemas.openxmlformats.org/drawingml/2006/main" noGrp="1"/>
+            <a:spLocks noGrp="1"/>
           </p:cNvSpPr>
           <p:nvPr>
             <p:ph type="ctrTitle" idx="4294967295"/>
           </p:nvPr>
         </p:nvSpPr>
         <p:spPr>
-          <a:xfrm xmlns:a="http://schemas.openxmlformats.org/drawingml/2006/main">
+          <a:xfrm>
             <a:off x="151638" y="294608"/>
             <a:ext cx="32247650" cy="4830794"/>
           </a:xfrm>
         </p:spPr>
         <p:txBody>
-          <a:bodyPr xmlns:a="http://schemas.openxmlformats.org/drawingml/2006/main" anchor="ctr">
-            <a:normAutofit fontScale="100000"/>
+          <a:bodyPr anchor="ctr">
+            <a:normAutofit/>
           </a:bodyPr>
-          <a:lstStyle xmlns:a="http://schemas.openxmlformats.org/drawingml/2006/main"/>
-          <a:p xmlns:a="http://schemas.openxmlformats.org/drawingml/2006/main">
+          <a:lstStyle/>
+          <a:p>
             <a:pPr algn="ctr">
               <a:buNone/>
             </a:pPr>
@@ -3981,7 +3691,7 @@
 mediante redes neuronales físicamente informadas (PINN-SIREN)</a:t>
             </a:r>
           </a:p>
-          <a:p xmlns:a="http://schemas.openxmlformats.org/drawingml/2006/main">
+          <a:p>
             <a:pPr algn="ctr">
               <a:buNone/>
             </a:pPr>
@@ -3997,7 +3707,7 @@
               <a:t>Roberto Hernández Estrada¹ · José Adán Hernández Nolasco¹</a:t>
             </a:r>
           </a:p>
-          <a:p xmlns:a="http://schemas.openxmlformats.org/drawingml/2006/main">
+          <a:p>
             <a:pPr algn="ctr">
               <a:buNone/>
             </a:pPr>
@@ -4013,7 +3723,7 @@
               <a:t>Ibis Ricárdez Vargas² · Óscar Andrés Flores Vargas²</a:t>
             </a:r>
           </a:p>
-          <a:p xmlns:a="http://schemas.openxmlformats.org/drawingml/2006/main">
+          <a:p>
             <a:pPr algn="ctr">
               <a:buNone/>
             </a:pPr>
@@ -4026,7 +3736,7 @@
               <a:t>¹ División Académica de Ciencias y Tecnologías de la Información · ² División Académica de Ciencias Básicas</a:t>
             </a:r>
           </a:p>
-          <a:p xmlns:a="http://schemas.openxmlformats.org/drawingml/2006/main">
+          <a:p>
             <a:pPr algn="ctr">
               <a:buNone/>
             </a:pPr>
@@ -4045,22 +3755,22 @@
         <p:nvPicPr>
           <p:cNvPr id="59" name="Imagen 4"/>
           <p:cNvPicPr>
-            <a:picLocks xmlns:a="http://schemas.openxmlformats.org/drawingml/2006/main" noChangeAspect="1"/>
+            <a:picLocks noChangeAspect="1"/>
           </p:cNvPicPr>
           <p:nvPr/>
         </p:nvPicPr>
         <p:blipFill>
-          <a:blip xmlns:r="http://schemas.openxmlformats.org/officeDocument/2006/relationships" xmlns:a="http://schemas.openxmlformats.org/drawingml/2006/main" r:embed="R81f4efafeae94569"/>
-          <a:stretch xmlns:a="http://schemas.openxmlformats.org/drawingml/2006/main">
-            <a:fillRect l="0" t="0" r="0" b="0"/>
+          <a:blip r:embed="rId3"/>
+          <a:stretch>
+            <a:fillRect/>
           </a:stretch>
         </p:blipFill>
         <p:spPr>
-          <a:xfrm xmlns:a="http://schemas.openxmlformats.org/drawingml/2006/main">
+          <a:xfrm>
             <a:off x="28122434" y="280106"/>
             <a:ext cx="3324835" cy="4270131"/>
           </a:xfrm>
-          <a:prstGeom xmlns:a="http://schemas.openxmlformats.org/drawingml/2006/main" prst="rect">
+          <a:prstGeom prst="rect">
             <a:avLst/>
           </a:prstGeom>
         </p:spPr>
@@ -4069,21 +3779,21 @@
         <p:nvPicPr>
           <p:cNvPr id="60" name="Imagen 10"/>
           <p:cNvPicPr>
-            <a:picLocks xmlns:a="http://schemas.openxmlformats.org/drawingml/2006/main" noChangeAspect="1"/>
+            <a:picLocks noChangeAspect="1"/>
           </p:cNvPicPr>
           <p:nvPr/>
         </p:nvPicPr>
         <p:blipFill rotWithShape="1">
-          <a:blip xmlns:r="http://schemas.openxmlformats.org/officeDocument/2006/relationships" xmlns:a="http://schemas.openxmlformats.org/drawingml/2006/main" r:embed="Rd549495e17084c36"/>
-          <a:srcRect xmlns:a="http://schemas.openxmlformats.org/drawingml/2006/main" l="27243" t="0" r="25987" b="37906"/>
-          <a:stretch xmlns:a="http://schemas.openxmlformats.org/drawingml/2006/main"/>
+          <a:blip r:embed="rId4"/>
+          <a:srcRect l="27243" r="25987" b="37906"/>
+          <a:stretch/>
         </p:blipFill>
         <p:spPr>
-          <a:xfrm xmlns:a="http://schemas.openxmlformats.org/drawingml/2006/main">
+          <a:xfrm>
             <a:off x="801756" y="591290"/>
             <a:ext cx="2855844" cy="3774783"/>
           </a:xfrm>
-          <a:prstGeom xmlns:a="http://schemas.openxmlformats.org/drawingml/2006/main" prst="rect">
+          <a:prstGeom prst="rect">
             <a:avLst/>
           </a:prstGeom>
         </p:spPr>
@@ -4091,51 +3801,51 @@
       <p:sp>
         <p:nvSpPr>
           <p:cNvPr id="46" name="Rectángulo 45">
-            <a:extLst xmlns:a="http://schemas.openxmlformats.org/drawingml/2006/main">
+            <a:extLst>
               <a:ext uri="{FF2B5EF4-FFF2-40B4-BE49-F238E27FC236}">
                 <a16:creationId xmlns:a16="http://schemas.microsoft.com/office/drawing/2014/main" id="{892B14FF-9930-BF36-FC1F-8BD9159D9782}"/>
               </a:ext>
             </a:extLst>
           </p:cNvPr>
           <p:cNvSpPr>
-            <a:spLocks xmlns:a="http://schemas.openxmlformats.org/drawingml/2006/main" noGrp="1"/>
+            <a:spLocks noGrp="1"/>
           </p:cNvSpPr>
           <p:nvPr/>
         </p:nvSpPr>
         <p:spPr>
-          <a:xfrm xmlns:a="http://schemas.openxmlformats.org/drawingml/2006/main">
+          <a:xfrm>
             <a:off x="0" y="4911756"/>
             <a:ext cx="32399288" cy="581992"/>
           </a:xfrm>
-          <a:prstGeom xmlns:a="http://schemas.openxmlformats.org/drawingml/2006/main" prst="rect">
+          <a:prstGeom prst="rect">
             <a:avLst/>
           </a:prstGeom>
-          <a:solidFill xmlns:a="http://schemas.openxmlformats.org/drawingml/2006/main">
+          <a:solidFill>
             <a:schemeClr val="accent1">
               <a:lumMod val="50000"/>
             </a:schemeClr>
           </a:solidFill>
         </p:spPr>
         <p:style>
-          <a:lnRef xmlns:a="http://schemas.openxmlformats.org/drawingml/2006/main" idx="2">
+          <a:lnRef idx="2">
             <a:schemeClr val="accent1">
               <a:shade val="50000"/>
             </a:schemeClr>
           </a:lnRef>
-          <a:fillRef xmlns:a="http://schemas.openxmlformats.org/drawingml/2006/main" idx="1">
+          <a:fillRef idx="1">
             <a:schemeClr val="accent1"/>
           </a:fillRef>
-          <a:effectRef xmlns:a="http://schemas.openxmlformats.org/drawingml/2006/main" idx="0">
+          <a:effectRef idx="0">
             <a:schemeClr val="accent1"/>
           </a:effectRef>
-          <a:fontRef xmlns:a="http://schemas.openxmlformats.org/drawingml/2006/main" idx="minor">
+          <a:fontRef idx="minor">
             <a:schemeClr val="lt1"/>
           </a:fontRef>
         </p:style>
         <p:txBody>
-          <a:bodyPr xmlns:a="http://schemas.openxmlformats.org/drawingml/2006/main" anchor="ctr"/>
-          <a:lstStyle xmlns:a="http://schemas.openxmlformats.org/drawingml/2006/main"/>
-          <a:p xmlns:a="http://schemas.openxmlformats.org/drawingml/2006/main">
+          <a:bodyPr anchor="ctr"/>
+          <a:lstStyle/>
+          <a:p>
             <a:pPr algn="ctr">
               <a:buNone/>
             </a:pPr>
@@ -4146,31 +3856,31 @@
       <p:sp>
         <p:nvSpPr>
           <p:cNvPr id="47" name="CuadroTexto 46">
-            <a:extLst xmlns:a="http://schemas.openxmlformats.org/drawingml/2006/main">
+            <a:extLst>
               <a:ext uri="{FF2B5EF4-FFF2-40B4-BE49-F238E27FC236}">
                 <a16:creationId xmlns:a16="http://schemas.microsoft.com/office/drawing/2014/main" id="{873F68A6-0A1E-48C9-3F15-78C7CE186FDD}"/>
               </a:ext>
             </a:extLst>
           </p:cNvPr>
           <p:cNvSpPr>
-            <a:spLocks xmlns:a="http://schemas.openxmlformats.org/drawingml/2006/main" noGrp="1"/>
+            <a:spLocks noGrp="1"/>
           </p:cNvSpPr>
           <p:nvPr/>
         </p:nvSpPr>
         <p:spPr>
-          <a:xfrm xmlns:a="http://schemas.openxmlformats.org/drawingml/2006/main">
+          <a:xfrm>
             <a:off x="22142672" y="35337750"/>
             <a:ext cx="9304592" cy="5429250"/>
           </a:xfrm>
-          <a:prstGeom xmlns:a="http://schemas.openxmlformats.org/drawingml/2006/main" prst="rect">
+          <a:prstGeom prst="rect">
             <a:avLst/>
           </a:prstGeom>
-          <a:solidFill xmlns:a="http://schemas.openxmlformats.org/drawingml/2006/main">
+          <a:solidFill>
             <a:schemeClr val="accent1">
               <a:lumMod val="75000"/>
             </a:schemeClr>
           </a:solidFill>
-          <a:ln xmlns:a="http://schemas.openxmlformats.org/drawingml/2006/main">
+          <a:ln>
             <a:solidFill>
               <a:schemeClr val="accent6">
                 <a:lumMod val="20000"/>
@@ -4180,11 +3890,11 @@
           </a:ln>
         </p:spPr>
         <p:txBody>
-          <a:bodyPr xmlns:a="http://schemas.openxmlformats.org/drawingml/2006/main" wrap="square">
+          <a:bodyPr wrap="square">
             <a:spAutoFit/>
           </a:bodyPr>
-          <a:lstStyle xmlns:a="http://schemas.openxmlformats.org/drawingml/2006/main"/>
-          <a:p xmlns:a="http://schemas.openxmlformats.org/drawingml/2006/main">
+          <a:lstStyle/>
+          <a:p>
             <a:pPr>
               <a:buNone/>
             </a:pPr>
@@ -4200,7 +3910,7 @@
               <a:t>5. CONCLUSIONES.</a:t>
             </a:r>
           </a:p>
-          <a:p xmlns:a="http://schemas.openxmlformats.org/drawingml/2006/main">
+          <a:p>
             <a:pPr>
               <a:buNone/>
             </a:pPr>
@@ -4216,7 +3926,7 @@
               <a:t>PINN-SIREN resuelve Helmholtz con precisión subporcentual: 0.006% en 1D y 0.171% en 2D.</a:t>
             </a:r>
           </a:p>
-          <a:p xmlns:a="http://schemas.openxmlformats.org/drawingml/2006/main">
+          <a:p>
             <a:pPr>
               <a:buNone/>
             </a:pPr>
@@ -4232,7 +3942,7 @@
               <a:t>La representación sinusoidal, el muestreo LHS y Adam + L-BFGS favorecen la convergencia del campo complejo.</a:t>
             </a:r>
           </a:p>
-          <a:p xmlns:a="http://schemas.openxmlformats.org/drawingml/2006/main">
+          <a:p>
             <a:pPr>
               <a:buNone/>
             </a:pPr>
@@ -4253,31 +3963,31 @@
       <p:sp>
         <p:nvSpPr>
           <p:cNvPr id="14" name="AutoShape 2">
-            <a:extLst xmlns:a="http://schemas.openxmlformats.org/drawingml/2006/main">
+            <a:extLst>
               <a:ext uri="{FF2B5EF4-FFF2-40B4-BE49-F238E27FC236}">
                 <a16:creationId xmlns:a16="http://schemas.microsoft.com/office/drawing/2014/main" id="{BAF848EE-9FA9-475F-D7D6-E7C59CE42076}"/>
               </a:ext>
             </a:extLst>
           </p:cNvPr>
           <p:cNvSpPr>
-            <a:spLocks xmlns:a="http://schemas.openxmlformats.org/drawingml/2006/main" noGrp="1"/>
+            <a:spLocks noGrp="1"/>
           </p:cNvSpPr>
           <p:nvPr/>
         </p:nvSpPr>
         <p:spPr>
-          <a:xfrm xmlns:a="http://schemas.openxmlformats.org/drawingml/2006/main">
+          <a:xfrm>
             <a:off x="16046450" y="23246556"/>
             <a:ext cx="304800" cy="304800"/>
           </a:xfrm>
-          <a:prstGeom xmlns:a="http://schemas.openxmlformats.org/drawingml/2006/main" prst="rect">
+          <a:prstGeom prst="rect">
             <a:avLst/>
           </a:prstGeom>
-          <a:noFill xmlns:a="http://schemas.openxmlformats.org/drawingml/2006/main"/>
+          <a:noFill/>
         </p:spPr>
         <p:txBody>
-          <a:bodyPr xmlns:a="http://schemas.openxmlformats.org/drawingml/2006/main" vert="horz" wrap="square" lIns="91440" tIns="45720" rIns="91440" bIns="45720" anchor="t"/>
-          <a:lstStyle xmlns:a="http://schemas.openxmlformats.org/drawingml/2006/main"/>
-          <a:p xmlns:a="http://schemas.openxmlformats.org/drawingml/2006/main">
+          <a:bodyPr vert="horz" wrap="square" lIns="91440" tIns="45720" rIns="91440" bIns="45720" anchor="t"/>
+          <a:lstStyle/>
+          <a:p>
             <a:endParaRPr/>
           </a:p>
         </p:txBody>
@@ -4285,31 +3995,31 @@
       <p:sp>
         <p:nvSpPr>
           <p:cNvPr id="15" name="AutoShape 4">
-            <a:extLst xmlns:a="http://schemas.openxmlformats.org/drawingml/2006/main">
+            <a:extLst>
               <a:ext uri="{FF2B5EF4-FFF2-40B4-BE49-F238E27FC236}">
                 <a16:creationId xmlns:a16="http://schemas.microsoft.com/office/drawing/2014/main" id="{651A537B-9BF8-507F-10FD-849E59C2D3B3}"/>
               </a:ext>
             </a:extLst>
           </p:cNvPr>
           <p:cNvSpPr>
-            <a:spLocks xmlns:a="http://schemas.openxmlformats.org/drawingml/2006/main" noGrp="1"/>
+            <a:spLocks noGrp="1"/>
           </p:cNvSpPr>
           <p:nvPr/>
         </p:nvSpPr>
         <p:spPr>
-          <a:xfrm xmlns:a="http://schemas.openxmlformats.org/drawingml/2006/main">
+          <a:xfrm>
             <a:off x="16198850" y="23398956"/>
             <a:ext cx="304800" cy="304800"/>
           </a:xfrm>
-          <a:prstGeom xmlns:a="http://schemas.openxmlformats.org/drawingml/2006/main" prst="rect">
+          <a:prstGeom prst="rect">
             <a:avLst/>
           </a:prstGeom>
-          <a:noFill xmlns:a="http://schemas.openxmlformats.org/drawingml/2006/main"/>
+          <a:noFill/>
         </p:spPr>
         <p:txBody>
-          <a:bodyPr xmlns:a="http://schemas.openxmlformats.org/drawingml/2006/main" vert="horz" wrap="square" lIns="91440" tIns="45720" rIns="91440" bIns="45720" anchor="t"/>
-          <a:lstStyle xmlns:a="http://schemas.openxmlformats.org/drawingml/2006/main"/>
-          <a:p xmlns:a="http://schemas.openxmlformats.org/drawingml/2006/main">
+          <a:bodyPr vert="horz" wrap="square" lIns="91440" tIns="45720" rIns="91440" bIns="45720" anchor="t"/>
+          <a:lstStyle/>
+          <a:p>
             <a:endParaRPr/>
           </a:p>
         </p:txBody>
@@ -4317,33 +4027,33 @@
       <p:sp>
         <p:nvSpPr>
           <p:cNvPr id="22" name="CuadroTexto 21">
-            <a:extLst xmlns:a="http://schemas.openxmlformats.org/drawingml/2006/main">
+            <a:extLst>
               <a:ext uri="{FF2B5EF4-FFF2-40B4-BE49-F238E27FC236}">
                 <a16:creationId xmlns:a16="http://schemas.microsoft.com/office/drawing/2014/main" id="{57B01137-9338-D708-A712-9371BAAEDAF1}"/>
               </a:ext>
             </a:extLst>
           </p:cNvPr>
           <p:cNvSpPr>
-            <a:spLocks xmlns:a="http://schemas.openxmlformats.org/drawingml/2006/main" noGrp="1"/>
+            <a:spLocks noGrp="1"/>
           </p:cNvSpPr>
           <p:nvPr/>
         </p:nvSpPr>
         <p:spPr>
-          <a:xfrm xmlns:a="http://schemas.openxmlformats.org/drawingml/2006/main">
+          <a:xfrm>
             <a:off x="694087" y="44253245"/>
             <a:ext cx="30392942" cy="2529840"/>
           </a:xfrm>
-          <a:prstGeom xmlns:a="http://schemas.openxmlformats.org/drawingml/2006/main" prst="rect">
+          <a:prstGeom prst="rect">
             <a:avLst/>
           </a:prstGeom>
-          <a:noFill xmlns:a="http://schemas.openxmlformats.org/drawingml/2006/main"/>
+          <a:noFill/>
         </p:spPr>
         <p:txBody>
-          <a:bodyPr xmlns:a="http://schemas.openxmlformats.org/drawingml/2006/main" wrap="square">
+          <a:bodyPr wrap="square">
             <a:spAutoFit/>
           </a:bodyPr>
-          <a:lstStyle xmlns:a="http://schemas.openxmlformats.org/drawingml/2006/main"/>
-          <a:p xmlns:a="http://schemas.openxmlformats.org/drawingml/2006/main">
+          <a:lstStyle/>
+          <a:p>
             <a:pPr>
               <a:buNone/>
             </a:pPr>
@@ -4359,7 +4069,7 @@
               <a:t>7. FUENTES CITADAS.</a:t>
             </a:r>
           </a:p>
-          <a:p xmlns:a="http://schemas.openxmlformats.org/drawingml/2006/main">
+          <a:p>
             <a:pPr>
               <a:buNone/>
             </a:pPr>
@@ -4375,7 +4085,7 @@
               <a:t>[1] Raissi, M., Perdikaris, P. &amp; Karniadakis, G. (2019). Physics-informed neural networks. Journal of Computational Physics.</a:t>
             </a:r>
           </a:p>
-          <a:p xmlns:a="http://schemas.openxmlformats.org/drawingml/2006/main">
+          <a:p>
             <a:pPr>
               <a:buNone/>
             </a:pPr>
@@ -4391,7 +4101,7 @@
               <a:t>[2] Sitzmann, V. et al. (2020). Implicit neural representations with periodic activation functions. NeurIPS.</a:t>
             </a:r>
           </a:p>
-          <a:p xmlns:a="http://schemas.openxmlformats.org/drawingml/2006/main">
+          <a:p>
             <a:pPr>
               <a:buNone/>
             </a:pPr>
@@ -4407,7 +4117,7 @@
               <a:t>[3] Goodman, J. W. (2007). Speckle Phenomena in Optics: Theory and Applications.</a:t>
             </a:r>
           </a:p>
-          <a:p xmlns:a="http://schemas.openxmlformats.org/drawingml/2006/main">
+          <a:p>
             <a:pPr>
               <a:buNone/>
             </a:pPr>
@@ -4428,33 +4138,33 @@
       <p:sp>
         <p:nvSpPr>
           <p:cNvPr id="7" name="CuadroTexto 6">
-            <a:extLst xmlns:a="http://schemas.openxmlformats.org/drawingml/2006/main">
+            <a:extLst>
               <a:ext uri="{FF2B5EF4-FFF2-40B4-BE49-F238E27FC236}">
                 <a16:creationId xmlns:a16="http://schemas.microsoft.com/office/drawing/2014/main" id="{039E41CE-2B9A-EB31-C82A-02B5B5DD60BF}"/>
               </a:ext>
             </a:extLst>
           </p:cNvPr>
           <p:cNvSpPr>
-            <a:spLocks xmlns:a="http://schemas.openxmlformats.org/drawingml/2006/main" noGrp="1"/>
+            <a:spLocks noGrp="1"/>
           </p:cNvSpPr>
           <p:nvPr/>
         </p:nvSpPr>
         <p:spPr>
-          <a:xfrm xmlns:a="http://schemas.openxmlformats.org/drawingml/2006/main">
+          <a:xfrm>
             <a:off x="801719" y="13049250"/>
             <a:ext cx="9547193" cy="2682240"/>
           </a:xfrm>
-          <a:prstGeom xmlns:a="http://schemas.openxmlformats.org/drawingml/2006/main" prst="rect">
+          <a:prstGeom prst="rect">
             <a:avLst/>
           </a:prstGeom>
-          <a:noFill xmlns:a="http://schemas.openxmlformats.org/drawingml/2006/main"/>
+          <a:noFill/>
         </p:spPr>
         <p:txBody>
-          <a:bodyPr xmlns:a="http://schemas.openxmlformats.org/drawingml/2006/main" wrap="square">
+          <a:bodyPr wrap="square">
             <a:spAutoFit/>
           </a:bodyPr>
-          <a:lstStyle xmlns:a="http://schemas.openxmlformats.org/drawingml/2006/main"/>
-          <a:p xmlns:a="http://schemas.openxmlformats.org/drawingml/2006/main">
+          <a:lstStyle/>
+          <a:p>
             <a:pPr>
               <a:buNone/>
             </a:pPr>
@@ -4470,7 +4180,7 @@
               <a:t>2. OBJETIVO.</a:t>
             </a:r>
           </a:p>
-          <a:p xmlns:a="http://schemas.openxmlformats.org/drawingml/2006/main">
+          <a:p>
             <a:pPr>
               <a:buNone/>
             </a:pPr>
@@ -4491,33 +4201,33 @@
       <p:sp>
         <p:nvSpPr>
           <p:cNvPr id="4" name="CuadroTexto 3">
-            <a:extLst xmlns:a="http://schemas.openxmlformats.org/drawingml/2006/main">
+            <a:extLst>
               <a:ext uri="{FF2B5EF4-FFF2-40B4-BE49-F238E27FC236}">
                 <a16:creationId xmlns:a16="http://schemas.microsoft.com/office/drawing/2014/main" id="{C663530F-9B89-3E78-7D39-A42DCBAF6EC2}"/>
               </a:ext>
             </a:extLst>
           </p:cNvPr>
           <p:cNvSpPr>
-            <a:spLocks xmlns:a="http://schemas.openxmlformats.org/drawingml/2006/main" noGrp="1"/>
+            <a:spLocks noGrp="1"/>
           </p:cNvSpPr>
           <p:nvPr/>
         </p:nvSpPr>
         <p:spPr>
-          <a:xfrm xmlns:a="http://schemas.openxmlformats.org/drawingml/2006/main">
+          <a:xfrm>
             <a:off x="22170962" y="15240000"/>
             <a:ext cx="9454896" cy="7429500"/>
           </a:xfrm>
-          <a:prstGeom xmlns:a="http://schemas.openxmlformats.org/drawingml/2006/main" prst="rect">
+          <a:prstGeom prst="rect">
             <a:avLst/>
           </a:prstGeom>
-          <a:noFill xmlns:a="http://schemas.openxmlformats.org/drawingml/2006/main"/>
+          <a:noFill/>
         </p:spPr>
         <p:txBody>
-          <a:bodyPr xmlns:a="http://schemas.openxmlformats.org/drawingml/2006/main" wrap="square">
+          <a:bodyPr wrap="square">
             <a:spAutoFit/>
           </a:bodyPr>
-          <a:lstStyle xmlns:a="http://schemas.openxmlformats.org/drawingml/2006/main"/>
-          <a:p xmlns:a="http://schemas.openxmlformats.org/drawingml/2006/main">
+          <a:lstStyle/>
+          <a:p>
             <a:pPr>
               <a:buNone/>
             </a:pPr>
@@ -4533,7 +4243,7 @@
               <a:t>4. RESULTADOS.</a:t>
             </a:r>
           </a:p>
-          <a:p xmlns:a="http://schemas.openxmlformats.org/drawingml/2006/main">
+          <a:p>
             <a:pPr>
               <a:buNone/>
             </a:pPr>
@@ -4549,7 +4259,7 @@
               <a:t>El modelo reproduce la solución analítica con alta precisión en 1D y en ambas componentes del campo complejo 2D.</a:t>
             </a:r>
           </a:p>
-          <a:p xmlns:a="http://schemas.openxmlformats.org/drawingml/2006/main">
+          <a:p>
             <a:pPr>
               <a:buNone/>
             </a:pPr>
@@ -4565,7 +4275,7 @@
               <a:t>NB01 | εL² = 0.006% | R² = 1.000000.</a:t>
             </a:r>
           </a:p>
-          <a:p xmlns:a="http://schemas.openxmlformats.org/drawingml/2006/main">
+          <a:p>
             <a:pPr>
               <a:buNone/>
             </a:pPr>
@@ -4581,7 +4291,7 @@
               <a:t>NB02 | εL² promedio = 0.171% | R² &gt; 0.9999.</a:t>
             </a:r>
           </a:p>
-          <a:p xmlns:a="http://schemas.openxmlformats.org/drawingml/2006/main">
+          <a:p>
             <a:pPr>
               <a:buNone/>
             </a:pPr>
@@ -4597,7 +4307,7 @@
               <a:t>La arquitectura 5 × 128 reduce el error 2.5× frente a 5 × 64; la variación entre semillas es 0.155 ± 0.020%.</a:t>
             </a:r>
           </a:p>
-          <a:p xmlns:a="http://schemas.openxmlformats.org/drawingml/2006/main">
+          <a:p>
             <a:pPr>
               <a:buNone/>
             </a:pPr>
@@ -4618,56 +4328,56 @@
       <p:sp>
         <p:nvSpPr>
           <p:cNvPr id="8" name="CuadroTexto 7">
-            <a:extLst xmlns:a="http://schemas.openxmlformats.org/drawingml/2006/main">
+            <a:extLst>
               <a:ext uri="{FF2B5EF4-FFF2-40B4-BE49-F238E27FC236}">
                 <a16:creationId xmlns:a16="http://schemas.microsoft.com/office/drawing/2014/main" id="{29C69117-B6EA-8074-3F79-D230F177C65B}"/>
               </a:ext>
             </a:extLst>
           </p:cNvPr>
           <p:cNvSpPr>
-            <a:spLocks xmlns:a="http://schemas.openxmlformats.org/drawingml/2006/main" noGrp="1"/>
+            <a:spLocks noGrp="1"/>
           </p:cNvSpPr>
           <p:nvPr/>
         </p:nvSpPr>
         <p:spPr>
-          <a:xfrm xmlns:a="http://schemas.openxmlformats.org/drawingml/2006/main">
+          <a:xfrm>
             <a:off x="711422" y="6039421"/>
             <a:ext cx="9637586" cy="6667500"/>
           </a:xfrm>
-          <a:prstGeom xmlns:a="http://schemas.openxmlformats.org/drawingml/2006/main" prst="rect">
+          <a:prstGeom prst="rect">
             <a:avLst/>
           </a:prstGeom>
-          <a:solidFill xmlns:a="http://schemas.openxmlformats.org/drawingml/2006/main">
+          <a:solidFill>
             <a:schemeClr val="accent1">
               <a:lumMod val="75000"/>
             </a:schemeClr>
           </a:solidFill>
-          <a:ln xmlns:a="http://schemas.openxmlformats.org/drawingml/2006/main">
+          <a:ln>
             <a:solidFill>
               <a:schemeClr val="bg1"/>
             </a:solidFill>
           </a:ln>
         </p:spPr>
         <p:style>
-          <a:lnRef xmlns:a="http://schemas.openxmlformats.org/drawingml/2006/main" idx="2">
+          <a:lnRef idx="2">
             <a:schemeClr val="dk1"/>
           </a:lnRef>
-          <a:fillRef xmlns:a="http://schemas.openxmlformats.org/drawingml/2006/main" idx="1">
+          <a:fillRef idx="1">
             <a:schemeClr val="lt1"/>
           </a:fillRef>
-          <a:effectRef xmlns:a="http://schemas.openxmlformats.org/drawingml/2006/main" idx="0">
+          <a:effectRef idx="0">
             <a:schemeClr val="dk1"/>
           </a:effectRef>
-          <a:fontRef xmlns:a="http://schemas.openxmlformats.org/drawingml/2006/main" idx="minor">
+          <a:fontRef idx="minor">
             <a:schemeClr val="dk1"/>
           </a:fontRef>
         </p:style>
         <p:txBody>
-          <a:bodyPr xmlns:a="http://schemas.openxmlformats.org/drawingml/2006/main" wrap="square">
+          <a:bodyPr wrap="square">
             <a:spAutoFit/>
           </a:bodyPr>
-          <a:lstStyle xmlns:a="http://schemas.openxmlformats.org/drawingml/2006/main"/>
-          <a:p xmlns:a="http://schemas.openxmlformats.org/drawingml/2006/main">
+          <a:lstStyle/>
+          <a:p>
             <a:pPr>
               <a:buNone/>
             </a:pPr>
@@ -4683,7 +4393,7 @@
               <a:t>1. RESUMEN.</a:t>
             </a:r>
           </a:p>
-          <a:p xmlns:a="http://schemas.openxmlformats.org/drawingml/2006/main">
+          <a:p>
             <a:pPr>
               <a:buNone/>
             </a:pPr>
@@ -4699,7 +4409,7 @@
               <a:t>Se propone un modelo PINN-SIREN para resolver la ecuación de Helmholtz y acelerar la simulación de speckle óptico en dominios 2D.</a:t>
             </a:r>
           </a:p>
-          <a:p xmlns:a="http://schemas.openxmlformats.org/drawingml/2006/main">
+          <a:p>
             <a:pPr>
               <a:buNone/>
             </a:pPr>
@@ -4715,7 +4425,7 @@
               <a:t>El campo eléctrico complejo se aprende directamente desde la EDP y sus condiciones de frontera, sin construir una malla de elementos finitos.</a:t>
             </a:r>
           </a:p>
-          <a:p xmlns:a="http://schemas.openxmlformats.org/drawingml/2006/main">
+          <a:p>
             <a:pPr>
               <a:buNone/>
             </a:pPr>
@@ -4736,33 +4446,33 @@
       <p:sp>
         <p:nvSpPr>
           <p:cNvPr id="16" name="CuadroTexto 15">
-            <a:extLst xmlns:a="http://schemas.openxmlformats.org/drawingml/2006/main">
+            <a:extLst>
               <a:ext uri="{FF2B5EF4-FFF2-40B4-BE49-F238E27FC236}">
                 <a16:creationId xmlns:a16="http://schemas.microsoft.com/office/drawing/2014/main" id="{A03E13D9-BF07-B852-EF14-2366F34C9B29}"/>
               </a:ext>
             </a:extLst>
           </p:cNvPr>
           <p:cNvSpPr>
-            <a:spLocks xmlns:a="http://schemas.openxmlformats.org/drawingml/2006/main" noGrp="1"/>
+            <a:spLocks noGrp="1"/>
           </p:cNvSpPr>
           <p:nvPr/>
         </p:nvSpPr>
         <p:spPr>
-          <a:xfrm xmlns:a="http://schemas.openxmlformats.org/drawingml/2006/main">
+          <a:xfrm>
             <a:off x="11430953" y="8763000"/>
             <a:ext cx="9689021" cy="7239000"/>
           </a:xfrm>
-          <a:prstGeom xmlns:a="http://schemas.openxmlformats.org/drawingml/2006/main" prst="rect">
+          <a:prstGeom prst="rect">
             <a:avLst/>
           </a:prstGeom>
-          <a:noFill xmlns:a="http://schemas.openxmlformats.org/drawingml/2006/main"/>
+          <a:noFill/>
         </p:spPr>
         <p:txBody>
-          <a:bodyPr xmlns:a="http://schemas.openxmlformats.org/drawingml/2006/main" wrap="square">
+          <a:bodyPr wrap="square">
             <a:spAutoFit/>
           </a:bodyPr>
-          <a:lstStyle xmlns:a="http://schemas.openxmlformats.org/drawingml/2006/main"/>
-          <a:p xmlns:a="http://schemas.openxmlformats.org/drawingml/2006/main">
+          <a:lstStyle/>
+          <a:p>
             <a:pPr>
               <a:buNone/>
             </a:pPr>
@@ -4778,7 +4488,7 @@
               <a:t>3. METODOLOGÍA.</a:t>
             </a:r>
           </a:p>
-          <a:p xmlns:a="http://schemas.openxmlformats.org/drawingml/2006/main">
+          <a:p>
             <a:pPr>
               <a:buNone/>
             </a:pPr>
@@ -4794,7 +4504,7 @@
               <a:t>1. NB01 — Validación 1D: SIREN 5 × 64 contra E(x) = cos(kx).</a:t>
             </a:r>
           </a:p>
-          <a:p xmlns:a="http://schemas.openxmlformats.org/drawingml/2006/main">
+          <a:p>
             <a:pPr>
               <a:buNone/>
             </a:pPr>
@@ -4810,7 +4520,7 @@
               <a:t>2. NB02 — Validación 2D: SIREN 5 × 128, salida (Ereal, Eimag), LHS con Nc = 3,000 y Nb = 300 por borde.</a:t>
             </a:r>
           </a:p>
-          <a:p xmlns:a="http://schemas.openxmlformats.org/drawingml/2006/main">
+          <a:p>
             <a:pPr>
               <a:buNone/>
             </a:pPr>
@@ -4826,7 +4536,7 @@
               <a:t>3. NB03 — Speckle 2D: frontera E(x,0) = e^{iψ(x)}, ψ ~ U(0, 2π), con bordes libres.</a:t>
             </a:r>
           </a:p>
-          <a:p xmlns:a="http://schemas.openxmlformats.org/drawingml/2006/main">
+          <a:p>
             <a:pPr>
               <a:buNone/>
             </a:pPr>
@@ -4842,7 +4552,7 @@
               <a:t>Optimización bifásica Adam + L-BFGS; λfis = 0.1; evaluación en malla 100 × 100.</a:t>
             </a:r>
           </a:p>
-          <a:p xmlns:a="http://schemas.openxmlformats.org/drawingml/2006/main">
+          <a:p>
             <a:pPr>
               <a:buNone/>
             </a:pPr>
@@ -4864,20 +4574,20 @@
         <p:nvPicPr>
           <p:cNvPr id="70" name="Imagen 27"/>
           <p:cNvPicPr>
-            <a:picLocks xmlns:a="http://schemas.openxmlformats.org/drawingml/2006/main" noChangeAspect="1"/>
+            <a:picLocks noChangeAspect="1"/>
           </p:cNvPicPr>
           <p:nvPr/>
         </p:nvPicPr>
         <p:blipFill rotWithShape="1">
-          <a:blip xmlns:r="http://schemas.openxmlformats.org/officeDocument/2006/relationships" xmlns:a="http://schemas.openxmlformats.org/drawingml/2006/main" r:embed="Ra855f8ade6604a7a"/>
-          <a:stretch xmlns:a="http://schemas.openxmlformats.org/drawingml/2006/main"/>
+          <a:blip r:embed="rId5"/>
+          <a:stretch/>
         </p:blipFill>
         <p:spPr>
-          <a:xfrm xmlns:a="http://schemas.openxmlformats.org/drawingml/2006/main" rot="0" flipH="0" flipV="0">
+          <a:xfrm>
             <a:off x="12517771" y="17240250"/>
             <a:ext cx="7397082" cy="4667250"/>
           </a:xfrm>
-          <a:prstGeom xmlns:a="http://schemas.openxmlformats.org/drawingml/2006/main" prst="rect">
+          <a:prstGeom prst="rect">
             <a:avLst/>
           </a:prstGeom>
         </p:spPr>
@@ -4885,33 +4595,33 @@
       <p:sp>
         <p:nvSpPr>
           <p:cNvPr id="18" name="CuadroTexto 17">
-            <a:extLst xmlns:a="http://schemas.openxmlformats.org/drawingml/2006/main">
+            <a:extLst>
               <a:ext uri="{FF2B5EF4-FFF2-40B4-BE49-F238E27FC236}">
                 <a16:creationId xmlns:a16="http://schemas.microsoft.com/office/drawing/2014/main" id="{0C537126-1334-0E11-8C9E-9ED6FE3A2E6E}"/>
               </a:ext>
             </a:extLst>
           </p:cNvPr>
           <p:cNvSpPr>
-            <a:spLocks xmlns:a="http://schemas.openxmlformats.org/drawingml/2006/main" noGrp="1"/>
+            <a:spLocks noGrp="1"/>
           </p:cNvSpPr>
           <p:nvPr/>
         </p:nvSpPr>
         <p:spPr>
-          <a:xfrm xmlns:a="http://schemas.openxmlformats.org/drawingml/2006/main">
+          <a:xfrm>
             <a:off x="711422" y="16287750"/>
             <a:ext cx="9547193" cy="7334250"/>
           </a:xfrm>
-          <a:prstGeom xmlns:a="http://schemas.openxmlformats.org/drawingml/2006/main" prst="rect">
+          <a:prstGeom prst="rect">
             <a:avLst/>
           </a:prstGeom>
-          <a:noFill xmlns:a="http://schemas.openxmlformats.org/drawingml/2006/main"/>
+          <a:noFill/>
         </p:spPr>
         <p:txBody>
-          <a:bodyPr xmlns:a="http://schemas.openxmlformats.org/drawingml/2006/main" wrap="square">
+          <a:bodyPr wrap="square">
             <a:spAutoFit/>
           </a:bodyPr>
-          <a:lstStyle xmlns:a="http://schemas.openxmlformats.org/drawingml/2006/main"/>
-          <a:p xmlns:a="http://schemas.openxmlformats.org/drawingml/2006/main">
+          <a:lstStyle/>
+          <a:p>
             <a:pPr>
               <a:buNone/>
             </a:pPr>
@@ -4927,7 +4637,7 @@
               <a:t>PROBLEMA FÍSICO.</a:t>
             </a:r>
           </a:p>
-          <a:p xmlns:a="http://schemas.openxmlformats.org/drawingml/2006/main">
+          <a:p>
             <a:pPr>
               <a:buNone/>
             </a:pPr>
@@ -4943,7 +4653,7 @@
               <a:t>El speckle óptico surge por la interferencia de luz coherente dispersada. Su simulación exige resolver campos oscilatorios con gran resolución espacial.</a:t>
             </a:r>
           </a:p>
-          <a:p xmlns:a="http://schemas.openxmlformats.org/drawingml/2006/main">
+          <a:p>
             <a:pPr>
               <a:buNone/>
             </a:pPr>
@@ -4965,20 +4675,20 @@
         <p:nvPicPr>
           <p:cNvPr id="72" name="Imagen 8"/>
           <p:cNvPicPr>
-            <a:picLocks xmlns:a="http://schemas.openxmlformats.org/drawingml/2006/main" noChangeAspect="1"/>
+            <a:picLocks noChangeAspect="1"/>
           </p:cNvPicPr>
           <p:nvPr/>
         </p:nvPicPr>
         <p:blipFill>
-          <a:blip xmlns:r="http://schemas.openxmlformats.org/officeDocument/2006/relationships" xmlns:a="http://schemas.openxmlformats.org/drawingml/2006/main" r:embed="Rf9e6be8c23734474"/>
-          <a:stretch xmlns:a="http://schemas.openxmlformats.org/drawingml/2006/main"/>
+          <a:blip r:embed="rId6"/>
+          <a:stretch/>
         </p:blipFill>
         <p:spPr>
-          <a:xfrm xmlns:a="http://schemas.openxmlformats.org/drawingml/2006/main" rot="0" flipH="0" flipV="0">
+          <a:xfrm>
             <a:off x="857250" y="24496992"/>
             <a:ext cx="9334500" cy="2631515"/>
           </a:xfrm>
-          <a:prstGeom xmlns:a="http://schemas.openxmlformats.org/drawingml/2006/main" prst="rect">
+          <a:prstGeom prst="rect">
             <a:avLst/>
           </a:prstGeom>
         </p:spPr>
@@ -4986,31 +4696,31 @@
       <p:sp>
         <p:nvSpPr>
           <p:cNvPr id="10" name="AutoShape 2">
-            <a:extLst xmlns:a="http://schemas.openxmlformats.org/drawingml/2006/main">
+            <a:extLst>
               <a:ext uri="{FF2B5EF4-FFF2-40B4-BE49-F238E27FC236}">
                 <a16:creationId xmlns:a16="http://schemas.microsoft.com/office/drawing/2014/main" id="{EB72079C-1686-5ACD-1D84-22B09994E359}"/>
               </a:ext>
             </a:extLst>
           </p:cNvPr>
           <p:cNvSpPr>
-            <a:spLocks xmlns:a="http://schemas.openxmlformats.org/drawingml/2006/main" noGrp="1"/>
+            <a:spLocks noGrp="1"/>
           </p:cNvSpPr>
           <p:nvPr/>
         </p:nvSpPr>
         <p:spPr>
-          <a:xfrm xmlns:a="http://schemas.openxmlformats.org/drawingml/2006/main">
+          <a:xfrm>
             <a:off x="16351250" y="23552150"/>
             <a:ext cx="304800" cy="304800"/>
           </a:xfrm>
-          <a:prstGeom xmlns:a="http://schemas.openxmlformats.org/drawingml/2006/main" prst="rect">
+          <a:prstGeom prst="rect">
             <a:avLst/>
           </a:prstGeom>
-          <a:noFill xmlns:a="http://schemas.openxmlformats.org/drawingml/2006/main"/>
+          <a:noFill/>
         </p:spPr>
         <p:txBody>
-          <a:bodyPr xmlns:a="http://schemas.openxmlformats.org/drawingml/2006/main" vert="horz" wrap="square" lIns="91440" tIns="45720" rIns="91440" bIns="45720" anchor="t"/>
-          <a:lstStyle xmlns:a="http://schemas.openxmlformats.org/drawingml/2006/main"/>
-          <a:p xmlns:a="http://schemas.openxmlformats.org/drawingml/2006/main">
+          <a:bodyPr vert="horz" wrap="square" lIns="91440" tIns="45720" rIns="91440" bIns="45720" anchor="t"/>
+          <a:lstStyle/>
+          <a:p>
             <a:endParaRPr/>
           </a:p>
         </p:txBody>
@@ -5018,33 +4728,33 @@
       <p:sp>
         <p:nvSpPr>
           <p:cNvPr id="23" name="CuadroTexto 22">
-            <a:extLst xmlns:a="http://schemas.openxmlformats.org/drawingml/2006/main">
+            <a:extLst>
               <a:ext uri="{FF2B5EF4-FFF2-40B4-BE49-F238E27FC236}">
                 <a16:creationId xmlns:a16="http://schemas.microsoft.com/office/drawing/2014/main" id="{02C324C7-DAE6-C556-204D-4B4895F903E7}"/>
               </a:ext>
             </a:extLst>
           </p:cNvPr>
           <p:cNvSpPr>
-            <a:spLocks xmlns:a="http://schemas.openxmlformats.org/drawingml/2006/main" noGrp="1"/>
+            <a:spLocks noGrp="1"/>
           </p:cNvSpPr>
           <p:nvPr/>
         </p:nvSpPr>
         <p:spPr>
-          <a:xfrm xmlns:a="http://schemas.openxmlformats.org/drawingml/2006/main">
+          <a:xfrm>
             <a:off x="22083141" y="5998178"/>
             <a:ext cx="9734550" cy="2381250"/>
           </a:xfrm>
-          <a:prstGeom xmlns:a="http://schemas.openxmlformats.org/drawingml/2006/main" prst="rect">
+          <a:prstGeom prst="rect">
             <a:avLst/>
           </a:prstGeom>
-          <a:noFill xmlns:a="http://schemas.openxmlformats.org/drawingml/2006/main"/>
+          <a:noFill/>
         </p:spPr>
         <p:txBody>
-          <a:bodyPr xmlns:a="http://schemas.openxmlformats.org/drawingml/2006/main" wrap="square">
+          <a:bodyPr wrap="square">
             <a:spAutoFit/>
           </a:bodyPr>
-          <a:lstStyle xmlns:a="http://schemas.openxmlformats.org/drawingml/2006/main"/>
-          <a:p xmlns:a="http://schemas.openxmlformats.org/drawingml/2006/main">
+          <a:lstStyle/>
+          <a:p>
             <a:pPr>
               <a:buNone/>
             </a:pPr>
@@ -5060,7 +4770,7 @@
               <a:t>VALIDACIÓN 2D.</a:t>
             </a:r>
           </a:p>
-          <a:p xmlns:a="http://schemas.openxmlformats.org/drawingml/2006/main">
+          <a:p>
             <a:pPr>
               <a:buNone/>
             </a:pPr>
@@ -5081,31 +4791,31 @@
       <p:sp>
         <p:nvSpPr>
           <p:cNvPr id="17" name="AutoShape 4">
-            <a:extLst xmlns:a="http://schemas.openxmlformats.org/drawingml/2006/main">
+            <a:extLst>
               <a:ext uri="{FF2B5EF4-FFF2-40B4-BE49-F238E27FC236}">
                 <a16:creationId xmlns:a16="http://schemas.microsoft.com/office/drawing/2014/main" id="{C91B6DA9-255F-EDC0-F529-D9B8D5F0C75D}"/>
               </a:ext>
             </a:extLst>
           </p:cNvPr>
           <p:cNvSpPr>
-            <a:spLocks xmlns:a="http://schemas.openxmlformats.org/drawingml/2006/main" noGrp="1"/>
+            <a:spLocks noGrp="1"/>
           </p:cNvSpPr>
           <p:nvPr/>
         </p:nvSpPr>
         <p:spPr>
-          <a:xfrm xmlns:a="http://schemas.openxmlformats.org/drawingml/2006/main">
+          <a:xfrm>
             <a:off x="16503650" y="23704550"/>
             <a:ext cx="304800" cy="304800"/>
           </a:xfrm>
-          <a:prstGeom xmlns:a="http://schemas.openxmlformats.org/drawingml/2006/main" prst="rect">
+          <a:prstGeom prst="rect">
             <a:avLst/>
           </a:prstGeom>
-          <a:noFill xmlns:a="http://schemas.openxmlformats.org/drawingml/2006/main"/>
+          <a:noFill/>
         </p:spPr>
         <p:txBody>
-          <a:bodyPr xmlns:a="http://schemas.openxmlformats.org/drawingml/2006/main" vert="horz" wrap="square" lIns="91440" tIns="45720" rIns="91440" bIns="45720" anchor="t"/>
-          <a:lstStyle xmlns:a="http://schemas.openxmlformats.org/drawingml/2006/main"/>
-          <a:p xmlns:a="http://schemas.openxmlformats.org/drawingml/2006/main">
+          <a:bodyPr vert="horz" wrap="square" lIns="91440" tIns="45720" rIns="91440" bIns="45720" anchor="t"/>
+          <a:lstStyle/>
+          <a:p>
             <a:endParaRPr/>
           </a:p>
         </p:txBody>
@@ -5114,20 +4824,20 @@
         <p:nvPicPr>
           <p:cNvPr id="76" name="Imagen 20"/>
           <p:cNvPicPr>
-            <a:picLocks xmlns:a="http://schemas.openxmlformats.org/drawingml/2006/main" noChangeAspect="1"/>
+            <a:picLocks noChangeAspect="1"/>
           </p:cNvPicPr>
           <p:nvPr/>
         </p:nvPicPr>
         <p:blipFill rotWithShape="1">
-          <a:blip xmlns:r="http://schemas.openxmlformats.org/officeDocument/2006/relationships" xmlns:a="http://schemas.openxmlformats.org/drawingml/2006/main" r:embed="R18b4aa270d6c4fbd"/>
-          <a:stretch xmlns:a="http://schemas.openxmlformats.org/drawingml/2006/main"/>
+          <a:blip r:embed="rId7"/>
+          <a:stretch/>
         </p:blipFill>
         <p:spPr>
-          <a:xfrm xmlns:a="http://schemas.openxmlformats.org/drawingml/2006/main" rot="0" flipH="0" flipV="0">
+          <a:xfrm>
             <a:off x="23301452" y="8763000"/>
             <a:ext cx="7308595" cy="5810250"/>
           </a:xfrm>
-          <a:prstGeom xmlns:a="http://schemas.openxmlformats.org/drawingml/2006/main" prst="rect">
+          <a:prstGeom prst="rect">
             <a:avLst/>
           </a:prstGeom>
         </p:spPr>
@@ -5136,20 +4846,20 @@
         <p:nvPicPr>
           <p:cNvPr id="77" name="Imagen 5"/>
           <p:cNvPicPr>
-            <a:picLocks xmlns:a="http://schemas.openxmlformats.org/drawingml/2006/main" noChangeAspect="1"/>
+            <a:picLocks noChangeAspect="1"/>
           </p:cNvPicPr>
           <p:nvPr/>
         </p:nvPicPr>
         <p:blipFill rotWithShape="1">
-          <a:blip xmlns:r="http://schemas.openxmlformats.org/officeDocument/2006/relationships" xmlns:a="http://schemas.openxmlformats.org/drawingml/2006/main" r:embed="R5b5715c223d345d9"/>
-          <a:stretch xmlns:a="http://schemas.openxmlformats.org/drawingml/2006/main"/>
+          <a:blip r:embed="rId8"/>
+          <a:stretch/>
         </p:blipFill>
         <p:spPr>
-          <a:xfrm xmlns:a="http://schemas.openxmlformats.org/drawingml/2006/main" rot="0" flipH="0" flipV="0">
+          <a:xfrm>
             <a:off x="22612273" y="30003750"/>
             <a:ext cx="8686954" cy="4953000"/>
           </a:xfrm>
-          <a:prstGeom xmlns:a="http://schemas.openxmlformats.org/drawingml/2006/main" prst="rect">
+          <a:prstGeom prst="rect">
             <a:avLst/>
           </a:prstGeom>
         </p:spPr>
@@ -5157,38 +4867,38 @@
       <p:sp>
         <p:nvSpPr>
           <p:cNvPr id="12" name="CuadroTexto 11">
-            <a:extLst xmlns:a="http://schemas.openxmlformats.org/drawingml/2006/main">
+            <a:extLst>
               <a:ext uri="{FF2B5EF4-FFF2-40B4-BE49-F238E27FC236}">
                 <a16:creationId xmlns:a16="http://schemas.microsoft.com/office/drawing/2014/main" id="{D2201B3C-48C5-A591-0B02-8BEEF753F0C1}"/>
               </a:ext>
             </a:extLst>
           </p:cNvPr>
           <p:cNvSpPr>
-            <a:spLocks xmlns:a="http://schemas.openxmlformats.org/drawingml/2006/main" noGrp="1"/>
+            <a:spLocks noGrp="1"/>
           </p:cNvSpPr>
           <p:nvPr/>
         </p:nvSpPr>
         <p:spPr>
-          <a:xfrm xmlns:a="http://schemas.openxmlformats.org/drawingml/2006/main">
+          <a:xfrm>
             <a:off x="22201156" y="41148000"/>
             <a:ext cx="9193911" cy="2571750"/>
           </a:xfrm>
-          <a:prstGeom xmlns:a="http://schemas.openxmlformats.org/drawingml/2006/main" prst="rect">
+          <a:prstGeom prst="rect">
             <a:avLst/>
           </a:prstGeom>
-          <a:solidFill xmlns:a="http://schemas.openxmlformats.org/drawingml/2006/main">
+          <a:solidFill>
             <a:schemeClr val="bg1"/>
           </a:solidFill>
-          <a:ln xmlns:a="http://schemas.openxmlformats.org/drawingml/2006/main">
+          <a:ln>
             <a:noFill/>
           </a:ln>
         </p:spPr>
         <p:txBody>
-          <a:bodyPr xmlns:a="http://schemas.openxmlformats.org/drawingml/2006/main" wrap="square">
+          <a:bodyPr wrap="square">
             <a:spAutoFit/>
           </a:bodyPr>
-          <a:lstStyle xmlns:a="http://schemas.openxmlformats.org/drawingml/2006/main"/>
-          <a:p xmlns:a="http://schemas.openxmlformats.org/drawingml/2006/main">
+          <a:lstStyle/>
+          <a:p>
             <a:pPr>
               <a:buNone/>
             </a:pPr>
@@ -5204,7 +4914,7 @@
               <a:t>6. AGRADECIMIENTOS.</a:t>
             </a:r>
           </a:p>
-          <a:p xmlns:a="http://schemas.openxmlformats.org/drawingml/2006/main">
+          <a:p>
             <a:pPr>
               <a:buNone/>
             </a:pPr>
@@ -5225,33 +4935,33 @@
       <p:sp>
         <p:nvSpPr>
           <p:cNvPr id="26" name="CuadroTexto 25">
-            <a:extLst xmlns:a="http://schemas.openxmlformats.org/drawingml/2006/main">
+            <a:extLst>
               <a:ext uri="{FF2B5EF4-FFF2-40B4-BE49-F238E27FC236}">
                 <a16:creationId xmlns:a16="http://schemas.microsoft.com/office/drawing/2014/main" id="{A3489B49-08AF-B377-36A8-D0A688417E05}"/>
               </a:ext>
             </a:extLst>
           </p:cNvPr>
           <p:cNvSpPr>
-            <a:spLocks xmlns:a="http://schemas.openxmlformats.org/drawingml/2006/main" noGrp="1"/>
+            <a:spLocks noGrp="1"/>
           </p:cNvSpPr>
           <p:nvPr/>
         </p:nvSpPr>
         <p:spPr>
-          <a:xfrm xmlns:a="http://schemas.openxmlformats.org/drawingml/2006/main">
+          <a:xfrm>
             <a:off x="711422" y="28575000"/>
             <a:ext cx="9639014" cy="6858000"/>
           </a:xfrm>
-          <a:prstGeom xmlns:a="http://schemas.openxmlformats.org/drawingml/2006/main" prst="rect">
+          <a:prstGeom prst="rect">
             <a:avLst/>
           </a:prstGeom>
-          <a:noFill xmlns:a="http://schemas.openxmlformats.org/drawingml/2006/main"/>
+          <a:noFill/>
         </p:spPr>
         <p:txBody>
-          <a:bodyPr xmlns:a="http://schemas.openxmlformats.org/drawingml/2006/main" wrap="square">
+          <a:bodyPr wrap="square">
             <a:spAutoFit/>
           </a:bodyPr>
-          <a:lstStyle xmlns:a="http://schemas.openxmlformats.org/drawingml/2006/main"/>
-          <a:p xmlns:a="http://schemas.openxmlformats.org/drawingml/2006/main">
+          <a:lstStyle/>
+          <a:p>
             <a:pPr>
               <a:buNone/>
             </a:pPr>
@@ -5267,7 +4977,7 @@
               <a:t>ALCANCE DEL ESTUDIO.</a:t>
             </a:r>
           </a:p>
-          <a:p xmlns:a="http://schemas.openxmlformats.org/drawingml/2006/main">
+          <a:p>
             <a:pPr>
               <a:buNone/>
             </a:pPr>
@@ -5283,7 +4993,7 @@
               <a:t>• Casos 1D y 2D; el desarrollo 3D queda fuera del alcance.</a:t>
             </a:r>
           </a:p>
-          <a:p xmlns:a="http://schemas.openxmlformats.org/drawingml/2006/main">
+          <a:p>
             <a:pPr>
               <a:buNone/>
             </a:pPr>
@@ -5299,7 +5009,7 @@
               <a:t>• Dominio normalizado Ω = [0,1]², k = 2π y campo complejo en 2D.</a:t>
             </a:r>
           </a:p>
-          <a:p xmlns:a="http://schemas.openxmlformats.org/drawingml/2006/main">
+          <a:p>
             <a:pPr>
               <a:buNone/>
             </a:pPr>
@@ -5320,33 +5030,33 @@
       <p:sp>
         <p:nvSpPr>
           <p:cNvPr id="29" name="CuadroTexto 28">
-            <a:extLst xmlns:a="http://schemas.openxmlformats.org/drawingml/2006/main">
+            <a:extLst>
               <a:ext uri="{FF2B5EF4-FFF2-40B4-BE49-F238E27FC236}">
                 <a16:creationId xmlns:a16="http://schemas.microsoft.com/office/drawing/2014/main" id="{3FDABAB0-D307-2F38-BE52-9303015051B3}"/>
               </a:ext>
             </a:extLst>
           </p:cNvPr>
           <p:cNvSpPr>
-            <a:spLocks xmlns:a="http://schemas.openxmlformats.org/drawingml/2006/main" noGrp="1"/>
+            <a:spLocks noGrp="1"/>
           </p:cNvSpPr>
           <p:nvPr/>
         </p:nvSpPr>
         <p:spPr>
-          <a:xfrm xmlns:a="http://schemas.openxmlformats.org/drawingml/2006/main">
+          <a:xfrm>
             <a:off x="11430953" y="6040088"/>
             <a:ext cx="9689021" cy="2286000"/>
           </a:xfrm>
-          <a:prstGeom xmlns:a="http://schemas.openxmlformats.org/drawingml/2006/main" prst="rect">
+          <a:prstGeom prst="rect">
             <a:avLst/>
           </a:prstGeom>
-          <a:noFill xmlns:a="http://schemas.openxmlformats.org/drawingml/2006/main"/>
+          <a:noFill/>
         </p:spPr>
         <p:txBody>
-          <a:bodyPr xmlns:a="http://schemas.openxmlformats.org/drawingml/2006/main" wrap="square">
+          <a:bodyPr wrap="square">
             <a:spAutoFit/>
           </a:bodyPr>
-          <a:lstStyle xmlns:a="http://schemas.openxmlformats.org/drawingml/2006/main"/>
-          <a:p xmlns:a="http://schemas.openxmlformats.org/drawingml/2006/main">
+          <a:lstStyle/>
+          <a:p>
             <a:pPr>
               <a:buNone/>
             </a:pPr>
@@ -5362,7 +5072,7 @@
               <a:t>FORMULACIÓN.</a:t>
             </a:r>
           </a:p>
-          <a:p xmlns:a="http://schemas.openxmlformats.org/drawingml/2006/main">
+          <a:p>
             <a:pPr>
               <a:buNone/>
             </a:pPr>
@@ -5378,7 +5088,7 @@
               <a:t>Helmholtz: ∇²E + k²E = 0.</a:t>
             </a:r>
           </a:p>
-          <a:p xmlns:a="http://schemas.openxmlformats.org/drawingml/2006/main">
+          <a:p>
             <a:pPr>
               <a:buNone/>
             </a:pPr>
@@ -5400,20 +5110,20 @@
         <p:nvPicPr>
           <p:cNvPr id="81" name="Imagen 23"/>
           <p:cNvPicPr>
-            <a:picLocks xmlns:a="http://schemas.openxmlformats.org/drawingml/2006/main" noChangeAspect="1"/>
+            <a:picLocks noChangeAspect="1"/>
           </p:cNvPicPr>
           <p:nvPr/>
         </p:nvPicPr>
         <p:blipFill>
-          <a:blip xmlns:r="http://schemas.openxmlformats.org/officeDocument/2006/relationships" xmlns:a="http://schemas.openxmlformats.org/drawingml/2006/main" r:embed="R8e1aaedcc5604bf2"/>
-          <a:stretch xmlns:a="http://schemas.openxmlformats.org/drawingml/2006/main"/>
+          <a:blip r:embed="rId9"/>
+          <a:stretch/>
         </p:blipFill>
         <p:spPr>
-          <a:xfrm xmlns:a="http://schemas.openxmlformats.org/drawingml/2006/main" rot="0" flipH="0" flipV="0">
+          <a:xfrm>
             <a:off x="13232750" y="28575000"/>
             <a:ext cx="5967126" cy="4667250"/>
           </a:xfrm>
-          <a:prstGeom xmlns:a="http://schemas.openxmlformats.org/drawingml/2006/main" prst="rect">
+          <a:prstGeom prst="rect">
             <a:avLst/>
           </a:prstGeom>
         </p:spPr>
@@ -5422,20 +5132,20 @@
         <p:nvPicPr>
           <p:cNvPr id="82" name="Imagen 33"/>
           <p:cNvPicPr>
-            <a:picLocks xmlns:a="http://schemas.openxmlformats.org/drawingml/2006/main" noChangeAspect="1"/>
+            <a:picLocks noChangeAspect="1"/>
           </p:cNvPicPr>
           <p:nvPr/>
         </p:nvPicPr>
         <p:blipFill>
-          <a:blip xmlns:r="http://schemas.openxmlformats.org/officeDocument/2006/relationships" xmlns:a="http://schemas.openxmlformats.org/drawingml/2006/main" r:embed="R5c48bdedad444bec"/>
-          <a:stretch xmlns:a="http://schemas.openxmlformats.org/drawingml/2006/main"/>
+          <a:blip r:embed="rId10"/>
+          <a:stretch/>
         </p:blipFill>
         <p:spPr>
-          <a:xfrm xmlns:a="http://schemas.openxmlformats.org/drawingml/2006/main" rot="0" flipH="0" flipV="0">
+          <a:xfrm>
             <a:off x="22288500" y="23866225"/>
             <a:ext cx="9334500" cy="5131301"/>
           </a:xfrm>
-          <a:prstGeom xmlns:a="http://schemas.openxmlformats.org/drawingml/2006/main" prst="rect">
+          <a:prstGeom prst="rect">
             <a:avLst/>
           </a:prstGeom>
         </p:spPr>
@@ -5447,6 +5157,9 @@
       </p:ext>
     </p:extLst>
   </p:cSld>
+  <p:clrMapOvr>
+    <a:masterClrMapping/>
+  </p:clrMapOvr>
 </p:sld>
 </file>
 
@@ -5698,5 +5411,260 @@
       </a:bgFillStyleLst>
     </a:fmtScheme>
   </a:themeElements>
+  <a:objectDefaults/>
+  <a:extraClrSchemeLst/>
+</a:theme>
+</file>
+
+<file path=ppt/theme/theme2.xml><?xml version="1.0" encoding="utf-8"?>
+<a:theme xmlns:a="http://schemas.openxmlformats.org/drawingml/2006/main" name="Tema de Office">
+  <a:themeElements>
+    <a:clrScheme name="Tema de Office">
+      <a:dk1>
+        <a:sysClr val="windowText" lastClr="000000"/>
+      </a:dk1>
+      <a:lt1>
+        <a:sysClr val="window" lastClr="FFFFFF"/>
+      </a:lt1>
+      <a:dk2>
+        <a:srgbClr val="44546A"/>
+      </a:dk2>
+      <a:lt2>
+        <a:srgbClr val="E7E6E6"/>
+      </a:lt2>
+      <a:accent1>
+        <a:srgbClr val="4472C4"/>
+      </a:accent1>
+      <a:accent2>
+        <a:srgbClr val="ED7D31"/>
+      </a:accent2>
+      <a:accent3>
+        <a:srgbClr val="A5A5A5"/>
+      </a:accent3>
+      <a:accent4>
+        <a:srgbClr val="FFC000"/>
+      </a:accent4>
+      <a:accent5>
+        <a:srgbClr val="5B9BD5"/>
+      </a:accent5>
+      <a:accent6>
+        <a:srgbClr val="70AD47"/>
+      </a:accent6>
+      <a:hlink>
+        <a:srgbClr val="0563C1"/>
+      </a:hlink>
+      <a:folHlink>
+        <a:srgbClr val="954F72"/>
+      </a:folHlink>
+    </a:clrScheme>
+    <a:fontScheme name="Tema de Office">
+      <a:majorFont>
+        <a:latin typeface="Calibri Light"/>
+        <a:ea typeface=""/>
+        <a:cs typeface=""/>
+        <a:font script="Jpan" typeface="游ゴシック Light"/>
+        <a:font script="Hang" typeface="맑은 고딕"/>
+        <a:font script="Hans" typeface="等线 Light"/>
+        <a:font script="Hant" typeface="新細明體"/>
+        <a:font script="Arab" typeface="Times New Roman"/>
+        <a:font script="Hebr" typeface="Times New Roman"/>
+        <a:font script="Thai" typeface="Angsana New"/>
+        <a:font script="Ethi" typeface="Nyala"/>
+        <a:font script="Beng" typeface="Vrinda"/>
+        <a:font script="Gujr" typeface="Shruti"/>
+        <a:font script="Khmr" typeface="MoolBoran"/>
+        <a:font script="Knda" typeface="Tunga"/>
+        <a:font script="Guru" typeface="Raavi"/>
+        <a:font script="Cans" typeface="Euphemia"/>
+        <a:font script="Cher" typeface="Plantagenet Cherokee"/>
+        <a:font script="Yiii" typeface="Microsoft Yi Baiti"/>
+        <a:font script="Tibt" typeface="Microsoft Himalaya"/>
+        <a:font script="Thaa" typeface="MV Boli"/>
+        <a:font script="Deva" typeface="Mangal"/>
+        <a:font script="Telu" typeface="Gautami"/>
+        <a:font script="Taml" typeface="Latha"/>
+        <a:font script="Syrc" typeface="Estrangelo Edessa"/>
+        <a:font script="Orya" typeface="Kalinga"/>
+        <a:font script="Mlym" typeface="Kartika"/>
+        <a:font script="Laoo" typeface="DokChampa"/>
+        <a:font script="Sinh" typeface="Iskoola Pota"/>
+        <a:font script="Mong" typeface="Mongolian Baiti"/>
+        <a:font script="Viet" typeface="Times New Roman"/>
+        <a:font script="Uigh" typeface="Microsoft Uighur"/>
+        <a:font script="Geor" typeface="Sylfaen"/>
+      </a:majorFont>
+      <a:minorFont>
+        <a:latin typeface="Calibri"/>
+        <a:ea typeface=""/>
+        <a:cs typeface=""/>
+        <a:font script="Jpan" typeface="游ゴシック"/>
+        <a:font script="Hang" typeface="맑은 고딕"/>
+        <a:font script="Hans" typeface="等线"/>
+        <a:font script="Hant" typeface="新細明體"/>
+        <a:font script="Arab" typeface="Arial"/>
+        <a:font script="Hebr" typeface="Arial"/>
+        <a:font script="Thai" typeface="Cordia New"/>
+        <a:font script="Ethi" typeface="Nyala"/>
+        <a:font script="Beng" typeface="Vrinda"/>
+        <a:font script="Gujr" typeface="Shruti"/>
+        <a:font script="Khmr" typeface="DaunPenh"/>
+        <a:font script="Knda" typeface="Tunga"/>
+        <a:font script="Guru" typeface="Raavi"/>
+        <a:font script="Cans" typeface="Euphemia"/>
+        <a:font script="Cher" typeface="Plantagenet Cherokee"/>
+        <a:font script="Yiii" typeface="Microsoft Yi Baiti"/>
+        <a:font script="Tibt" typeface="Microsoft Himalaya"/>
+        <a:font script="Thaa" typeface="MV Boli"/>
+        <a:font script="Deva" typeface="Mangal"/>
+        <a:font script="Telu" typeface="Gautami"/>
+        <a:font script="Taml" typeface="Latha"/>
+        <a:font script="Syrc" typeface="Estrangelo Edessa"/>
+        <a:font script="Orya" typeface="Kalinga"/>
+        <a:font script="Mlym" typeface="Kartika"/>
+        <a:font script="Laoo" typeface="DokChampa"/>
+        <a:font script="Sinh" typeface="Iskoola Pota"/>
+        <a:font script="Mong" typeface="Mongolian Baiti"/>
+        <a:font script="Viet" typeface="Arial"/>
+        <a:font script="Uigh" typeface="Microsoft Uighur"/>
+        <a:font script="Geor" typeface="Sylfaen"/>
+      </a:minorFont>
+    </a:fontScheme>
+    <a:fmtScheme name="Tema de Office">
+      <a:fillStyleLst>
+        <a:solidFill>
+          <a:schemeClr val="phClr"/>
+        </a:solidFill>
+        <a:gradFill rotWithShape="1">
+          <a:gsLst>
+            <a:gs pos="0">
+              <a:schemeClr val="phClr">
+                <a:tint val="67000"/>
+                <a:lumMod val="110000"/>
+                <a:satMod val="105000"/>
+              </a:schemeClr>
+            </a:gs>
+            <a:gs pos="50000">
+              <a:schemeClr val="phClr">
+                <a:tint val="73000"/>
+                <a:lumMod val="105000"/>
+                <a:satMod val="103000"/>
+              </a:schemeClr>
+            </a:gs>
+            <a:gs pos="100000">
+              <a:schemeClr val="phClr">
+                <a:tint val="81000"/>
+                <a:lumMod val="105000"/>
+                <a:satMod val="109000"/>
+              </a:schemeClr>
+            </a:gs>
+          </a:gsLst>
+          <a:lin ang="5400000" scaled="0"/>
+        </a:gradFill>
+        <a:gradFill rotWithShape="1">
+          <a:gsLst>
+            <a:gs pos="0">
+              <a:schemeClr val="phClr">
+                <a:tint val="94000"/>
+                <a:lumMod val="102000"/>
+                <a:satMod val="103000"/>
+              </a:schemeClr>
+            </a:gs>
+            <a:gs pos="50000">
+              <a:schemeClr val="phClr">
+                <a:shade val="100000"/>
+                <a:lumMod val="100000"/>
+                <a:satMod val="110000"/>
+              </a:schemeClr>
+            </a:gs>
+            <a:gs pos="100000">
+              <a:schemeClr val="phClr">
+                <a:shade val="78000"/>
+                <a:lumMod val="99000"/>
+                <a:satMod val="120000"/>
+              </a:schemeClr>
+            </a:gs>
+          </a:gsLst>
+          <a:lin ang="5400000" scaled="0"/>
+        </a:gradFill>
+      </a:fillStyleLst>
+      <a:lnStyleLst>
+        <a:ln w="6350">
+          <a:solidFill>
+            <a:schemeClr val="phClr"/>
+          </a:solidFill>
+          <a:prstDash val="solid"/>
+        </a:ln>
+        <a:ln w="12700">
+          <a:solidFill>
+            <a:schemeClr val="phClr"/>
+          </a:solidFill>
+          <a:prstDash val="solid"/>
+        </a:ln>
+        <a:ln w="19050">
+          <a:solidFill>
+            <a:schemeClr val="phClr"/>
+          </a:solidFill>
+          <a:prstDash val="solid"/>
+        </a:ln>
+      </a:lnStyleLst>
+      <a:effectStyleLst>
+        <a:effectStyle>
+          <a:effectLst/>
+        </a:effectStyle>
+        <a:effectStyle>
+          <a:effectLst/>
+        </a:effectStyle>
+        <a:effectStyle>
+          <a:effectLst>
+            <a:outerShdw blurRad="57150" dist="19050" dir="5400000" algn="ctr" rotWithShape="0">
+              <a:srgbClr val="000000">
+                <a:alpha val="63000"/>
+              </a:srgbClr>
+            </a:outerShdw>
+          </a:effectLst>
+        </a:effectStyle>
+      </a:effectStyleLst>
+      <a:bgFillStyleLst>
+        <a:solidFill>
+          <a:schemeClr val="phClr"/>
+        </a:solidFill>
+        <a:solidFill>
+          <a:schemeClr val="phClr">
+            <a:tint val="95000"/>
+            <a:satMod val="170000"/>
+          </a:schemeClr>
+        </a:solidFill>
+        <a:gradFill rotWithShape="1">
+          <a:gsLst>
+            <a:gs pos="0">
+              <a:schemeClr val="phClr">
+                <a:tint val="93000"/>
+                <a:shade val="98000"/>
+                <a:lumMod val="102000"/>
+                <a:satMod val="150000"/>
+              </a:schemeClr>
+            </a:gs>
+            <a:gs pos="50000">
+              <a:schemeClr val="phClr">
+                <a:tint val="98000"/>
+                <a:shade val="90000"/>
+                <a:lumMod val="103000"/>
+                <a:satMod val="130000"/>
+              </a:schemeClr>
+            </a:gs>
+            <a:gs pos="100000">
+              <a:schemeClr val="phClr">
+                <a:shade val="63000"/>
+                <a:satMod val="120000"/>
+              </a:schemeClr>
+            </a:gs>
+          </a:gsLst>
+          <a:lin ang="5400000" scaled="0"/>
+        </a:gradFill>
+      </a:bgFillStyleLst>
+    </a:fmtScheme>
+  </a:themeElements>
+  <a:objectDefaults/>
+  <a:extraClrSchemeLst/>
 </a:theme>
 </file>